--- a/Demo/TACOW - Parnas Tables Part II (Xcode 27).pptx
+++ b/Demo/TACOW - Parnas Tables Part II (Xcode 27).pptx
@@ -19,9 +19,10 @@
     <p:sldId id="267" r:id="rId13"/>
     <p:sldId id="268" r:id="rId14"/>
     <p:sldId id="269" r:id="rId15"/>
+    <p:sldId id="270" r:id="rId16"/>
   </p:sldIdLst>
   <p:notesMasterIdLst>
-    <p:notesMasterId r:id="rId16"/>
+    <p:notesMasterId r:id="rId17"/>
   </p:notesMasterIdLst>
   <p:sldSz cx="12192000" cy="6858000"/>
   <p:notesSz cx="6858000" cy="12192000"/>
@@ -603,7 +604,7 @@
           <a:p>
             <a:r>
               <a:rPr lang="en-US" dirty="0"/>
-              <a:t>This is the choreography — five prompts. One: paste the brief, get the table. Two, the highlighted step: verify completeness and disjointness together. Three: generate the model, one case per row. Four: generate the SwiftUI app around it. Five: run it and drive the simulator — insert coins, hit the sold-out item, buy something, cancel for a refund. If any step misbehaves, I have a working reference implementation in the repo to paste. The point of the talk is the table, not the demo gods.</a:t>
+              <a:t>Now the tool. Xcode 27's headline is agentic coding — the assistant plans features, edits across files, runs tests, and drives the simulator. The feature that makes OUR thesis land: planning is first-class. The agent's plan shows up as an EDITABLE MARKDOWN ARTIFACT you approve before it writes a line of code. That is our reviewed Parnas table. You pick the model — Anthropic, OpenAI, Google — and Apple even ships its own SwiftUI agent skills. Verify feature names against your actual build before the talk.</a:t>
             </a:r>
             <a:endParaRPr lang="en-US" dirty="0"/>
           </a:p>
@@ -691,7 +692,7 @@
           <a:p>
             <a:r>
               <a:rPr lang="en-US" dirty="0"/>
-              <a:t>The load-bearing idea. The generated switch has one case per table row and NO default. Live demo move: delete a case and watch Xcode refuse to build — the compiler is now enforcing the table. And when the spec changes, exactly one case changes. Code and reviewable artifact stay in lockstep. This is why 'the agent generated it' is trustworthy rather than scary: the compiler is checking the agent's work against the table.</a:t>
+              <a:t>This is the choreography — five prompts. One: paste the brief, get the table. Two, the highlighted step: verify completeness and disjointness together. Three: generate the model, one case per row. Four: generate the SwiftUI app around it. Five: run it and drive the simulator — insert coins, hit the sold-out item, buy something, cancel for a refund. If any step misbehaves, I have a working reference implementation in the repo to paste. The point of the talk is the table, not the demo gods.</a:t>
             </a:r>
             <a:endParaRPr lang="en-US" dirty="0"/>
           </a:p>
@@ -779,7 +780,7 @@
           <a:p>
             <a:r>
               <a:rPr lang="en-US" dirty="0"/>
-              <a:t>This is the moment that proves the whole thesis. I give the agent a new requirement — a 5% convenience fee — and I tell it: update the TABLE first, show me the changed rows, THEN update the code. Watch the chain: I edit the spec, the guard on rows 5 and 6 moves, the agent updates the transition function to match, the compiler guarantees the switch is still exhaustive, and the app just works. I changed a rule, not the code. That's the payoff — the table is the source of truth and the fast path.</a:t>
+              <a:t>The load-bearing idea. The generated switch has one case per table row and NO default. Live demo move: delete a case and watch Xcode refuse to build — the compiler is now enforcing the table. And when the spec changes, exactly one case changes. Code and reviewable artifact stay in lockstep. This is why 'the agent generated it' is trustworthy rather than scary: the compiler is checking the agent's work against the table.</a:t>
             </a:r>
             <a:endParaRPr lang="en-US" dirty="0"/>
           </a:p>
@@ -867,7 +868,7 @@
           <a:p>
             <a:r>
               <a:rPr lang="en-US" dirty="0"/>
-              <a:t>Four things to take home. One: specify first, in a table — reviewable by non-programmers, precise enough to generate from. Two: make the agent verify completeness and disjointness — that's where it adds the most value, not just typing code. Three: let the compiler enforce it with an exhaustive, default-free switch. Four: when requirements change, change the rule, not the code. That's the entire method in four lines.</a:t>
+              <a:t>This is the moment that proves the whole thesis. I give the agent a new requirement — a 5% convenience fee — and I tell it: update the TABLE first, show me the changed rows, THEN update the code. Watch the chain: I edit the spec, the guard on rows 5 and 6 moves, the agent updates the transition function to match, the compiler guarantees the switch is still exhaustive, and the app just works. I changed a rule, not the code. That's the payoff — the table is the source of truth and the fast path.</a:t>
             </a:r>
             <a:endParaRPr lang="en-US" dirty="0"/>
           </a:p>
@@ -955,7 +956,7 @@
           <a:p>
             <a:r>
               <a:rPr lang="en-US" dirty="0"/>
-              <a:t>To close: tables in, verified specs out, and apps that match by construction. If your team wants to apply Parnas tables and formal methods for real, I do consulting and training — mhp@flixel.com. Thanks, tacow. Questions?</a:t>
+              <a:t>Four things to take home. One: specify first, in a table — reviewable by non-programmers, precise enough to generate from. Two: make the agent verify completeness and disjointness — that's where it adds the most value, not just typing code. Three: let the compiler enforce it with an exhaustive, default-free switch. Four: when requirements change, change the rule, not the code. That's the entire method in four lines.</a:t>
             </a:r>
             <a:endParaRPr lang="en-US" dirty="0"/>
           </a:p>
@@ -979,6 +980,94 @@
             <a:fld id="{F7021451-1387-4CA6-816F-3879F97B5CBC}" type="slidenum">
               <a:rPr lang="en-US"/>
               <a:t>14</a:t>
+            </a:fld>
+            <a:endParaRPr lang="en-US"/>
+          </a:p>
+        </p:txBody>
+      </p:sp>
+    </p:spTree>
+    <p:extLst>
+      <p:ext uri="{BB962C8B-B14F-4D97-AF65-F5344CB8AC3E}">
+        <p14:creationId xmlns:p14="http://schemas.microsoft.com/office/powerpoint/2010/main" val="1024086991"/>
+      </p:ext>
+    </p:extLst>
+  </p:cSld>
+  <p:clrMapOvr>
+    <a:masterClrMapping/>
+  </p:clrMapOvr>
+</p:notes>
+</file>
+
+<file path=ppt/notesSlides/notesSlide15.xml><?xml version="1.0" encoding="utf-8"?>
+<p:notes xmlns:a="http://schemas.openxmlformats.org/drawingml/2006/main" xmlns:r="http://schemas.openxmlformats.org/officeDocument/2006/relationships" xmlns:p="http://schemas.openxmlformats.org/presentationml/2006/main">
+  <p:cSld>
+    <p:spTree>
+      <p:nvGrpSpPr>
+        <p:cNvPr id="1" name=""/>
+        <p:cNvGrpSpPr/>
+        <p:nvPr/>
+      </p:nvGrpSpPr>
+      <p:grpSpPr>
+        <a:xfrm>
+          <a:off x="0" y="0"/>
+          <a:ext cx="0" cy="0"/>
+          <a:chOff x="0" y="0"/>
+          <a:chExt cx="0" cy="0"/>
+        </a:xfrm>
+      </p:grpSpPr>
+      <p:sp>
+        <p:nvSpPr>
+          <p:cNvPr id="2" name="Slide Image Placeholder 1"/>
+          <p:cNvSpPr>
+            <a:spLocks noGrp="1" noRot="1" noChangeAspect="1"/>
+          </p:cNvSpPr>
+          <p:nvPr>
+            <p:ph type="sldImg"/>
+          </p:nvPr>
+        </p:nvSpPr>
+        <p:spPr/>
+      </p:sp>
+      <p:sp>
+        <p:nvSpPr>
+          <p:cNvPr id="3" name="Notes Placeholder 2"/>
+          <p:cNvSpPr>
+            <a:spLocks noGrp="1"/>
+          </p:cNvSpPr>
+          <p:nvPr>
+            <p:ph type="body" idx="1"/>
+          </p:nvPr>
+        </p:nvSpPr>
+        <p:spPr/>
+        <p:txBody>
+          <a:bodyPr/>
+          <a:lstStyle/>
+          <a:p>
+            <a:r>
+              <a:rPr lang="en-US" dirty="0"/>
+              <a:t>To close: tables in, verified specs out, and apps that match by construction. If your team wants to apply Parnas tables and formal methods for real, I do consulting and training — mhp@flixel.com. Thanks, tacow. Questions?</a:t>
+            </a:r>
+            <a:endParaRPr lang="en-US" dirty="0"/>
+          </a:p>
+        </p:txBody>
+      </p:sp>
+      <p:sp>
+        <p:nvSpPr>
+          <p:cNvPr id="4" name="Slide Number Placeholder 3"/>
+          <p:cNvSpPr>
+            <a:spLocks noGrp="1"/>
+          </p:cNvSpPr>
+          <p:nvPr>
+            <p:ph type="sldNum" sz="quarter" idx="10"/>
+          </p:nvPr>
+        </p:nvSpPr>
+        <p:spPr/>
+        <p:txBody>
+          <a:bodyPr/>
+          <a:lstStyle/>
+          <a:p>
+            <a:fld id="{F7021451-1387-4CA6-816F-3879F97B5CBC}" type="slidenum">
+              <a:rPr lang="en-US"/>
+              <a:t>15</a:t>
             </a:fld>
             <a:endParaRPr lang="en-US"/>
           </a:p>
@@ -1043,7 +1132,7 @@
           <a:p>
             <a:r>
               <a:rPr lang="en-US" dirty="0"/>
-              <a:t>60-second recap. The November thesis in three beats: (1) specify complex logic as a Parnas table; (2) map each row to a switch case and let Swift's exhaustive matching prove completeness; (3) so the thing you review is the TABLE, not the code. We ended on an order-processing state machine — because state machines fall out of tables naturally. That's our jumping-off point today.</a:t>
+              <a:t>Everyone's shipping AI-generated code and quietly hoping it's right. Generation got cheap; trust didn't. That's the motivation for this whole talk. My claim: stop reviewing the OUTPUT and start reviewing the SPEC. Generation is fast but confidently wrong — plausible code, subtle bugs. You cannot out-review a firehose of diffs, but anyone can check a table. And if the table is complete and disjoint and the switch is exhaustive, the COMPILER — not vibes — certifies the agent got it right. We're not making the agent write more; we're making it impossible for it to be silently wrong.</a:t>
             </a:r>
             <a:endParaRPr lang="en-US" dirty="0"/>
           </a:p>
@@ -1131,7 +1220,7 @@
           <a:p>
             <a:r>
               <a:rPr lang="en-US" dirty="0"/>
-              <a:t>Here's the twist for Part II. Last time WE wrote the table and WE wrote the code. Today we do neither by hand. We co-design the table with the AI assistant, we verify it together, and we let Xcode 27's agent generate the app. The table is still the source of truth — the agent plus the compiler keep the code honest to it.</a:t>
+              <a:t>60-second recap. The November thesis in three beats: (1) specify complex logic as a Parnas table; (2) map each row to a switch case and let Swift's exhaustive matching prove completeness; (3) so the thing you review is the TABLE, not the code. We ended on an order-processing state machine — because state machines fall out of tables naturally. That's our jumping-off point today.</a:t>
             </a:r>
             <a:endParaRPr lang="en-US" dirty="0"/>
           </a:p>
@@ -1219,7 +1308,7 @@
           <a:p>
             <a:r>
               <a:rPr lang="en-US" dirty="0"/>
-              <a:t>We deliberately swap away from the 7-state order machine to something we can build live. A vending machine is the sweet spot. Three reasons: it builds fast — one screen; it has REAL guard conditions, 'enough credit' and 'in stock', which is exactly the three-dimensional State-by-Event-by-Guard input tables were made for; and it maps to an obvious UI, so when the agent generates it the audience can check the output against what they already expected. Swap in any small machine — media player, ticket flow — the structure is identical.</a:t>
+              <a:t>Here's the twist for Part II. Last time WE wrote the table and WE wrote the code. Today we do neither by hand. We co-design the table with the AI assistant, we verify it together, and we let Xcode 27's agent generate the app. The table is still the source of truth — the agent plus the compiler keep the code honest to it.</a:t>
             </a:r>
             <a:endParaRPr lang="en-US" dirty="0"/>
           </a:p>
@@ -1307,7 +1396,7 @@
           <a:p>
             <a:r>
               <a:rPr lang="en-US" dirty="0"/>
-              <a:t>On stage this is the first prompt: I paste this paragraph to the assistant and say 'produce a Parnas table — do NOT write Swift yet.' Point out to the audience: this is genuinely all a domain expert needs to say. Everyone in the room understood a vending machine. The engineering is turning informal English into a complete, disjoint specification.</a:t>
+              <a:t>We deliberately swap away from the 7-state order machine to something we can build live. A vending machine is the sweet spot. Three reasons: it builds fast — one screen; it has REAL guard conditions, 'enough credit' and 'in stock', which is exactly the three-dimensional State-by-Event-by-Guard input tables were made for; and it maps to an obvious UI, so when the agent generates it the audience can check the output against what they already expected. Swap in any small machine — media player, ticket flow — the structure is identical.</a:t>
             </a:r>
             <a:endParaRPr lang="en-US" dirty="0"/>
           </a:p>
@@ -1395,7 +1484,7 @@
           <a:p>
             <a:r>
               <a:rPr lang="en-US" dirty="0"/>
-              <a:t>Here is the artifact we co-built. It's a Mealy machine — outputs depend on state AND input. Walk the columns: current state, event, guard, new state, outputs. Nine rows. Draw their eyes to the highlighted rows 5, 6 and 7: same state, same event, three different outcomes, separated only by the guard. Green = can buy, amber = not enough money, red = sold out. That guard split is the whole reason we reach for a table.</a:t>
+              <a:t>On stage this is the first prompt: I paste this paragraph to the assistant and say 'produce a Parnas table — do NOT write Swift yet.' Point out to the audience: this is genuinely all a domain expert needs to say. Everyone in the room understood a vending machine. The engineering is turning informal English into a complete, disjoint specification.</a:t>
             </a:r>
             <a:endParaRPr lang="en-US" dirty="0"/>
           </a:p>
@@ -1483,7 +1572,7 @@
           <a:p>
             <a:r>
               <a:rPr lang="en-US" dirty="0"/>
-              <a:t>Slow down here — this is the intellectual core. I ask the agent: 'is this complete and disjoint? What's missing?' Completeness means every State-by-Event cell is covered. Build the matrix. The empty cells — ignore coins while dispensing, dispenseComplete is a no-op elsewhere — are DECISIONS we make explicit, not things we forgot. And because we'll use an exhaustive switch with no default, the compiler forces us to name every one. 'We forgot a case' becomes impossible.</a:t>
+              <a:t>Here is the artifact we co-built. It's a Mealy machine — outputs depend on state AND input. Walk the columns: current state, event, guard, new state, outputs. Nine rows. Draw their eyes to the highlighted rows 5, 6 and 7: same state, same event, three different outcomes, separated only by the guard. Green = can buy, amber = not enough money, red = sold out. That guard split is the whole reason we reach for a table.</a:t>
             </a:r>
             <a:endParaRPr lang="en-US" dirty="0"/>
           </a:p>
@@ -1571,7 +1660,7 @@
           <a:p>
             <a:r>
               <a:rPr lang="en-US" dirty="0"/>
-              <a:t>Second verification: disjointness. Those three rows overlap on state and event — so they're only correct if the guards partition the space with no gap and no overlap. In-stock-and-can-afford, in-stock-but-short, and out-of-stock cover every possibility exactly once. This is the property a flowchart literally cannot prove, because it buries the split in nested ifs. The table lets you point at the partition. Callback: this reviewed table is exactly what becomes the plan artifact in Xcode 27.</a:t>
+              <a:t>Slow down here — this is the intellectual core. I ask the agent: 'is this complete and disjoint? What's missing?' Completeness means every State-by-Event cell is covered. Build the matrix. The empty cells — ignore coins while dispensing, dispenseComplete is a no-op elsewhere — are DECISIONS we make explicit, not things we forgot. And because we'll use an exhaustive switch with no default, the compiler forces us to name every one. 'We forgot a case' becomes impossible.</a:t>
             </a:r>
             <a:endParaRPr lang="en-US" dirty="0"/>
           </a:p>
@@ -1659,7 +1748,7 @@
           <a:p>
             <a:r>
               <a:rPr lang="en-US" dirty="0"/>
-              <a:t>Now the tool. Xcode 27's headline is agentic coding — the assistant plans features, edits across files, runs tests, and drives the simulator. The feature that makes OUR thesis land: planning is first-class. The agent's plan shows up as an EDITABLE MARKDOWN ARTIFACT you approve before it writes a line of code. That is our reviewed Parnas table. You pick the model — Anthropic, OpenAI, Google — and Apple even ships its own SwiftUI agent skills. Verify feature names against your actual build before the talk.</a:t>
+              <a:t>Second verification: disjointness. Those three rows overlap on state and event — so they're only correct if the guards partition the space with no gap and no overlap. In-stock-and-can-afford, in-stock-but-short, and out-of-stock cover every possibility exactly once. This is the property a flowchart literally cannot prove, because it buries the split in nested ifs. The table lets you point at the partition. Callback: this reviewed table is exactly what becomes the plan artifact in Xcode 27.</a:t>
             </a:r>
             <a:endParaRPr lang="en-US" dirty="0"/>
           </a:p>
@@ -2258,7 +2347,7 @@
     <p:bg>
       <p:bgPr>
         <a:solidFill>
-          <a:srgbClr val="F6F7FC"/>
+          <a:srgbClr val="141937"/>
         </a:solidFill>
       </p:bgPr>
     </p:bg>
@@ -2284,8 +2373,8 @@
         </p:nvSpPr>
         <p:spPr>
           <a:xfrm>
-            <a:off x="548640" y="411480"/>
-            <a:ext cx="11064240" cy="274320"/>
+            <a:off x="548640" y="640080"/>
+            <a:ext cx="10058400" cy="365760"/>
           </a:xfrm>
           <a:prstGeom prst="rect">
             <a:avLst/>
@@ -2297,11 +2386,11 @@
           <a:bodyPr wrap="square" lIns="0" tIns="0" rIns="0" bIns="0" rtlCol="0" anchor="ctr"/>
           <a:lstStyle/>
           <a:p>
-            <a:pPr algn="l" indent="0" marL="0">
-              <a:buNone/>
-            </a:pPr>
-            <a:r>
-              <a:rPr lang="en-US" sz="1200" b="1" spc="200" kern="0" dirty="0">
+            <a:pPr indent="0" marL="0">
+              <a:buNone/>
+            </a:pPr>
+            <a:r>
+              <a:rPr lang="en-US" sz="1400" b="1" spc="300" kern="0" dirty="0">
                 <a:solidFill>
                   <a:srgbClr val="F7A32B"/>
                 </a:solidFill>
@@ -2309,9 +2398,9 @@
                 <a:ea typeface="Calibri" pitchFamily="34" charset="-122"/>
                 <a:cs typeface="Calibri" pitchFamily="34" charset="-120"/>
               </a:rPr>
-              <a:t>THE LIVE DEMO</a:t>
-            </a:r>
-            <a:endParaRPr lang="en-US" sz="1200" dirty="0"/>
+              <a:t>XCODE 27 · AGENTIC CODING</a:t>
+            </a:r>
+            <a:endParaRPr lang="en-US" sz="1400" dirty="0"/>
           </a:p>
         </p:txBody>
       </p:sp>
@@ -2323,8 +2412,8 @@
         </p:nvSpPr>
         <p:spPr>
           <a:xfrm>
-            <a:off x="548640" y="658368"/>
-            <a:ext cx="11064240" cy="777240"/>
+            <a:off x="548640" y="1005840"/>
+            <a:ext cx="10972800" cy="1005840"/>
           </a:xfrm>
           <a:prstGeom prst="rect">
             <a:avLst/>
@@ -2336,21 +2425,24 @@
           <a:bodyPr wrap="square" lIns="0" tIns="0" rIns="0" bIns="0" rtlCol="0" anchor="ctr"/>
           <a:lstStyle/>
           <a:p>
-            <a:pPr algn="l" indent="0" marL="0">
-              <a:buNone/>
-            </a:pPr>
-            <a:r>
-              <a:rPr lang="en-US" sz="3400" b="1" dirty="0">
-                <a:solidFill>
-                  <a:srgbClr val="1E2761"/>
+            <a:pPr indent="0" marL="0">
+              <a:lnSpc>
+                <a:spcPct val="102000"/>
+              </a:lnSpc>
+              <a:buNone/>
+            </a:pPr>
+            <a:r>
+              <a:rPr lang="en-US" sz="3200" b="1" dirty="0">
+                <a:solidFill>
+                  <a:srgbClr val="FFFFFF"/>
                 </a:solidFill>
                 <a:latin typeface="Cambria" pitchFamily="34" charset="0"/>
                 <a:ea typeface="Cambria" pitchFamily="34" charset="-122"/>
                 <a:cs typeface="Cambria" pitchFamily="34" charset="-120"/>
               </a:rPr>
-              <a:t>Five prompts, one running app</a:t>
-            </a:r>
-            <a:endParaRPr lang="en-US" sz="3400" dirty="0"/>
+              <a:t>The plan is an editable artifact you approve before any code</a:t>
+            </a:r>
+            <a:endParaRPr lang="en-US" sz="3200" dirty="0"/>
           </a:p>
         </p:txBody>
       </p:sp>
@@ -2362,69 +2454,35 @@
         </p:nvSpPr>
         <p:spPr>
           <a:xfrm>
-            <a:off x="548640" y="2011680"/>
-            <a:ext cx="1993392" cy="3108960"/>
+            <a:off x="548640" y="2286000"/>
+            <a:ext cx="5349240" cy="1417320"/>
           </a:xfrm>
           <a:prstGeom prst="roundRect">
             <a:avLst>
-              <a:gd name="adj" fmla="val 4587"/>
+              <a:gd name="adj" fmla="val 6452"/>
             </a:avLst>
           </a:prstGeom>
           <a:solidFill>
-            <a:srgbClr val="FFFFFF"/>
+            <a:srgbClr val="1E2554"/>
           </a:solidFill>
           <a:ln w="12700">
             <a:solidFill>
-              <a:srgbClr val="E2E6F5"/>
+              <a:srgbClr val="343C74"/>
             </a:solidFill>
             <a:prstDash val="solid"/>
           </a:ln>
-          <a:effectLst>
-            <a:outerShdw sx="100000" sy="100000" kx="0" ky="0" algn="bl" rotWithShape="0" blurRad="101600" dist="38100" dir="5400000">
-              <a:srgbClr val="9AA3C8">
-                <a:alpha val="35000"/>
-              </a:srgbClr>
-            </a:outerShdw>
-          </a:effectLst>
-        </p:spPr>
-      </p:sp>
-      <p:sp>
-        <p:nvSpPr>
-          <p:cNvPr id="5" name="Shape 3"/>
-          <p:cNvSpPr/>
-          <p:nvPr/>
-        </p:nvSpPr>
-        <p:spPr>
-          <a:xfrm>
-            <a:off x="1316736" y="2286000"/>
-            <a:ext cx="457200" cy="457200"/>
-          </a:xfrm>
-          <a:prstGeom prst="ellipse">
-            <a:avLst/>
-          </a:prstGeom>
-          <a:solidFill>
-            <a:srgbClr val="1E2761"/>
-          </a:solidFill>
-          <a:ln/>
-          <a:effectLst>
-            <a:outerShdw sx="100000" sy="100000" kx="0" ky="0" algn="bl" rotWithShape="0" blurRad="101600" dist="38100" dir="5400000">
-              <a:srgbClr val="9AA3C8">
-                <a:alpha val="35000"/>
-              </a:srgbClr>
-            </a:outerShdw>
-          </a:effectLst>
-        </p:spPr>
-      </p:sp>
-      <p:sp>
-        <p:nvSpPr>
-          <p:cNvPr id="6" name="Text 4"/>
-          <p:cNvSpPr/>
-          <p:nvPr/>
-        </p:nvSpPr>
-        <p:spPr>
-          <a:xfrm>
-            <a:off x="1316736" y="2286000"/>
-            <a:ext cx="457200" cy="457200"/>
+        </p:spPr>
+      </p:sp>
+      <p:sp>
+        <p:nvSpPr>
+          <p:cNvPr id="5" name="Text 3"/>
+          <p:cNvSpPr/>
+          <p:nvPr/>
+        </p:nvSpPr>
+        <p:spPr>
+          <a:xfrm>
+            <a:off x="822960" y="2468880"/>
+            <a:ext cx="4800600" cy="411480"/>
           </a:xfrm>
           <a:prstGeom prst="rect">
             <a:avLst/>
@@ -2436,34 +2494,34 @@
           <a:bodyPr wrap="square" lIns="0" tIns="0" rIns="0" bIns="0" rtlCol="0" anchor="ctr"/>
           <a:lstStyle/>
           <a:p>
-            <a:pPr algn="ctr" indent="0" marL="0">
-              <a:buNone/>
-            </a:pPr>
-            <a:r>
-              <a:rPr lang="en-US" sz="1600" b="1" dirty="0">
-                <a:solidFill>
-                  <a:srgbClr val="FFFFFF"/>
+            <a:pPr indent="0" marL="0">
+              <a:buNone/>
+            </a:pPr>
+            <a:r>
+              <a:rPr lang="en-US" sz="1800" b="1" dirty="0">
+                <a:solidFill>
+                  <a:srgbClr val="CADCFC"/>
                 </a:solidFill>
                 <a:latin typeface="Cambria" pitchFamily="34" charset="0"/>
                 <a:ea typeface="Cambria" pitchFamily="34" charset="-122"/>
                 <a:cs typeface="Cambria" pitchFamily="34" charset="-120"/>
               </a:rPr>
-              <a:t>1</a:t>
-            </a:r>
-            <a:endParaRPr lang="en-US" sz="1600" dirty="0"/>
-          </a:p>
-        </p:txBody>
-      </p:sp>
-      <p:sp>
-        <p:nvSpPr>
-          <p:cNvPr id="7" name="Text 5"/>
-          <p:cNvSpPr/>
-          <p:nvPr/>
-        </p:nvSpPr>
-        <p:spPr>
-          <a:xfrm>
-            <a:off x="685800" y="2880360"/>
-            <a:ext cx="1719072" cy="640080"/>
+              <a:t>Agents take actions</a:t>
+            </a:r>
+            <a:endParaRPr lang="en-US" sz="1800" dirty="0"/>
+          </a:p>
+        </p:txBody>
+      </p:sp>
+      <p:sp>
+        <p:nvSpPr>
+          <p:cNvPr id="6" name="Text 4"/>
+          <p:cNvSpPr/>
+          <p:nvPr/>
+        </p:nvSpPr>
+        <p:spPr>
+          <a:xfrm>
+            <a:off x="822960" y="2907792"/>
+            <a:ext cx="4800600" cy="685800"/>
           </a:xfrm>
           <a:prstGeom prst="rect">
             <a:avLst/>
@@ -2475,34 +2533,103 @@
           <a:bodyPr wrap="square" lIns="0" tIns="0" rIns="0" bIns="0" rtlCol="0" anchor="ctr"/>
           <a:lstStyle/>
           <a:p>
-            <a:pPr algn="ctr" indent="0" marL="0">
-              <a:buNone/>
-            </a:pPr>
-            <a:r>
-              <a:rPr lang="en-US" sz="1550" b="1" dirty="0">
-                <a:solidFill>
-                  <a:srgbClr val="1E2761"/>
+            <a:pPr indent="0" marL="0">
+              <a:lnSpc>
+                <a:spcPct val="105000"/>
+              </a:lnSpc>
+              <a:buNone/>
+            </a:pPr>
+            <a:r>
+              <a:rPr lang="en-US" sz="1400" dirty="0">
+                <a:solidFill>
+                  <a:srgbClr val="C7CDEC"/>
+                </a:solidFill>
+                <a:latin typeface="Calibri" pitchFamily="34" charset="0"/>
+                <a:ea typeface="Calibri" pitchFamily="34" charset="-122"/>
+                <a:cs typeface="Calibri" pitchFamily="34" charset="-120"/>
+              </a:rPr>
+              <a:t>Plan features, edit across files, run tests, drive the simulator — not just autocomplete.</a:t>
+            </a:r>
+            <a:endParaRPr lang="en-US" sz="1400" dirty="0"/>
+          </a:p>
+        </p:txBody>
+      </p:sp>
+      <p:sp>
+        <p:nvSpPr>
+          <p:cNvPr id="7" name="Shape 5"/>
+          <p:cNvSpPr/>
+          <p:nvPr/>
+        </p:nvSpPr>
+        <p:spPr>
+          <a:xfrm>
+            <a:off x="6263640" y="2286000"/>
+            <a:ext cx="5349240" cy="1417320"/>
+          </a:xfrm>
+          <a:prstGeom prst="roundRect">
+            <a:avLst>
+              <a:gd name="adj" fmla="val 6452"/>
+            </a:avLst>
+          </a:prstGeom>
+          <a:solidFill>
+            <a:srgbClr val="1E2554"/>
+          </a:solidFill>
+          <a:ln w="12700">
+            <a:solidFill>
+              <a:srgbClr val="343C74"/>
+            </a:solidFill>
+            <a:prstDash val="solid"/>
+          </a:ln>
+        </p:spPr>
+      </p:sp>
+      <p:sp>
+        <p:nvSpPr>
+          <p:cNvPr id="8" name="Text 6"/>
+          <p:cNvSpPr/>
+          <p:nvPr/>
+        </p:nvSpPr>
+        <p:spPr>
+          <a:xfrm>
+            <a:off x="6537960" y="2468880"/>
+            <a:ext cx="4800600" cy="411480"/>
+          </a:xfrm>
+          <a:prstGeom prst="rect">
+            <a:avLst/>
+          </a:prstGeom>
+          <a:noFill/>
+          <a:ln/>
+        </p:spPr>
+        <p:txBody>
+          <a:bodyPr wrap="square" lIns="0" tIns="0" rIns="0" bIns="0" rtlCol="0" anchor="ctr"/>
+          <a:lstStyle/>
+          <a:p>
+            <a:pPr indent="0" marL="0">
+              <a:buNone/>
+            </a:pPr>
+            <a:r>
+              <a:rPr lang="en-US" sz="1800" b="1" dirty="0">
+                <a:solidFill>
+                  <a:srgbClr val="CADCFC"/>
                 </a:solidFill>
                 <a:latin typeface="Cambria" pitchFamily="34" charset="0"/>
                 <a:ea typeface="Cambria" pitchFamily="34" charset="-122"/>
                 <a:cs typeface="Cambria" pitchFamily="34" charset="-120"/>
               </a:rPr>
-              <a:t>Brief → table</a:t>
-            </a:r>
-            <a:endParaRPr lang="en-US" sz="1550" dirty="0"/>
-          </a:p>
-        </p:txBody>
-      </p:sp>
-      <p:sp>
-        <p:nvSpPr>
-          <p:cNvPr id="8" name="Text 6"/>
-          <p:cNvSpPr/>
-          <p:nvPr/>
-        </p:nvSpPr>
-        <p:spPr>
-          <a:xfrm>
-            <a:off x="685800" y="3520440"/>
-            <a:ext cx="1719072" cy="1463040"/>
+              <a:t>Plan = Markdown you edit</a:t>
+            </a:r>
+            <a:endParaRPr lang="en-US" sz="1800" dirty="0"/>
+          </a:p>
+        </p:txBody>
+      </p:sp>
+      <p:sp>
+        <p:nvSpPr>
+          <p:cNvPr id="9" name="Text 7"/>
+          <p:cNvSpPr/>
+          <p:nvPr/>
+        </p:nvSpPr>
+        <p:spPr>
+          <a:xfrm>
+            <a:off x="6537960" y="2907792"/>
+            <a:ext cx="4800600" cy="685800"/>
           </a:xfrm>
           <a:prstGeom prst="rect">
             <a:avLst/>
@@ -2514,86 +2641,52 @@
           <a:bodyPr wrap="square" lIns="0" tIns="0" rIns="0" bIns="0" rtlCol="0" anchor="ctr"/>
           <a:lstStyle/>
           <a:p>
-            <a:pPr algn="ctr" indent="0" marL="0">
+            <a:pPr indent="0" marL="0">
               <a:lnSpc>
                 <a:spcPct val="105000"/>
               </a:lnSpc>
               <a:buNone/>
             </a:pPr>
             <a:r>
-              <a:rPr lang="en-US" sz="1250" dirty="0">
-                <a:solidFill>
-                  <a:srgbClr val="1C2340"/>
+              <a:rPr lang="en-US" sz="1400" dirty="0">
+                <a:solidFill>
+                  <a:srgbClr val="C7CDEC"/>
                 </a:solidFill>
                 <a:latin typeface="Calibri" pitchFamily="34" charset="0"/>
                 <a:ea typeface="Calibri" pitchFamily="34" charset="-122"/>
                 <a:cs typeface="Calibri" pitchFamily="34" charset="-120"/>
               </a:rPr>
-              <a:t>Paste the plain-English brief. Ask for a Parnas table — no Swift yet.</a:t>
-            </a:r>
-            <a:endParaRPr lang="en-US" sz="1250" dirty="0"/>
-          </a:p>
-        </p:txBody>
-      </p:sp>
-      <p:sp>
-        <p:nvSpPr>
-          <p:cNvPr id="9" name="Shape 7"/>
-          <p:cNvSpPr/>
-          <p:nvPr/>
-        </p:nvSpPr>
-        <p:spPr>
-          <a:xfrm>
-            <a:off x="2816352" y="2011680"/>
-            <a:ext cx="1993392" cy="3108960"/>
+              <a:t>The agent's plan appears as an editable artifact. You review and adjust it before it acts.</a:t>
+            </a:r>
+            <a:endParaRPr lang="en-US" sz="1400" dirty="0"/>
+          </a:p>
+        </p:txBody>
+      </p:sp>
+      <p:sp>
+        <p:nvSpPr>
+          <p:cNvPr id="10" name="Shape 8"/>
+          <p:cNvSpPr/>
+          <p:nvPr/>
+        </p:nvSpPr>
+        <p:spPr>
+          <a:xfrm>
+            <a:off x="548640" y="3977640"/>
+            <a:ext cx="5349240" cy="1417320"/>
           </a:xfrm>
           <a:prstGeom prst="roundRect">
             <a:avLst>
-              <a:gd name="adj" fmla="val 4587"/>
+              <a:gd name="adj" fmla="val 6452"/>
             </a:avLst>
           </a:prstGeom>
           <a:solidFill>
-            <a:srgbClr val="FFFFFF"/>
+            <a:srgbClr val="1E2554"/>
           </a:solidFill>
           <a:ln w="12700">
             <a:solidFill>
-              <a:srgbClr val="E2E6F5"/>
+              <a:srgbClr val="343C74"/>
             </a:solidFill>
             <a:prstDash val="solid"/>
           </a:ln>
-          <a:effectLst>
-            <a:outerShdw sx="100000" sy="100000" kx="0" ky="0" algn="bl" rotWithShape="0" blurRad="101600" dist="38100" dir="5400000">
-              <a:srgbClr val="9AA3C8">
-                <a:alpha val="35000"/>
-              </a:srgbClr>
-            </a:outerShdw>
-          </a:effectLst>
-        </p:spPr>
-      </p:sp>
-      <p:sp>
-        <p:nvSpPr>
-          <p:cNvPr id="10" name="Shape 8"/>
-          <p:cNvSpPr/>
-          <p:nvPr/>
-        </p:nvSpPr>
-        <p:spPr>
-          <a:xfrm>
-            <a:off x="3584448" y="2286000"/>
-            <a:ext cx="457200" cy="457200"/>
-          </a:xfrm>
-          <a:prstGeom prst="ellipse">
-            <a:avLst/>
-          </a:prstGeom>
-          <a:solidFill>
-            <a:srgbClr val="F7A32B"/>
-          </a:solidFill>
-          <a:ln/>
-          <a:effectLst>
-            <a:outerShdw sx="100000" sy="100000" kx="0" ky="0" algn="bl" rotWithShape="0" blurRad="101600" dist="38100" dir="5400000">
-              <a:srgbClr val="9AA3C8">
-                <a:alpha val="35000"/>
-              </a:srgbClr>
-            </a:outerShdw>
-          </a:effectLst>
         </p:spPr>
       </p:sp>
       <p:sp>
@@ -2604,8 +2697,8 @@
         </p:nvSpPr>
         <p:spPr>
           <a:xfrm>
-            <a:off x="3584448" y="2286000"/>
-            <a:ext cx="457200" cy="457200"/>
+            <a:off x="822960" y="4160520"/>
+            <a:ext cx="4800600" cy="411480"/>
           </a:xfrm>
           <a:prstGeom prst="rect">
             <a:avLst/>
@@ -2617,21 +2710,21 @@
           <a:bodyPr wrap="square" lIns="0" tIns="0" rIns="0" bIns="0" rtlCol="0" anchor="ctr"/>
           <a:lstStyle/>
           <a:p>
-            <a:pPr algn="ctr" indent="0" marL="0">
-              <a:buNone/>
-            </a:pPr>
-            <a:r>
-              <a:rPr lang="en-US" sz="1600" b="1" dirty="0">
-                <a:solidFill>
-                  <a:srgbClr val="1E2761"/>
+            <a:pPr indent="0" marL="0">
+              <a:buNone/>
+            </a:pPr>
+            <a:r>
+              <a:rPr lang="en-US" sz="1800" b="1" dirty="0">
+                <a:solidFill>
+                  <a:srgbClr val="CADCFC"/>
                 </a:solidFill>
                 <a:latin typeface="Cambria" pitchFamily="34" charset="0"/>
                 <a:ea typeface="Cambria" pitchFamily="34" charset="-122"/>
                 <a:cs typeface="Cambria" pitchFamily="34" charset="-120"/>
               </a:rPr>
-              <a:t>2</a:t>
-            </a:r>
-            <a:endParaRPr lang="en-US" sz="1600" dirty="0"/>
+              <a:t>Changes &amp; artifacts are visible</a:t>
+            </a:r>
+            <a:endParaRPr lang="en-US" sz="1800" dirty="0"/>
           </a:p>
         </p:txBody>
       </p:sp>
@@ -2643,8 +2736,8 @@
         </p:nvSpPr>
         <p:spPr>
           <a:xfrm>
-            <a:off x="2953512" y="2880360"/>
-            <a:ext cx="1719072" cy="640080"/>
+            <a:off x="822960" y="4599432"/>
+            <a:ext cx="4800600" cy="685800"/>
           </a:xfrm>
           <a:prstGeom prst="rect">
             <a:avLst/>
@@ -2656,34 +2749,103 @@
           <a:bodyPr wrap="square" lIns="0" tIns="0" rIns="0" bIns="0" rtlCol="0" anchor="ctr"/>
           <a:lstStyle/>
           <a:p>
-            <a:pPr algn="ctr" indent="0" marL="0">
-              <a:buNone/>
-            </a:pPr>
-            <a:r>
-              <a:rPr lang="en-US" sz="1550" b="1" dirty="0">
-                <a:solidFill>
-                  <a:srgbClr val="1E2761"/>
+            <a:pPr indent="0" marL="0">
+              <a:lnSpc>
+                <a:spcPct val="105000"/>
+              </a:lnSpc>
+              <a:buNone/>
+            </a:pPr>
+            <a:r>
+              <a:rPr lang="en-US" sz="1400" dirty="0">
+                <a:solidFill>
+                  <a:srgbClr val="C7CDEC"/>
+                </a:solidFill>
+                <a:latin typeface="Calibri" pitchFamily="34" charset="0"/>
+                <a:ea typeface="Calibri" pitchFamily="34" charset="-122"/>
+                <a:cs typeface="Calibri" pitchFamily="34" charset="-120"/>
+              </a:rPr>
+              <a:t>The editor shows exactly what the agent changed — “verify the diff” is a real moment.</a:t>
+            </a:r>
+            <a:endParaRPr lang="en-US" sz="1400" dirty="0"/>
+          </a:p>
+        </p:txBody>
+      </p:sp>
+      <p:sp>
+        <p:nvSpPr>
+          <p:cNvPr id="13" name="Shape 11"/>
+          <p:cNvSpPr/>
+          <p:nvPr/>
+        </p:nvSpPr>
+        <p:spPr>
+          <a:xfrm>
+            <a:off x="6263640" y="3977640"/>
+            <a:ext cx="5349240" cy="1417320"/>
+          </a:xfrm>
+          <a:prstGeom prst="roundRect">
+            <a:avLst>
+              <a:gd name="adj" fmla="val 6452"/>
+            </a:avLst>
+          </a:prstGeom>
+          <a:solidFill>
+            <a:srgbClr val="1E2554"/>
+          </a:solidFill>
+          <a:ln w="12700">
+            <a:solidFill>
+              <a:srgbClr val="343C74"/>
+            </a:solidFill>
+            <a:prstDash val="solid"/>
+          </a:ln>
+        </p:spPr>
+      </p:sp>
+      <p:sp>
+        <p:nvSpPr>
+          <p:cNvPr id="14" name="Text 12"/>
+          <p:cNvSpPr/>
+          <p:nvPr/>
+        </p:nvSpPr>
+        <p:spPr>
+          <a:xfrm>
+            <a:off x="6537960" y="4160520"/>
+            <a:ext cx="4800600" cy="411480"/>
+          </a:xfrm>
+          <a:prstGeom prst="rect">
+            <a:avLst/>
+          </a:prstGeom>
+          <a:noFill/>
+          <a:ln/>
+        </p:spPr>
+        <p:txBody>
+          <a:bodyPr wrap="square" lIns="0" tIns="0" rIns="0" bIns="0" rtlCol="0" anchor="ctr"/>
+          <a:lstStyle/>
+          <a:p>
+            <a:pPr indent="0" marL="0">
+              <a:buNone/>
+            </a:pPr>
+            <a:r>
+              <a:rPr lang="en-US" sz="1800" b="1" dirty="0">
+                <a:solidFill>
+                  <a:srgbClr val="CADCFC"/>
                 </a:solidFill>
                 <a:latin typeface="Cambria" pitchFamily="34" charset="0"/>
                 <a:ea typeface="Cambria" pitchFamily="34" charset="-122"/>
                 <a:cs typeface="Cambria" pitchFamily="34" charset="-120"/>
               </a:rPr>
-              <a:t>Verify together</a:t>
-            </a:r>
-            <a:endParaRPr lang="en-US" sz="1550" dirty="0"/>
-          </a:p>
-        </p:txBody>
-      </p:sp>
-      <p:sp>
-        <p:nvSpPr>
-          <p:cNvPr id="13" name="Text 11"/>
-          <p:cNvSpPr/>
-          <p:nvPr/>
-        </p:nvSpPr>
-        <p:spPr>
-          <a:xfrm>
-            <a:off x="2953512" y="3520440"/>
-            <a:ext cx="1719072" cy="1463040"/>
+              <a:t>Your model, Apple's skills</a:t>
+            </a:r>
+            <a:endParaRPr lang="en-US" sz="1800" dirty="0"/>
+          </a:p>
+        </p:txBody>
+      </p:sp>
+      <p:sp>
+        <p:nvSpPr>
+          <p:cNvPr id="15" name="Text 13"/>
+          <p:cNvSpPr/>
+          <p:nvPr/>
+        </p:nvSpPr>
+        <p:spPr>
+          <a:xfrm>
+            <a:off x="6537960" y="4599432"/>
+            <a:ext cx="4800600" cy="685800"/>
           </a:xfrm>
           <a:prstGeom prst="rect">
             <a:avLst/>
@@ -2695,87 +2857,26 @@
           <a:bodyPr wrap="square" lIns="0" tIns="0" rIns="0" bIns="0" rtlCol="0" anchor="ctr"/>
           <a:lstStyle/>
           <a:p>
-            <a:pPr algn="ctr" indent="0" marL="0">
+            <a:pPr indent="0" marL="0">
               <a:lnSpc>
                 <a:spcPct val="105000"/>
               </a:lnSpc>
               <a:buNone/>
             </a:pPr>
             <a:r>
-              <a:rPr lang="en-US" sz="1250" dirty="0">
-                <a:solidFill>
-                  <a:srgbClr val="1C2340"/>
+              <a:rPr lang="en-US" sz="1400" dirty="0">
+                <a:solidFill>
+                  <a:srgbClr val="C7CDEC"/>
                 </a:solidFill>
                 <a:latin typeface="Calibri" pitchFamily="34" charset="0"/>
                 <a:ea typeface="Calibri" pitchFamily="34" charset="-122"/>
                 <a:cs typeface="Calibri" pitchFamily="34" charset="-120"/>
               </a:rPr>
-              <a:t>Completeness matrix + disjointness. Fix anything missing.</a:t>
-            </a:r>
-            <a:endParaRPr lang="en-US" sz="1250" dirty="0"/>
-          </a:p>
-        </p:txBody>
-      </p:sp>
-      <p:sp>
-        <p:nvSpPr>
-          <p:cNvPr id="14" name="Shape 12"/>
-          <p:cNvSpPr/>
-          <p:nvPr/>
-        </p:nvSpPr>
-        <p:spPr>
-          <a:xfrm>
-            <a:off x="5084064" y="2011680"/>
-            <a:ext cx="1993392" cy="3108960"/>
-          </a:xfrm>
-          <a:prstGeom prst="roundRect">
-            <a:avLst>
-              <a:gd name="adj" fmla="val 4587"/>
-            </a:avLst>
-          </a:prstGeom>
-          <a:solidFill>
-            <a:srgbClr val="FFFFFF"/>
-          </a:solidFill>
-          <a:ln w="12700">
-            <a:solidFill>
-              <a:srgbClr val="E2E6F5"/>
-            </a:solidFill>
-            <a:prstDash val="solid"/>
-          </a:ln>
-          <a:effectLst>
-            <a:outerShdw sx="100000" sy="100000" kx="0" ky="0" algn="bl" rotWithShape="0" blurRad="101600" dist="38100" dir="5400000">
-              <a:srgbClr val="9AA3C8">
-                <a:alpha val="35000"/>
-              </a:srgbClr>
-            </a:outerShdw>
-          </a:effectLst>
-        </p:spPr>
-      </p:sp>
-      <p:sp>
-        <p:nvSpPr>
-          <p:cNvPr id="15" name="Shape 13"/>
-          <p:cNvSpPr/>
-          <p:nvPr/>
-        </p:nvSpPr>
-        <p:spPr>
-          <a:xfrm>
-            <a:off x="5852160" y="2286000"/>
-            <a:ext cx="457200" cy="457200"/>
-          </a:xfrm>
-          <a:prstGeom prst="ellipse">
-            <a:avLst/>
-          </a:prstGeom>
-          <a:solidFill>
-            <a:srgbClr val="1E2761"/>
-          </a:solidFill>
-          <a:ln/>
-          <a:effectLst>
-            <a:outerShdw sx="100000" sy="100000" kx="0" ky="0" algn="bl" rotWithShape="0" blurRad="101600" dist="38100" dir="5400000">
-              <a:srgbClr val="9AA3C8">
-                <a:alpha val="35000"/>
-              </a:srgbClr>
-            </a:outerShdw>
-          </a:effectLst>
-        </p:spPr>
+              <a:t>Anthropic / OpenAI / Google, plus Apple's bundled SwiftUI agent skills.</a:t>
+            </a:r>
+            <a:endParaRPr lang="en-US" sz="1400" dirty="0"/>
+          </a:p>
+        </p:txBody>
       </p:sp>
       <p:sp>
         <p:nvSpPr>
@@ -2785,8 +2886,8 @@
         </p:nvSpPr>
         <p:spPr>
           <a:xfrm>
-            <a:off x="5852160" y="2286000"/>
-            <a:ext cx="457200" cy="457200"/>
+            <a:off x="548640" y="5989320"/>
+            <a:ext cx="10972800" cy="457200"/>
           </a:xfrm>
           <a:prstGeom prst="rect">
             <a:avLst/>
@@ -2798,517 +2899,21 @@
           <a:bodyPr wrap="square" lIns="0" tIns="0" rIns="0" bIns="0" rtlCol="0" anchor="ctr"/>
           <a:lstStyle/>
           <a:p>
-            <a:pPr algn="ctr" indent="0" marL="0">
-              <a:buNone/>
-            </a:pPr>
-            <a:r>
-              <a:rPr lang="en-US" sz="1600" b="1" dirty="0">
-                <a:solidFill>
-                  <a:srgbClr val="FFFFFF"/>
-                </a:solidFill>
-                <a:latin typeface="Cambria" pitchFamily="34" charset="0"/>
-                <a:ea typeface="Cambria" pitchFamily="34" charset="-122"/>
-                <a:cs typeface="Cambria" pitchFamily="34" charset="-120"/>
-              </a:rPr>
-              <a:t>3</a:t>
-            </a:r>
-            <a:endParaRPr lang="en-US" sz="1600" dirty="0"/>
-          </a:p>
-        </p:txBody>
-      </p:sp>
-      <p:sp>
-        <p:nvSpPr>
-          <p:cNvPr id="17" name="Text 15"/>
-          <p:cNvSpPr/>
-          <p:nvPr/>
-        </p:nvSpPr>
-        <p:spPr>
-          <a:xfrm>
-            <a:off x="5221224" y="2880360"/>
-            <a:ext cx="1719072" cy="640080"/>
-          </a:xfrm>
-          <a:prstGeom prst="rect">
-            <a:avLst/>
-          </a:prstGeom>
-          <a:noFill/>
-          <a:ln/>
-        </p:spPr>
-        <p:txBody>
-          <a:bodyPr wrap="square" lIns="0" tIns="0" rIns="0" bIns="0" rtlCol="0" anchor="ctr"/>
-          <a:lstStyle/>
-          <a:p>
-            <a:pPr algn="ctr" indent="0" marL="0">
-              <a:buNone/>
-            </a:pPr>
-            <a:r>
-              <a:rPr lang="en-US" sz="1550" b="1" dirty="0">
-                <a:solidFill>
-                  <a:srgbClr val="1E2761"/>
-                </a:solidFill>
-                <a:latin typeface="Cambria" pitchFamily="34" charset="0"/>
-                <a:ea typeface="Cambria" pitchFamily="34" charset="-122"/>
-                <a:cs typeface="Cambria" pitchFamily="34" charset="-120"/>
-              </a:rPr>
-              <a:t>Generate the model</a:t>
-            </a:r>
-            <a:endParaRPr lang="en-US" sz="1550" dirty="0"/>
-          </a:p>
-        </p:txBody>
-      </p:sp>
-      <p:sp>
-        <p:nvSpPr>
-          <p:cNvPr id="18" name="Text 16"/>
-          <p:cNvSpPr/>
-          <p:nvPr/>
-        </p:nvSpPr>
-        <p:spPr>
-          <a:xfrm>
-            <a:off x="5221224" y="3520440"/>
-            <a:ext cx="1719072" cy="1463040"/>
-          </a:xfrm>
-          <a:prstGeom prst="rect">
-            <a:avLst/>
-          </a:prstGeom>
-          <a:noFill/>
-          <a:ln/>
-        </p:spPr>
-        <p:txBody>
-          <a:bodyPr wrap="square" lIns="0" tIns="0" rIns="0" bIns="0" rtlCol="0" anchor="ctr"/>
-          <a:lstStyle/>
-          <a:p>
-            <a:pPr algn="ctr" indent="0" marL="0">
-              <a:lnSpc>
-                <a:spcPct val="105000"/>
-              </a:lnSpc>
-              <a:buNone/>
-            </a:pPr>
-            <a:r>
-              <a:rPr lang="en-US" sz="1250" dirty="0">
-                <a:solidFill>
-                  <a:srgbClr val="1C2340"/>
+            <a:pPr indent="0" marL="0">
+              <a:buNone/>
+            </a:pPr>
+            <a:r>
+              <a:rPr lang="en-US" sz="1700" i="1" dirty="0">
+                <a:solidFill>
+                  <a:srgbClr val="F7A32B"/>
                 </a:solidFill>
                 <a:latin typeface="Calibri" pitchFamily="34" charset="0"/>
                 <a:ea typeface="Calibri" pitchFamily="34" charset="-122"/>
                 <a:cs typeface="Calibri" pitchFamily="34" charset="-120"/>
               </a:rPr>
-              <a:t>One switch case per row. Exhaustive, no default.</a:t>
-            </a:r>
-            <a:endParaRPr lang="en-US" sz="1250" dirty="0"/>
-          </a:p>
-        </p:txBody>
-      </p:sp>
-      <p:sp>
-        <p:nvSpPr>
-          <p:cNvPr id="19" name="Shape 17"/>
-          <p:cNvSpPr/>
-          <p:nvPr/>
-        </p:nvSpPr>
-        <p:spPr>
-          <a:xfrm>
-            <a:off x="7351776" y="2011680"/>
-            <a:ext cx="1993392" cy="3108960"/>
-          </a:xfrm>
-          <a:prstGeom prst="roundRect">
-            <a:avLst>
-              <a:gd name="adj" fmla="val 4587"/>
-            </a:avLst>
-          </a:prstGeom>
-          <a:solidFill>
-            <a:srgbClr val="FFFFFF"/>
-          </a:solidFill>
-          <a:ln w="12700">
-            <a:solidFill>
-              <a:srgbClr val="E2E6F5"/>
-            </a:solidFill>
-            <a:prstDash val="solid"/>
-          </a:ln>
-          <a:effectLst>
-            <a:outerShdw sx="100000" sy="100000" kx="0" ky="0" algn="bl" rotWithShape="0" blurRad="101600" dist="38100" dir="5400000">
-              <a:srgbClr val="9AA3C8">
-                <a:alpha val="35000"/>
-              </a:srgbClr>
-            </a:outerShdw>
-          </a:effectLst>
-        </p:spPr>
-      </p:sp>
-      <p:sp>
-        <p:nvSpPr>
-          <p:cNvPr id="20" name="Shape 18"/>
-          <p:cNvSpPr/>
-          <p:nvPr/>
-        </p:nvSpPr>
-        <p:spPr>
-          <a:xfrm>
-            <a:off x="8119872" y="2286000"/>
-            <a:ext cx="457200" cy="457200"/>
-          </a:xfrm>
-          <a:prstGeom prst="ellipse">
-            <a:avLst/>
-          </a:prstGeom>
-          <a:solidFill>
-            <a:srgbClr val="1E2761"/>
-          </a:solidFill>
-          <a:ln/>
-          <a:effectLst>
-            <a:outerShdw sx="100000" sy="100000" kx="0" ky="0" algn="bl" rotWithShape="0" blurRad="101600" dist="38100" dir="5400000">
-              <a:srgbClr val="9AA3C8">
-                <a:alpha val="35000"/>
-              </a:srgbClr>
-            </a:outerShdw>
-          </a:effectLst>
-        </p:spPr>
-      </p:sp>
-      <p:sp>
-        <p:nvSpPr>
-          <p:cNvPr id="21" name="Text 19"/>
-          <p:cNvSpPr/>
-          <p:nvPr/>
-        </p:nvSpPr>
-        <p:spPr>
-          <a:xfrm>
-            <a:off x="8119872" y="2286000"/>
-            <a:ext cx="457200" cy="457200"/>
-          </a:xfrm>
-          <a:prstGeom prst="rect">
-            <a:avLst/>
-          </a:prstGeom>
-          <a:noFill/>
-          <a:ln/>
-        </p:spPr>
-        <p:txBody>
-          <a:bodyPr wrap="square" lIns="0" tIns="0" rIns="0" bIns="0" rtlCol="0" anchor="ctr"/>
-          <a:lstStyle/>
-          <a:p>
-            <a:pPr algn="ctr" indent="0" marL="0">
-              <a:buNone/>
-            </a:pPr>
-            <a:r>
-              <a:rPr lang="en-US" sz="1600" b="1" dirty="0">
-                <a:solidFill>
-                  <a:srgbClr val="FFFFFF"/>
-                </a:solidFill>
-                <a:latin typeface="Cambria" pitchFamily="34" charset="0"/>
-                <a:ea typeface="Cambria" pitchFamily="34" charset="-122"/>
-                <a:cs typeface="Cambria" pitchFamily="34" charset="-120"/>
-              </a:rPr>
-              <a:t>4</a:t>
-            </a:r>
-            <a:endParaRPr lang="en-US" sz="1600" dirty="0"/>
-          </a:p>
-        </p:txBody>
-      </p:sp>
-      <p:sp>
-        <p:nvSpPr>
-          <p:cNvPr id="22" name="Text 20"/>
-          <p:cNvSpPr/>
-          <p:nvPr/>
-        </p:nvSpPr>
-        <p:spPr>
-          <a:xfrm>
-            <a:off x="7488936" y="2880360"/>
-            <a:ext cx="1719072" cy="640080"/>
-          </a:xfrm>
-          <a:prstGeom prst="rect">
-            <a:avLst/>
-          </a:prstGeom>
-          <a:noFill/>
-          <a:ln/>
-        </p:spPr>
-        <p:txBody>
-          <a:bodyPr wrap="square" lIns="0" tIns="0" rIns="0" bIns="0" rtlCol="0" anchor="ctr"/>
-          <a:lstStyle/>
-          <a:p>
-            <a:pPr algn="ctr" indent="0" marL="0">
-              <a:buNone/>
-            </a:pPr>
-            <a:r>
-              <a:rPr lang="en-US" sz="1550" b="1" dirty="0">
-                <a:solidFill>
-                  <a:srgbClr val="1E2761"/>
-                </a:solidFill>
-                <a:latin typeface="Cambria" pitchFamily="34" charset="0"/>
-                <a:ea typeface="Cambria" pitchFamily="34" charset="-122"/>
-                <a:cs typeface="Cambria" pitchFamily="34" charset="-120"/>
-              </a:rPr>
-              <a:t>Generate the app</a:t>
-            </a:r>
-            <a:endParaRPr lang="en-US" sz="1550" dirty="0"/>
-          </a:p>
-        </p:txBody>
-      </p:sp>
-      <p:sp>
-        <p:nvSpPr>
-          <p:cNvPr id="23" name="Text 21"/>
-          <p:cNvSpPr/>
-          <p:nvPr/>
-        </p:nvSpPr>
-        <p:spPr>
-          <a:xfrm>
-            <a:off x="7488936" y="3520440"/>
-            <a:ext cx="1719072" cy="1463040"/>
-          </a:xfrm>
-          <a:prstGeom prst="rect">
-            <a:avLst/>
-          </a:prstGeom>
-          <a:noFill/>
-          <a:ln/>
-        </p:spPr>
-        <p:txBody>
-          <a:bodyPr wrap="square" lIns="0" tIns="0" rIns="0" bIns="0" rtlCol="0" anchor="ctr"/>
-          <a:lstStyle/>
-          <a:p>
-            <a:pPr algn="ctr" indent="0" marL="0">
-              <a:lnSpc>
-                <a:spcPct val="105000"/>
-              </a:lnSpc>
-              <a:buNone/>
-            </a:pPr>
-            <a:r>
-              <a:rPr lang="en-US" sz="1250" dirty="0">
-                <a:solidFill>
-                  <a:srgbClr val="1C2340"/>
-                </a:solidFill>
-                <a:latin typeface="Calibri" pitchFamily="34" charset="0"/>
-                <a:ea typeface="Calibri" pitchFamily="34" charset="-122"/>
-                <a:cs typeface="Calibri" pitchFamily="34" charset="-120"/>
-              </a:rPr>
-              <a:t>SwiftUI screen sends events; state only changes via transition().</a:t>
-            </a:r>
-            <a:endParaRPr lang="en-US" sz="1250" dirty="0"/>
-          </a:p>
-        </p:txBody>
-      </p:sp>
-      <p:sp>
-        <p:nvSpPr>
-          <p:cNvPr id="24" name="Shape 22"/>
-          <p:cNvSpPr/>
-          <p:nvPr/>
-        </p:nvSpPr>
-        <p:spPr>
-          <a:xfrm>
-            <a:off x="9619488" y="2011680"/>
-            <a:ext cx="1993392" cy="3108960"/>
-          </a:xfrm>
-          <a:prstGeom prst="roundRect">
-            <a:avLst>
-              <a:gd name="adj" fmla="val 4587"/>
-            </a:avLst>
-          </a:prstGeom>
-          <a:solidFill>
-            <a:srgbClr val="FFFFFF"/>
-          </a:solidFill>
-          <a:ln w="12700">
-            <a:solidFill>
-              <a:srgbClr val="E2E6F5"/>
-            </a:solidFill>
-            <a:prstDash val="solid"/>
-          </a:ln>
-          <a:effectLst>
-            <a:outerShdw sx="100000" sy="100000" kx="0" ky="0" algn="bl" rotWithShape="0" blurRad="101600" dist="38100" dir="5400000">
-              <a:srgbClr val="9AA3C8">
-                <a:alpha val="35000"/>
-              </a:srgbClr>
-            </a:outerShdw>
-          </a:effectLst>
-        </p:spPr>
-      </p:sp>
-      <p:sp>
-        <p:nvSpPr>
-          <p:cNvPr id="25" name="Shape 23"/>
-          <p:cNvSpPr/>
-          <p:nvPr/>
-        </p:nvSpPr>
-        <p:spPr>
-          <a:xfrm>
-            <a:off x="10387584" y="2286000"/>
-            <a:ext cx="457200" cy="457200"/>
-          </a:xfrm>
-          <a:prstGeom prst="ellipse">
-            <a:avLst/>
-          </a:prstGeom>
-          <a:solidFill>
-            <a:srgbClr val="1E2761"/>
-          </a:solidFill>
-          <a:ln/>
-          <a:effectLst>
-            <a:outerShdw sx="100000" sy="100000" kx="0" ky="0" algn="bl" rotWithShape="0" blurRad="101600" dist="38100" dir="5400000">
-              <a:srgbClr val="9AA3C8">
-                <a:alpha val="35000"/>
-              </a:srgbClr>
-            </a:outerShdw>
-          </a:effectLst>
-        </p:spPr>
-      </p:sp>
-      <p:sp>
-        <p:nvSpPr>
-          <p:cNvPr id="26" name="Text 24"/>
-          <p:cNvSpPr/>
-          <p:nvPr/>
-        </p:nvSpPr>
-        <p:spPr>
-          <a:xfrm>
-            <a:off x="10387584" y="2286000"/>
-            <a:ext cx="457200" cy="457200"/>
-          </a:xfrm>
-          <a:prstGeom prst="rect">
-            <a:avLst/>
-          </a:prstGeom>
-          <a:noFill/>
-          <a:ln/>
-        </p:spPr>
-        <p:txBody>
-          <a:bodyPr wrap="square" lIns="0" tIns="0" rIns="0" bIns="0" rtlCol="0" anchor="ctr"/>
-          <a:lstStyle/>
-          <a:p>
-            <a:pPr algn="ctr" indent="0" marL="0">
-              <a:buNone/>
-            </a:pPr>
-            <a:r>
-              <a:rPr lang="en-US" sz="1600" b="1" dirty="0">
-                <a:solidFill>
-                  <a:srgbClr val="FFFFFF"/>
-                </a:solidFill>
-                <a:latin typeface="Cambria" pitchFamily="34" charset="0"/>
-                <a:ea typeface="Cambria" pitchFamily="34" charset="-122"/>
-                <a:cs typeface="Cambria" pitchFamily="34" charset="-120"/>
-              </a:rPr>
-              <a:t>5</a:t>
-            </a:r>
-            <a:endParaRPr lang="en-US" sz="1600" dirty="0"/>
-          </a:p>
-        </p:txBody>
-      </p:sp>
-      <p:sp>
-        <p:nvSpPr>
-          <p:cNvPr id="27" name="Text 25"/>
-          <p:cNvSpPr/>
-          <p:nvPr/>
-        </p:nvSpPr>
-        <p:spPr>
-          <a:xfrm>
-            <a:off x="9756648" y="2880360"/>
-            <a:ext cx="1719072" cy="640080"/>
-          </a:xfrm>
-          <a:prstGeom prst="rect">
-            <a:avLst/>
-          </a:prstGeom>
-          <a:noFill/>
-          <a:ln/>
-        </p:spPr>
-        <p:txBody>
-          <a:bodyPr wrap="square" lIns="0" tIns="0" rIns="0" bIns="0" rtlCol="0" anchor="ctr"/>
-          <a:lstStyle/>
-          <a:p>
-            <a:pPr algn="ctr" indent="0" marL="0">
-              <a:buNone/>
-            </a:pPr>
-            <a:r>
-              <a:rPr lang="en-US" sz="1550" b="1" dirty="0">
-                <a:solidFill>
-                  <a:srgbClr val="1E2761"/>
-                </a:solidFill>
-                <a:latin typeface="Cambria" pitchFamily="34" charset="0"/>
-                <a:ea typeface="Cambria" pitchFamily="34" charset="-122"/>
-                <a:cs typeface="Cambria" pitchFamily="34" charset="-120"/>
-              </a:rPr>
-              <a:t>Run it</a:t>
-            </a:r>
-            <a:endParaRPr lang="en-US" sz="1550" dirty="0"/>
-          </a:p>
-        </p:txBody>
-      </p:sp>
-      <p:sp>
-        <p:nvSpPr>
-          <p:cNvPr id="28" name="Text 26"/>
-          <p:cNvSpPr/>
-          <p:nvPr/>
-        </p:nvSpPr>
-        <p:spPr>
-          <a:xfrm>
-            <a:off x="9756648" y="3520440"/>
-            <a:ext cx="1719072" cy="1463040"/>
-          </a:xfrm>
-          <a:prstGeom prst="rect">
-            <a:avLst/>
-          </a:prstGeom>
-          <a:noFill/>
-          <a:ln/>
-        </p:spPr>
-        <p:txBody>
-          <a:bodyPr wrap="square" lIns="0" tIns="0" rIns="0" bIns="0" rtlCol="0" anchor="ctr"/>
-          <a:lstStyle/>
-          <a:p>
-            <a:pPr algn="ctr" indent="0" marL="0">
-              <a:lnSpc>
-                <a:spcPct val="105000"/>
-              </a:lnSpc>
-              <a:buNone/>
-            </a:pPr>
-            <a:r>
-              <a:rPr lang="en-US" sz="1250" dirty="0">
-                <a:solidFill>
-                  <a:srgbClr val="1C2340"/>
-                </a:solidFill>
-                <a:latin typeface="Calibri" pitchFamily="34" charset="0"/>
-                <a:ea typeface="Calibri" pitchFamily="34" charset="-122"/>
-                <a:cs typeface="Calibri" pitchFamily="34" charset="-120"/>
-              </a:rPr>
-              <a:t>Coins, sold-out, dispense + change, cancel + refund — live in the simulator.</a:t>
-            </a:r>
-            <a:endParaRPr lang="en-US" sz="1250" dirty="0"/>
-          </a:p>
-        </p:txBody>
-      </p:sp>
-      <p:sp>
-        <p:nvSpPr>
-          <p:cNvPr id="29" name="Text 27"/>
-          <p:cNvSpPr/>
-          <p:nvPr/>
-        </p:nvSpPr>
-        <p:spPr>
-          <a:xfrm>
-            <a:off x="548640" y="5349240"/>
-            <a:ext cx="11064240" cy="457200"/>
-          </a:xfrm>
-          <a:prstGeom prst="rect">
-            <a:avLst/>
-          </a:prstGeom>
-          <a:noFill/>
-          <a:ln/>
-        </p:spPr>
-        <p:txBody>
-          <a:bodyPr wrap="square" lIns="0" tIns="0" rIns="0" bIns="0" rtlCol="0" anchor="ctr"/>
-          <a:lstStyle/>
-          <a:p>
-            <a:pPr indent="0" marL="0">
-              <a:buNone/>
-            </a:pPr>
-            <a:r>
-              <a:rPr lang="en-US" sz="1400" b="1" dirty="0">
-                <a:solidFill>
-                  <a:srgbClr val="1E2761"/>
-                </a:solidFill>
-                <a:latin typeface="Calibri" pitchFamily="34" charset="0"/>
-                <a:ea typeface="Calibri" pitchFamily="34" charset="-122"/>
-                <a:cs typeface="Calibri" pitchFamily="34" charset="-120"/>
-              </a:rPr>
-              <a:t>Stage insurance: </a:t>
-            </a:r>
-            <a:pPr indent="0" marL="0">
-              <a:buNone/>
-            </a:pPr>
-            <a:r>
-              <a:rPr lang="en-US" sz="1400" dirty="0">
-                <a:solidFill>
-                  <a:srgbClr val="5C6690"/>
-                </a:solidFill>
-                <a:latin typeface="Calibri" pitchFamily="34" charset="0"/>
-                <a:ea typeface="Calibri" pitchFamily="34" charset="-122"/>
-                <a:cs typeface="Calibri" pitchFamily="34" charset="-120"/>
-              </a:rPr>
-              <a:t>a working reference implementation is in the repo — if the agent stalls, paste it and keep the story moving.</a:t>
-            </a:r>
-            <a:endParaRPr lang="en-US" sz="1400" dirty="0"/>
+              <a:t>“Review the spec, not the code” — now it's how the IDE works.</a:t>
+            </a:r>
+            <a:endParaRPr lang="en-US" sz="1700" dirty="0"/>
           </a:p>
         </p:txBody>
       </p:sp>
@@ -3377,7 +2982,7 @@
                 <a:ea typeface="Calibri" pitchFamily="34" charset="-122"/>
                 <a:cs typeface="Calibri" pitchFamily="34" charset="-120"/>
               </a:rPr>
-              <a:t>WHY IT HOLDS TOGETHER</a:t>
+              <a:t>THE LIVE DEMO</a:t>
             </a:r>
             <a:endParaRPr lang="en-US" sz="1200" dirty="0"/>
           </a:p>
@@ -3408,7 +3013,7 @@
               <a:buNone/>
             </a:pPr>
             <a:r>
-              <a:rPr lang="en-US" sz="3000" b="1" dirty="0">
+              <a:rPr lang="en-US" sz="3400" b="1" dirty="0">
                 <a:solidFill>
                   <a:srgbClr val="1E2761"/>
                 </a:solidFill>
@@ -3416,9 +3021,9 @@
                 <a:ea typeface="Cambria" pitchFamily="34" charset="-122"/>
                 <a:cs typeface="Cambria" pitchFamily="34" charset="-120"/>
               </a:rPr>
-              <a:t>One row → one case → the compiler enforces it</a:t>
-            </a:r>
-            <a:endParaRPr lang="en-US" sz="3000" dirty="0"/>
+              <a:t>Five prompts, one running app</a:t>
+            </a:r>
+            <a:endParaRPr lang="en-US" sz="3400" dirty="0"/>
           </a:p>
         </p:txBody>
       </p:sp>
@@ -3430,18 +3035,23 @@
         </p:nvSpPr>
         <p:spPr>
           <a:xfrm>
-            <a:off x="548640" y="1828800"/>
-            <a:ext cx="6766560" cy="3931920"/>
+            <a:off x="548640" y="2011680"/>
+            <a:ext cx="1993392" cy="3108960"/>
           </a:xfrm>
           <a:prstGeom prst="roundRect">
             <a:avLst>
-              <a:gd name="adj" fmla="val 2326"/>
+              <a:gd name="adj" fmla="val 4587"/>
             </a:avLst>
           </a:prstGeom>
           <a:solidFill>
-            <a:srgbClr val="12183A"/>
+            <a:srgbClr val="FFFFFF"/>
           </a:solidFill>
-          <a:ln/>
+          <a:ln w="12700">
+            <a:solidFill>
+              <a:srgbClr val="E2E6F5"/>
+            </a:solidFill>
+            <a:prstDash val="solid"/>
+          </a:ln>
           <a:effectLst>
             <a:outerShdw sx="100000" sy="100000" kx="0" ky="0" algn="bl" rotWithShape="0" blurRad="101600" dist="38100" dir="5400000">
               <a:srgbClr val="9AA3C8">
@@ -3453,200 +3063,14 @@
       </p:sp>
       <p:sp>
         <p:nvSpPr>
-          <p:cNvPr id="5" name="Text 3"/>
-          <p:cNvSpPr/>
-          <p:nvPr/>
-        </p:nvSpPr>
-        <p:spPr>
-          <a:xfrm>
-            <a:off x="868680" y="2057400"/>
-            <a:ext cx="6309360" cy="3474720"/>
-          </a:xfrm>
-          <a:prstGeom prst="rect">
-            <a:avLst/>
-          </a:prstGeom>
-          <a:noFill/>
-          <a:ln/>
-        </p:spPr>
-        <p:txBody>
-          <a:bodyPr wrap="square" lIns="0" tIns="0" rIns="0" bIns="0" rtlCol="0" anchor="ctr"/>
-          <a:lstStyle/>
-          <a:p>
-            <a:pPr indent="0" marL="0">
-              <a:lnSpc>
-                <a:spcPct val="112000"/>
-              </a:lnSpc>
-              <a:buNone/>
-            </a:pPr>
-            <a:r>
-              <a:rPr lang="en-US" sz="1450" dirty="0">
-                <a:solidFill>
-                  <a:srgbClr val="8FB4FF"/>
-                </a:solidFill>
-                <a:latin typeface="Courier New" pitchFamily="34" charset="0"/>
-                <a:ea typeface="Courier New" pitchFamily="34" charset="-122"/>
-                <a:cs typeface="Courier New" pitchFamily="34" charset="-120"/>
-              </a:rPr>
-              <a:t>func transition(from: State, on: Event,
-</a:t>
-            </a:r>
-            <a:pPr indent="0" marL="0">
-              <a:lnSpc>
-                <a:spcPct val="112000"/>
-              </a:lnSpc>
-              <a:buNone/>
-            </a:pPr>
-            <a:r>
-              <a:rPr lang="en-US" sz="1450" dirty="0">
-                <a:solidFill>
-                  <a:srgbClr val="8FB4FF"/>
-                </a:solidFill>
-                <a:latin typeface="Courier New" pitchFamily="34" charset="0"/>
-                <a:ea typeface="Courier New" pitchFamily="34" charset="-122"/>
-                <a:cs typeface="Courier New" pitchFamily="34" charset="-120"/>
-              </a:rPr>
-              <a:t>                stock: Stock) -&gt; Result {
-</a:t>
-            </a:r>
-            <a:pPr indent="0" marL="0">
-              <a:lnSpc>
-                <a:spcPct val="112000"/>
-              </a:lnSpc>
-              <a:buNone/>
-            </a:pPr>
-            <a:r>
-              <a:rPr lang="en-US" sz="1450" dirty="0">
-                <a:solidFill>
-                  <a:srgbClr val="E6E9F5"/>
-                </a:solidFill>
-                <a:latin typeface="Courier New" pitchFamily="34" charset="0"/>
-                <a:ea typeface="Courier New" pitchFamily="34" charset="-122"/>
-                <a:cs typeface="Courier New" pitchFamily="34" charset="-120"/>
-              </a:rPr>
-              <a:t>  switch (state, event) {
-</a:t>
-            </a:r>
-            <a:pPr indent="0" marL="0">
-              <a:lnSpc>
-                <a:spcPct val="112000"/>
-              </a:lnSpc>
-              <a:buNone/>
-            </a:pPr>
-            <a:r>
-              <a:rPr lang="en-US" sz="1450" dirty="0">
-                <a:solidFill>
-                  <a:srgbClr val="6FD08C"/>
-                </a:solidFill>
-                <a:latin typeface="Courier New" pitchFamily="34" charset="0"/>
-                <a:ea typeface="Courier New" pitchFamily="34" charset="-122"/>
-                <a:cs typeface="Courier New" pitchFamily="34" charset="-120"/>
-              </a:rPr>
-              <a:t>  // Row 5
-</a:t>
-            </a:r>
-            <a:pPr indent="0" marL="0">
-              <a:lnSpc>
-                <a:spcPct val="112000"/>
-              </a:lnSpc>
-              <a:buNone/>
-            </a:pPr>
-            <a:r>
-              <a:rPr lang="en-US" sz="1450" dirty="0">
-                <a:solidFill>
-                  <a:srgbClr val="E6E9F5"/>
-                </a:solidFill>
-                <a:latin typeface="Courier New" pitchFamily="34" charset="0"/>
-                <a:ea typeface="Courier New" pitchFamily="34" charset="-122"/>
-                <a:cs typeface="Courier New" pitchFamily="34" charset="-120"/>
-              </a:rPr>
-              <a:t>  case (.collecting(let b), .select(let p)):
-</a:t>
-            </a:r>
-            <a:pPr indent="0" marL="0">
-              <a:lnSpc>
-                <a:spcPct val="112000"/>
-              </a:lnSpc>
-              <a:buNone/>
-            </a:pPr>
-            <a:r>
-              <a:rPr lang="en-US" sz="1450" dirty="0">
-                <a:solidFill>
-                  <a:srgbClr val="9AA3C8"/>
-                </a:solidFill>
-                <a:latin typeface="Courier New" pitchFamily="34" charset="0"/>
-                <a:ea typeface="Courier New" pitchFamily="34" charset="-122"/>
-                <a:cs typeface="Courier New" pitchFamily="34" charset="-120"/>
-              </a:rPr>
-              <a:t>    // guards split 5 / 6 / 7 …
-</a:t>
-            </a:r>
-            <a:pPr indent="0" marL="0">
-              <a:lnSpc>
-                <a:spcPct val="112000"/>
-              </a:lnSpc>
-              <a:buNone/>
-            </a:pPr>
-            <a:r>
-              <a:rPr lang="en-US" sz="1450" dirty="0">
-                <a:solidFill>
-                  <a:srgbClr val="F7A32B"/>
-                </a:solidFill>
-                <a:latin typeface="Courier New" pitchFamily="34" charset="0"/>
-                <a:ea typeface="Courier New" pitchFamily="34" charset="-122"/>
-                <a:cs typeface="Courier New" pitchFamily="34" charset="-120"/>
-              </a:rPr>
-              <a:t>  // no default — every row is named
-</a:t>
-            </a:r>
-            <a:pPr indent="0" marL="0">
-              <a:lnSpc>
-                <a:spcPct val="112000"/>
-              </a:lnSpc>
-              <a:buNone/>
-            </a:pPr>
-            <a:r>
-              <a:rPr lang="en-US" sz="1450" dirty="0">
-                <a:solidFill>
-                  <a:srgbClr val="E6E9F5"/>
-                </a:solidFill>
-                <a:latin typeface="Courier New" pitchFamily="34" charset="0"/>
-                <a:ea typeface="Courier New" pitchFamily="34" charset="-122"/>
-                <a:cs typeface="Courier New" pitchFamily="34" charset="-120"/>
-              </a:rPr>
-              <a:t>  }
-</a:t>
-            </a:r>
-            <a:pPr indent="0" marL="0">
-              <a:lnSpc>
-                <a:spcPct val="112000"/>
-              </a:lnSpc>
-              <a:buNone/>
-            </a:pPr>
-            <a:r>
-              <a:rPr lang="en-US" sz="1450" dirty="0">
-                <a:solidFill>
-                  <a:srgbClr val="E6E9F5"/>
-                </a:solidFill>
-                <a:latin typeface="Courier New" pitchFamily="34" charset="0"/>
-                <a:ea typeface="Courier New" pitchFamily="34" charset="-122"/>
-                <a:cs typeface="Courier New" pitchFamily="34" charset="-120"/>
-              </a:rPr>
-              <a:t>}</a:t>
-            </a:r>
-            <a:endParaRPr lang="en-US" sz="1450" dirty="0"/>
-          </a:p>
-        </p:txBody>
-      </p:sp>
-      <p:sp>
-        <p:nvSpPr>
-          <p:cNvPr id="6" name="Shape 4"/>
-          <p:cNvSpPr/>
-          <p:nvPr/>
-        </p:nvSpPr>
-        <p:spPr>
-          <a:xfrm>
-            <a:off x="7589520" y="1965960"/>
-            <a:ext cx="365760" cy="365760"/>
+          <p:cNvPr id="5" name="Shape 3"/>
+          <p:cNvSpPr/>
+          <p:nvPr/>
+        </p:nvSpPr>
+        <p:spPr>
+          <a:xfrm>
+            <a:off x="1316736" y="2286000"/>
+            <a:ext cx="457200" cy="457200"/>
           </a:xfrm>
           <a:prstGeom prst="ellipse">
             <a:avLst/>
@@ -3666,14 +3090,14 @@
       </p:sp>
       <p:sp>
         <p:nvSpPr>
-          <p:cNvPr id="7" name="Text 5"/>
-          <p:cNvSpPr/>
-          <p:nvPr/>
-        </p:nvSpPr>
-        <p:spPr>
-          <a:xfrm>
-            <a:off x="7589520" y="1965960"/>
-            <a:ext cx="365760" cy="365760"/>
+          <p:cNvPr id="6" name="Text 4"/>
+          <p:cNvSpPr/>
+          <p:nvPr/>
+        </p:nvSpPr>
+        <p:spPr>
+          <a:xfrm>
+            <a:off x="1316736" y="2286000"/>
+            <a:ext cx="457200" cy="457200"/>
           </a:xfrm>
           <a:prstGeom prst="rect">
             <a:avLst/>
@@ -3705,14 +3129,14 @@
       </p:sp>
       <p:sp>
         <p:nvSpPr>
-          <p:cNvPr id="8" name="Text 6"/>
-          <p:cNvSpPr/>
-          <p:nvPr/>
-        </p:nvSpPr>
-        <p:spPr>
-          <a:xfrm>
-            <a:off x="8138160" y="1920240"/>
-            <a:ext cx="3474720" cy="411480"/>
+          <p:cNvPr id="7" name="Text 5"/>
+          <p:cNvSpPr/>
+          <p:nvPr/>
+        </p:nvSpPr>
+        <p:spPr>
+          <a:xfrm>
+            <a:off x="685800" y="2880360"/>
+            <a:ext cx="1719072" cy="640080"/>
           </a:xfrm>
           <a:prstGeom prst="rect">
             <a:avLst/>
@@ -3724,11 +3148,11 @@
           <a:bodyPr wrap="square" lIns="0" tIns="0" rIns="0" bIns="0" rtlCol="0" anchor="ctr"/>
           <a:lstStyle/>
           <a:p>
-            <a:pPr indent="0" marL="0">
-              <a:buNone/>
-            </a:pPr>
-            <a:r>
-              <a:rPr lang="en-US" sz="1700" b="1" dirty="0">
+            <a:pPr algn="ctr" indent="0" marL="0">
+              <a:buNone/>
+            </a:pPr>
+            <a:r>
+              <a:rPr lang="en-US" sz="1550" b="1" dirty="0">
                 <a:solidFill>
                   <a:srgbClr val="1E2761"/>
                 </a:solidFill>
@@ -3736,22 +3160,22 @@
                 <a:ea typeface="Cambria" pitchFamily="34" charset="-122"/>
                 <a:cs typeface="Cambria" pitchFamily="34" charset="-120"/>
               </a:rPr>
-              <a:t>No default case</a:t>
-            </a:r>
-            <a:endParaRPr lang="en-US" sz="1700" dirty="0"/>
-          </a:p>
-        </p:txBody>
-      </p:sp>
-      <p:sp>
-        <p:nvSpPr>
-          <p:cNvPr id="9" name="Text 7"/>
-          <p:cNvSpPr/>
-          <p:nvPr/>
-        </p:nvSpPr>
-        <p:spPr>
-          <a:xfrm>
-            <a:off x="8138160" y="2331720"/>
-            <a:ext cx="3566160" cy="822960"/>
+              <a:t>Brief → table</a:t>
+            </a:r>
+            <a:endParaRPr lang="en-US" sz="1550" dirty="0"/>
+          </a:p>
+        </p:txBody>
+      </p:sp>
+      <p:sp>
+        <p:nvSpPr>
+          <p:cNvPr id="8" name="Text 6"/>
+          <p:cNvSpPr/>
+          <p:nvPr/>
+        </p:nvSpPr>
+        <p:spPr>
+          <a:xfrm>
+            <a:off x="685800" y="3520440"/>
+            <a:ext cx="1719072" cy="1463040"/>
           </a:xfrm>
           <a:prstGeom prst="rect">
             <a:avLst/>
@@ -3763,14 +3187,14 @@
           <a:bodyPr wrap="square" lIns="0" tIns="0" rIns="0" bIns="0" rtlCol="0" anchor="ctr"/>
           <a:lstStyle/>
           <a:p>
-            <a:pPr indent="0" marL="0">
+            <a:pPr algn="ctr" indent="0" marL="0">
               <a:lnSpc>
                 <a:spcPct val="105000"/>
               </a:lnSpc>
               <a:buNone/>
             </a:pPr>
             <a:r>
-              <a:rPr lang="en-US" sz="1350" dirty="0">
+              <a:rPr lang="en-US" sz="1250" dirty="0">
                 <a:solidFill>
                   <a:srgbClr val="1C2340"/>
                 </a:solidFill>
@@ -3778,30 +3202,37 @@
                 <a:ea typeface="Calibri" pitchFamily="34" charset="-122"/>
                 <a:cs typeface="Calibri" pitchFamily="34" charset="-120"/>
               </a:rPr>
-              <a:t>Every table row is an explicit case. Nothing hides in a catch-all.</a:t>
-            </a:r>
-            <a:endParaRPr lang="en-US" sz="1350" dirty="0"/>
-          </a:p>
-        </p:txBody>
-      </p:sp>
-      <p:sp>
-        <p:nvSpPr>
-          <p:cNvPr id="10" name="Shape 8"/>
-          <p:cNvSpPr/>
-          <p:nvPr/>
-        </p:nvSpPr>
-        <p:spPr>
-          <a:xfrm>
-            <a:off x="7589520" y="3291840"/>
-            <a:ext cx="365760" cy="365760"/>
-          </a:xfrm>
-          <a:prstGeom prst="ellipse">
-            <a:avLst/>
+              <a:t>Paste the plain-English brief. Ask for a Parnas table — no Swift yet.</a:t>
+            </a:r>
+            <a:endParaRPr lang="en-US" sz="1250" dirty="0"/>
+          </a:p>
+        </p:txBody>
+      </p:sp>
+      <p:sp>
+        <p:nvSpPr>
+          <p:cNvPr id="9" name="Shape 7"/>
+          <p:cNvSpPr/>
+          <p:nvPr/>
+        </p:nvSpPr>
+        <p:spPr>
+          <a:xfrm>
+            <a:off x="2816352" y="2011680"/>
+            <a:ext cx="1993392" cy="3108960"/>
+          </a:xfrm>
+          <a:prstGeom prst="roundRect">
+            <a:avLst>
+              <a:gd name="adj" fmla="val 4587"/>
+            </a:avLst>
           </a:prstGeom>
           <a:solidFill>
-            <a:srgbClr val="1E2761"/>
+            <a:srgbClr val="FFFFFF"/>
           </a:solidFill>
-          <a:ln/>
+          <a:ln w="12700">
+            <a:solidFill>
+              <a:srgbClr val="E2E6F5"/>
+            </a:solidFill>
+            <a:prstDash val="solid"/>
+          </a:ln>
           <a:effectLst>
             <a:outerShdw sx="100000" sy="100000" kx="0" ky="0" algn="bl" rotWithShape="0" blurRad="101600" dist="38100" dir="5400000">
               <a:srgbClr val="9AA3C8">
@@ -3813,140 +3244,20 @@
       </p:sp>
       <p:sp>
         <p:nvSpPr>
-          <p:cNvPr id="11" name="Text 9"/>
-          <p:cNvSpPr/>
-          <p:nvPr/>
-        </p:nvSpPr>
-        <p:spPr>
-          <a:xfrm>
-            <a:off x="7589520" y="3291840"/>
-            <a:ext cx="365760" cy="365760"/>
-          </a:xfrm>
-          <a:prstGeom prst="rect">
-            <a:avLst/>
-          </a:prstGeom>
-          <a:noFill/>
-          <a:ln/>
-        </p:spPr>
-        <p:txBody>
-          <a:bodyPr wrap="square" lIns="0" tIns="0" rIns="0" bIns="0" rtlCol="0" anchor="ctr"/>
-          <a:lstStyle/>
-          <a:p>
-            <a:pPr algn="ctr" indent="0" marL="0">
-              <a:buNone/>
-            </a:pPr>
-            <a:r>
-              <a:rPr lang="en-US" sz="1600" b="1" dirty="0">
-                <a:solidFill>
-                  <a:srgbClr val="FFFFFF"/>
-                </a:solidFill>
-                <a:latin typeface="Cambria" pitchFamily="34" charset="0"/>
-                <a:ea typeface="Cambria" pitchFamily="34" charset="-122"/>
-                <a:cs typeface="Cambria" pitchFamily="34" charset="-120"/>
-              </a:rPr>
-              <a:t>2</a:t>
-            </a:r>
-            <a:endParaRPr lang="en-US" sz="1600" dirty="0"/>
-          </a:p>
-        </p:txBody>
-      </p:sp>
-      <p:sp>
-        <p:nvSpPr>
-          <p:cNvPr id="12" name="Text 10"/>
-          <p:cNvSpPr/>
-          <p:nvPr/>
-        </p:nvSpPr>
-        <p:spPr>
-          <a:xfrm>
-            <a:off x="8138160" y="3246120"/>
-            <a:ext cx="3474720" cy="411480"/>
-          </a:xfrm>
-          <a:prstGeom prst="rect">
-            <a:avLst/>
-          </a:prstGeom>
-          <a:noFill/>
-          <a:ln/>
-        </p:spPr>
-        <p:txBody>
-          <a:bodyPr wrap="square" lIns="0" tIns="0" rIns="0" bIns="0" rtlCol="0" anchor="ctr"/>
-          <a:lstStyle/>
-          <a:p>
-            <a:pPr indent="0" marL="0">
-              <a:buNone/>
-            </a:pPr>
-            <a:r>
-              <a:rPr lang="en-US" sz="1700" b="1" dirty="0">
-                <a:solidFill>
-                  <a:srgbClr val="1E2761"/>
-                </a:solidFill>
-                <a:latin typeface="Cambria" pitchFamily="34" charset="0"/>
-                <a:ea typeface="Cambria" pitchFamily="34" charset="-122"/>
-                <a:cs typeface="Cambria" pitchFamily="34" charset="-120"/>
-              </a:rPr>
-              <a:t>Delete a case → won't build</a:t>
-            </a:r>
-            <a:endParaRPr lang="en-US" sz="1700" dirty="0"/>
-          </a:p>
-        </p:txBody>
-      </p:sp>
-      <p:sp>
-        <p:nvSpPr>
-          <p:cNvPr id="13" name="Text 11"/>
-          <p:cNvSpPr/>
-          <p:nvPr/>
-        </p:nvSpPr>
-        <p:spPr>
-          <a:xfrm>
-            <a:off x="8138160" y="3657600"/>
-            <a:ext cx="3566160" cy="822960"/>
-          </a:xfrm>
-          <a:prstGeom prst="rect">
-            <a:avLst/>
-          </a:prstGeom>
-          <a:noFill/>
-          <a:ln/>
-        </p:spPr>
-        <p:txBody>
-          <a:bodyPr wrap="square" lIns="0" tIns="0" rIns="0" bIns="0" rtlCol="0" anchor="ctr"/>
-          <a:lstStyle/>
-          <a:p>
-            <a:pPr indent="0" marL="0">
-              <a:lnSpc>
-                <a:spcPct val="105000"/>
-              </a:lnSpc>
-              <a:buNone/>
-            </a:pPr>
-            <a:r>
-              <a:rPr lang="en-US" sz="1350" dirty="0">
-                <a:solidFill>
-                  <a:srgbClr val="1C2340"/>
-                </a:solidFill>
-                <a:latin typeface="Calibri" pitchFamily="34" charset="0"/>
-                <a:ea typeface="Calibri" pitchFamily="34" charset="-122"/>
-                <a:cs typeface="Calibri" pitchFamily="34" charset="-120"/>
-              </a:rPr>
-              <a:t>Swift refuses to compile an incomplete switch. The compiler now enforces the table.</a:t>
-            </a:r>
-            <a:endParaRPr lang="en-US" sz="1350" dirty="0"/>
-          </a:p>
-        </p:txBody>
-      </p:sp>
-      <p:sp>
-        <p:nvSpPr>
-          <p:cNvPr id="14" name="Shape 12"/>
-          <p:cNvSpPr/>
-          <p:nvPr/>
-        </p:nvSpPr>
-        <p:spPr>
-          <a:xfrm>
-            <a:off x="7589520" y="4617720"/>
-            <a:ext cx="365760" cy="365760"/>
+          <p:cNvPr id="10" name="Shape 8"/>
+          <p:cNvSpPr/>
+          <p:nvPr/>
+        </p:nvSpPr>
+        <p:spPr>
+          <a:xfrm>
+            <a:off x="3584448" y="2286000"/>
+            <a:ext cx="457200" cy="457200"/>
           </a:xfrm>
           <a:prstGeom prst="ellipse">
             <a:avLst/>
           </a:prstGeom>
           <a:solidFill>
-            <a:srgbClr val="1E2761"/>
+            <a:srgbClr val="F7A32B"/>
           </a:solidFill>
           <a:ln/>
           <a:effectLst>
@@ -3960,14 +3271,14 @@
       </p:sp>
       <p:sp>
         <p:nvSpPr>
-          <p:cNvPr id="15" name="Text 13"/>
-          <p:cNvSpPr/>
-          <p:nvPr/>
-        </p:nvSpPr>
-        <p:spPr>
-          <a:xfrm>
-            <a:off x="7589520" y="4617720"/>
-            <a:ext cx="365760" cy="365760"/>
+          <p:cNvPr id="11" name="Text 9"/>
+          <p:cNvSpPr/>
+          <p:nvPr/>
+        </p:nvSpPr>
+        <p:spPr>
+          <a:xfrm>
+            <a:off x="3584448" y="2286000"/>
+            <a:ext cx="457200" cy="457200"/>
           </a:xfrm>
           <a:prstGeom prst="rect">
             <a:avLst/>
@@ -3985,13 +3296,13 @@
             <a:r>
               <a:rPr lang="en-US" sz="1600" b="1" dirty="0">
                 <a:solidFill>
-                  <a:srgbClr val="FFFFFF"/>
+                  <a:srgbClr val="1E2761"/>
                 </a:solidFill>
                 <a:latin typeface="Cambria" pitchFamily="34" charset="0"/>
                 <a:ea typeface="Cambria" pitchFamily="34" charset="-122"/>
                 <a:cs typeface="Cambria" pitchFamily="34" charset="-120"/>
               </a:rPr>
-              <a:t>3</a:t>
+              <a:t>2</a:t>
             </a:r>
             <a:endParaRPr lang="en-US" sz="1600" dirty="0"/>
           </a:p>
@@ -3999,14 +3310,14 @@
       </p:sp>
       <p:sp>
         <p:nvSpPr>
-          <p:cNvPr id="16" name="Text 14"/>
-          <p:cNvSpPr/>
-          <p:nvPr/>
-        </p:nvSpPr>
-        <p:spPr>
-          <a:xfrm>
-            <a:off x="8138160" y="4572000"/>
-            <a:ext cx="3474720" cy="411480"/>
+          <p:cNvPr id="12" name="Text 10"/>
+          <p:cNvSpPr/>
+          <p:nvPr/>
+        </p:nvSpPr>
+        <p:spPr>
+          <a:xfrm>
+            <a:off x="2953512" y="2880360"/>
+            <a:ext cx="1719072" cy="640080"/>
           </a:xfrm>
           <a:prstGeom prst="rect">
             <a:avLst/>
@@ -4018,11 +3329,11 @@
           <a:bodyPr wrap="square" lIns="0" tIns="0" rIns="0" bIns="0" rtlCol="0" anchor="ctr"/>
           <a:lstStyle/>
           <a:p>
-            <a:pPr indent="0" marL="0">
-              <a:buNone/>
-            </a:pPr>
-            <a:r>
-              <a:rPr lang="en-US" sz="1700" b="1" dirty="0">
+            <a:pPr algn="ctr" indent="0" marL="0">
+              <a:buNone/>
+            </a:pPr>
+            <a:r>
+              <a:rPr lang="en-US" sz="1550" b="1" dirty="0">
                 <a:solidFill>
                   <a:srgbClr val="1E2761"/>
                 </a:solidFill>
@@ -4030,22 +3341,22 @@
                 <a:ea typeface="Cambria" pitchFamily="34" charset="-122"/>
                 <a:cs typeface="Cambria" pitchFamily="34" charset="-120"/>
               </a:rPr>
-              <a:t>Change the table → change one case</a:t>
-            </a:r>
-            <a:endParaRPr lang="en-US" sz="1700" dirty="0"/>
-          </a:p>
-        </p:txBody>
-      </p:sp>
-      <p:sp>
-        <p:nvSpPr>
-          <p:cNvPr id="17" name="Text 15"/>
-          <p:cNvSpPr/>
-          <p:nvPr/>
-        </p:nvSpPr>
-        <p:spPr>
-          <a:xfrm>
-            <a:off x="8138160" y="4983480"/>
-            <a:ext cx="3566160" cy="822960"/>
+              <a:t>Verify together</a:t>
+            </a:r>
+            <a:endParaRPr lang="en-US" sz="1550" dirty="0"/>
+          </a:p>
+        </p:txBody>
+      </p:sp>
+      <p:sp>
+        <p:nvSpPr>
+          <p:cNvPr id="13" name="Text 11"/>
+          <p:cNvSpPr/>
+          <p:nvPr/>
+        </p:nvSpPr>
+        <p:spPr>
+          <a:xfrm>
+            <a:off x="2953512" y="3520440"/>
+            <a:ext cx="1719072" cy="1463040"/>
           </a:xfrm>
           <a:prstGeom prst="rect">
             <a:avLst/>
@@ -4057,14 +3368,14 @@
           <a:bodyPr wrap="square" lIns="0" tIns="0" rIns="0" bIns="0" rtlCol="0" anchor="ctr"/>
           <a:lstStyle/>
           <a:p>
-            <a:pPr indent="0" marL="0">
+            <a:pPr algn="ctr" indent="0" marL="0">
               <a:lnSpc>
                 <a:spcPct val="105000"/>
               </a:lnSpc>
               <a:buNone/>
             </a:pPr>
             <a:r>
-              <a:rPr lang="en-US" sz="1350" dirty="0">
+              <a:rPr lang="en-US" sz="1250" dirty="0">
                 <a:solidFill>
                   <a:srgbClr val="1C2340"/>
                 </a:solidFill>
@@ -4072,9 +3383,605 @@
                 <a:ea typeface="Calibri" pitchFamily="34" charset="-122"/>
                 <a:cs typeface="Calibri" pitchFamily="34" charset="-120"/>
               </a:rPr>
-              <a:t>The spec and the code stay in lockstep, row for row.</a:t>
-            </a:r>
-            <a:endParaRPr lang="en-US" sz="1350" dirty="0"/>
+              <a:t>Completeness matrix + disjointness. Fix anything missing.</a:t>
+            </a:r>
+            <a:endParaRPr lang="en-US" sz="1250" dirty="0"/>
+          </a:p>
+        </p:txBody>
+      </p:sp>
+      <p:sp>
+        <p:nvSpPr>
+          <p:cNvPr id="14" name="Shape 12"/>
+          <p:cNvSpPr/>
+          <p:nvPr/>
+        </p:nvSpPr>
+        <p:spPr>
+          <a:xfrm>
+            <a:off x="5084064" y="2011680"/>
+            <a:ext cx="1993392" cy="3108960"/>
+          </a:xfrm>
+          <a:prstGeom prst="roundRect">
+            <a:avLst>
+              <a:gd name="adj" fmla="val 4587"/>
+            </a:avLst>
+          </a:prstGeom>
+          <a:solidFill>
+            <a:srgbClr val="FFFFFF"/>
+          </a:solidFill>
+          <a:ln w="12700">
+            <a:solidFill>
+              <a:srgbClr val="E2E6F5"/>
+            </a:solidFill>
+            <a:prstDash val="solid"/>
+          </a:ln>
+          <a:effectLst>
+            <a:outerShdw sx="100000" sy="100000" kx="0" ky="0" algn="bl" rotWithShape="0" blurRad="101600" dist="38100" dir="5400000">
+              <a:srgbClr val="9AA3C8">
+                <a:alpha val="35000"/>
+              </a:srgbClr>
+            </a:outerShdw>
+          </a:effectLst>
+        </p:spPr>
+      </p:sp>
+      <p:sp>
+        <p:nvSpPr>
+          <p:cNvPr id="15" name="Shape 13"/>
+          <p:cNvSpPr/>
+          <p:nvPr/>
+        </p:nvSpPr>
+        <p:spPr>
+          <a:xfrm>
+            <a:off x="5852160" y="2286000"/>
+            <a:ext cx="457200" cy="457200"/>
+          </a:xfrm>
+          <a:prstGeom prst="ellipse">
+            <a:avLst/>
+          </a:prstGeom>
+          <a:solidFill>
+            <a:srgbClr val="1E2761"/>
+          </a:solidFill>
+          <a:ln/>
+          <a:effectLst>
+            <a:outerShdw sx="100000" sy="100000" kx="0" ky="0" algn="bl" rotWithShape="0" blurRad="101600" dist="38100" dir="5400000">
+              <a:srgbClr val="9AA3C8">
+                <a:alpha val="35000"/>
+              </a:srgbClr>
+            </a:outerShdw>
+          </a:effectLst>
+        </p:spPr>
+      </p:sp>
+      <p:sp>
+        <p:nvSpPr>
+          <p:cNvPr id="16" name="Text 14"/>
+          <p:cNvSpPr/>
+          <p:nvPr/>
+        </p:nvSpPr>
+        <p:spPr>
+          <a:xfrm>
+            <a:off x="5852160" y="2286000"/>
+            <a:ext cx="457200" cy="457200"/>
+          </a:xfrm>
+          <a:prstGeom prst="rect">
+            <a:avLst/>
+          </a:prstGeom>
+          <a:noFill/>
+          <a:ln/>
+        </p:spPr>
+        <p:txBody>
+          <a:bodyPr wrap="square" lIns="0" tIns="0" rIns="0" bIns="0" rtlCol="0" anchor="ctr"/>
+          <a:lstStyle/>
+          <a:p>
+            <a:pPr algn="ctr" indent="0" marL="0">
+              <a:buNone/>
+            </a:pPr>
+            <a:r>
+              <a:rPr lang="en-US" sz="1600" b="1" dirty="0">
+                <a:solidFill>
+                  <a:srgbClr val="FFFFFF"/>
+                </a:solidFill>
+                <a:latin typeface="Cambria" pitchFamily="34" charset="0"/>
+                <a:ea typeface="Cambria" pitchFamily="34" charset="-122"/>
+                <a:cs typeface="Cambria" pitchFamily="34" charset="-120"/>
+              </a:rPr>
+              <a:t>3</a:t>
+            </a:r>
+            <a:endParaRPr lang="en-US" sz="1600" dirty="0"/>
+          </a:p>
+        </p:txBody>
+      </p:sp>
+      <p:sp>
+        <p:nvSpPr>
+          <p:cNvPr id="17" name="Text 15"/>
+          <p:cNvSpPr/>
+          <p:nvPr/>
+        </p:nvSpPr>
+        <p:spPr>
+          <a:xfrm>
+            <a:off x="5221224" y="2880360"/>
+            <a:ext cx="1719072" cy="640080"/>
+          </a:xfrm>
+          <a:prstGeom prst="rect">
+            <a:avLst/>
+          </a:prstGeom>
+          <a:noFill/>
+          <a:ln/>
+        </p:spPr>
+        <p:txBody>
+          <a:bodyPr wrap="square" lIns="0" tIns="0" rIns="0" bIns="0" rtlCol="0" anchor="ctr"/>
+          <a:lstStyle/>
+          <a:p>
+            <a:pPr algn="ctr" indent="0" marL="0">
+              <a:buNone/>
+            </a:pPr>
+            <a:r>
+              <a:rPr lang="en-US" sz="1550" b="1" dirty="0">
+                <a:solidFill>
+                  <a:srgbClr val="1E2761"/>
+                </a:solidFill>
+                <a:latin typeface="Cambria" pitchFamily="34" charset="0"/>
+                <a:ea typeface="Cambria" pitchFamily="34" charset="-122"/>
+                <a:cs typeface="Cambria" pitchFamily="34" charset="-120"/>
+              </a:rPr>
+              <a:t>Generate the model</a:t>
+            </a:r>
+            <a:endParaRPr lang="en-US" sz="1550" dirty="0"/>
+          </a:p>
+        </p:txBody>
+      </p:sp>
+      <p:sp>
+        <p:nvSpPr>
+          <p:cNvPr id="18" name="Text 16"/>
+          <p:cNvSpPr/>
+          <p:nvPr/>
+        </p:nvSpPr>
+        <p:spPr>
+          <a:xfrm>
+            <a:off x="5221224" y="3520440"/>
+            <a:ext cx="1719072" cy="1463040"/>
+          </a:xfrm>
+          <a:prstGeom prst="rect">
+            <a:avLst/>
+          </a:prstGeom>
+          <a:noFill/>
+          <a:ln/>
+        </p:spPr>
+        <p:txBody>
+          <a:bodyPr wrap="square" lIns="0" tIns="0" rIns="0" bIns="0" rtlCol="0" anchor="ctr"/>
+          <a:lstStyle/>
+          <a:p>
+            <a:pPr algn="ctr" indent="0" marL="0">
+              <a:lnSpc>
+                <a:spcPct val="105000"/>
+              </a:lnSpc>
+              <a:buNone/>
+            </a:pPr>
+            <a:r>
+              <a:rPr lang="en-US" sz="1250" dirty="0">
+                <a:solidFill>
+                  <a:srgbClr val="1C2340"/>
+                </a:solidFill>
+                <a:latin typeface="Calibri" pitchFamily="34" charset="0"/>
+                <a:ea typeface="Calibri" pitchFamily="34" charset="-122"/>
+                <a:cs typeface="Calibri" pitchFamily="34" charset="-120"/>
+              </a:rPr>
+              <a:t>One switch case per row. Exhaustive, no default.</a:t>
+            </a:r>
+            <a:endParaRPr lang="en-US" sz="1250" dirty="0"/>
+          </a:p>
+        </p:txBody>
+      </p:sp>
+      <p:sp>
+        <p:nvSpPr>
+          <p:cNvPr id="19" name="Shape 17"/>
+          <p:cNvSpPr/>
+          <p:nvPr/>
+        </p:nvSpPr>
+        <p:spPr>
+          <a:xfrm>
+            <a:off x="7351776" y="2011680"/>
+            <a:ext cx="1993392" cy="3108960"/>
+          </a:xfrm>
+          <a:prstGeom prst="roundRect">
+            <a:avLst>
+              <a:gd name="adj" fmla="val 4587"/>
+            </a:avLst>
+          </a:prstGeom>
+          <a:solidFill>
+            <a:srgbClr val="FFFFFF"/>
+          </a:solidFill>
+          <a:ln w="12700">
+            <a:solidFill>
+              <a:srgbClr val="E2E6F5"/>
+            </a:solidFill>
+            <a:prstDash val="solid"/>
+          </a:ln>
+          <a:effectLst>
+            <a:outerShdw sx="100000" sy="100000" kx="0" ky="0" algn="bl" rotWithShape="0" blurRad="101600" dist="38100" dir="5400000">
+              <a:srgbClr val="9AA3C8">
+                <a:alpha val="35000"/>
+              </a:srgbClr>
+            </a:outerShdw>
+          </a:effectLst>
+        </p:spPr>
+      </p:sp>
+      <p:sp>
+        <p:nvSpPr>
+          <p:cNvPr id="20" name="Shape 18"/>
+          <p:cNvSpPr/>
+          <p:nvPr/>
+        </p:nvSpPr>
+        <p:spPr>
+          <a:xfrm>
+            <a:off x="8119872" y="2286000"/>
+            <a:ext cx="457200" cy="457200"/>
+          </a:xfrm>
+          <a:prstGeom prst="ellipse">
+            <a:avLst/>
+          </a:prstGeom>
+          <a:solidFill>
+            <a:srgbClr val="1E2761"/>
+          </a:solidFill>
+          <a:ln/>
+          <a:effectLst>
+            <a:outerShdw sx="100000" sy="100000" kx="0" ky="0" algn="bl" rotWithShape="0" blurRad="101600" dist="38100" dir="5400000">
+              <a:srgbClr val="9AA3C8">
+                <a:alpha val="35000"/>
+              </a:srgbClr>
+            </a:outerShdw>
+          </a:effectLst>
+        </p:spPr>
+      </p:sp>
+      <p:sp>
+        <p:nvSpPr>
+          <p:cNvPr id="21" name="Text 19"/>
+          <p:cNvSpPr/>
+          <p:nvPr/>
+        </p:nvSpPr>
+        <p:spPr>
+          <a:xfrm>
+            <a:off x="8119872" y="2286000"/>
+            <a:ext cx="457200" cy="457200"/>
+          </a:xfrm>
+          <a:prstGeom prst="rect">
+            <a:avLst/>
+          </a:prstGeom>
+          <a:noFill/>
+          <a:ln/>
+        </p:spPr>
+        <p:txBody>
+          <a:bodyPr wrap="square" lIns="0" tIns="0" rIns="0" bIns="0" rtlCol="0" anchor="ctr"/>
+          <a:lstStyle/>
+          <a:p>
+            <a:pPr algn="ctr" indent="0" marL="0">
+              <a:buNone/>
+            </a:pPr>
+            <a:r>
+              <a:rPr lang="en-US" sz="1600" b="1" dirty="0">
+                <a:solidFill>
+                  <a:srgbClr val="FFFFFF"/>
+                </a:solidFill>
+                <a:latin typeface="Cambria" pitchFamily="34" charset="0"/>
+                <a:ea typeface="Cambria" pitchFamily="34" charset="-122"/>
+                <a:cs typeface="Cambria" pitchFamily="34" charset="-120"/>
+              </a:rPr>
+              <a:t>4</a:t>
+            </a:r>
+            <a:endParaRPr lang="en-US" sz="1600" dirty="0"/>
+          </a:p>
+        </p:txBody>
+      </p:sp>
+      <p:sp>
+        <p:nvSpPr>
+          <p:cNvPr id="22" name="Text 20"/>
+          <p:cNvSpPr/>
+          <p:nvPr/>
+        </p:nvSpPr>
+        <p:spPr>
+          <a:xfrm>
+            <a:off x="7488936" y="2880360"/>
+            <a:ext cx="1719072" cy="640080"/>
+          </a:xfrm>
+          <a:prstGeom prst="rect">
+            <a:avLst/>
+          </a:prstGeom>
+          <a:noFill/>
+          <a:ln/>
+        </p:spPr>
+        <p:txBody>
+          <a:bodyPr wrap="square" lIns="0" tIns="0" rIns="0" bIns="0" rtlCol="0" anchor="ctr"/>
+          <a:lstStyle/>
+          <a:p>
+            <a:pPr algn="ctr" indent="0" marL="0">
+              <a:buNone/>
+            </a:pPr>
+            <a:r>
+              <a:rPr lang="en-US" sz="1550" b="1" dirty="0">
+                <a:solidFill>
+                  <a:srgbClr val="1E2761"/>
+                </a:solidFill>
+                <a:latin typeface="Cambria" pitchFamily="34" charset="0"/>
+                <a:ea typeface="Cambria" pitchFamily="34" charset="-122"/>
+                <a:cs typeface="Cambria" pitchFamily="34" charset="-120"/>
+              </a:rPr>
+              <a:t>Generate the app</a:t>
+            </a:r>
+            <a:endParaRPr lang="en-US" sz="1550" dirty="0"/>
+          </a:p>
+        </p:txBody>
+      </p:sp>
+      <p:sp>
+        <p:nvSpPr>
+          <p:cNvPr id="23" name="Text 21"/>
+          <p:cNvSpPr/>
+          <p:nvPr/>
+        </p:nvSpPr>
+        <p:spPr>
+          <a:xfrm>
+            <a:off x="7488936" y="3520440"/>
+            <a:ext cx="1719072" cy="1463040"/>
+          </a:xfrm>
+          <a:prstGeom prst="rect">
+            <a:avLst/>
+          </a:prstGeom>
+          <a:noFill/>
+          <a:ln/>
+        </p:spPr>
+        <p:txBody>
+          <a:bodyPr wrap="square" lIns="0" tIns="0" rIns="0" bIns="0" rtlCol="0" anchor="ctr"/>
+          <a:lstStyle/>
+          <a:p>
+            <a:pPr algn="ctr" indent="0" marL="0">
+              <a:lnSpc>
+                <a:spcPct val="105000"/>
+              </a:lnSpc>
+              <a:buNone/>
+            </a:pPr>
+            <a:r>
+              <a:rPr lang="en-US" sz="1250" dirty="0">
+                <a:solidFill>
+                  <a:srgbClr val="1C2340"/>
+                </a:solidFill>
+                <a:latin typeface="Calibri" pitchFamily="34" charset="0"/>
+                <a:ea typeface="Calibri" pitchFamily="34" charset="-122"/>
+                <a:cs typeface="Calibri" pitchFamily="34" charset="-120"/>
+              </a:rPr>
+              <a:t>SwiftUI screen sends events; state only changes via transition().</a:t>
+            </a:r>
+            <a:endParaRPr lang="en-US" sz="1250" dirty="0"/>
+          </a:p>
+        </p:txBody>
+      </p:sp>
+      <p:sp>
+        <p:nvSpPr>
+          <p:cNvPr id="24" name="Shape 22"/>
+          <p:cNvSpPr/>
+          <p:nvPr/>
+        </p:nvSpPr>
+        <p:spPr>
+          <a:xfrm>
+            <a:off x="9619488" y="2011680"/>
+            <a:ext cx="1993392" cy="3108960"/>
+          </a:xfrm>
+          <a:prstGeom prst="roundRect">
+            <a:avLst>
+              <a:gd name="adj" fmla="val 4587"/>
+            </a:avLst>
+          </a:prstGeom>
+          <a:solidFill>
+            <a:srgbClr val="FFFFFF"/>
+          </a:solidFill>
+          <a:ln w="12700">
+            <a:solidFill>
+              <a:srgbClr val="E2E6F5"/>
+            </a:solidFill>
+            <a:prstDash val="solid"/>
+          </a:ln>
+          <a:effectLst>
+            <a:outerShdw sx="100000" sy="100000" kx="0" ky="0" algn="bl" rotWithShape="0" blurRad="101600" dist="38100" dir="5400000">
+              <a:srgbClr val="9AA3C8">
+                <a:alpha val="35000"/>
+              </a:srgbClr>
+            </a:outerShdw>
+          </a:effectLst>
+        </p:spPr>
+      </p:sp>
+      <p:sp>
+        <p:nvSpPr>
+          <p:cNvPr id="25" name="Shape 23"/>
+          <p:cNvSpPr/>
+          <p:nvPr/>
+        </p:nvSpPr>
+        <p:spPr>
+          <a:xfrm>
+            <a:off x="10387584" y="2286000"/>
+            <a:ext cx="457200" cy="457200"/>
+          </a:xfrm>
+          <a:prstGeom prst="ellipse">
+            <a:avLst/>
+          </a:prstGeom>
+          <a:solidFill>
+            <a:srgbClr val="1E2761"/>
+          </a:solidFill>
+          <a:ln/>
+          <a:effectLst>
+            <a:outerShdw sx="100000" sy="100000" kx="0" ky="0" algn="bl" rotWithShape="0" blurRad="101600" dist="38100" dir="5400000">
+              <a:srgbClr val="9AA3C8">
+                <a:alpha val="35000"/>
+              </a:srgbClr>
+            </a:outerShdw>
+          </a:effectLst>
+        </p:spPr>
+      </p:sp>
+      <p:sp>
+        <p:nvSpPr>
+          <p:cNvPr id="26" name="Text 24"/>
+          <p:cNvSpPr/>
+          <p:nvPr/>
+        </p:nvSpPr>
+        <p:spPr>
+          <a:xfrm>
+            <a:off x="10387584" y="2286000"/>
+            <a:ext cx="457200" cy="457200"/>
+          </a:xfrm>
+          <a:prstGeom prst="rect">
+            <a:avLst/>
+          </a:prstGeom>
+          <a:noFill/>
+          <a:ln/>
+        </p:spPr>
+        <p:txBody>
+          <a:bodyPr wrap="square" lIns="0" tIns="0" rIns="0" bIns="0" rtlCol="0" anchor="ctr"/>
+          <a:lstStyle/>
+          <a:p>
+            <a:pPr algn="ctr" indent="0" marL="0">
+              <a:buNone/>
+            </a:pPr>
+            <a:r>
+              <a:rPr lang="en-US" sz="1600" b="1" dirty="0">
+                <a:solidFill>
+                  <a:srgbClr val="FFFFFF"/>
+                </a:solidFill>
+                <a:latin typeface="Cambria" pitchFamily="34" charset="0"/>
+                <a:ea typeface="Cambria" pitchFamily="34" charset="-122"/>
+                <a:cs typeface="Cambria" pitchFamily="34" charset="-120"/>
+              </a:rPr>
+              <a:t>5</a:t>
+            </a:r>
+            <a:endParaRPr lang="en-US" sz="1600" dirty="0"/>
+          </a:p>
+        </p:txBody>
+      </p:sp>
+      <p:sp>
+        <p:nvSpPr>
+          <p:cNvPr id="27" name="Text 25"/>
+          <p:cNvSpPr/>
+          <p:nvPr/>
+        </p:nvSpPr>
+        <p:spPr>
+          <a:xfrm>
+            <a:off x="9756648" y="2880360"/>
+            <a:ext cx="1719072" cy="640080"/>
+          </a:xfrm>
+          <a:prstGeom prst="rect">
+            <a:avLst/>
+          </a:prstGeom>
+          <a:noFill/>
+          <a:ln/>
+        </p:spPr>
+        <p:txBody>
+          <a:bodyPr wrap="square" lIns="0" tIns="0" rIns="0" bIns="0" rtlCol="0" anchor="ctr"/>
+          <a:lstStyle/>
+          <a:p>
+            <a:pPr algn="ctr" indent="0" marL="0">
+              <a:buNone/>
+            </a:pPr>
+            <a:r>
+              <a:rPr lang="en-US" sz="1550" b="1" dirty="0">
+                <a:solidFill>
+                  <a:srgbClr val="1E2761"/>
+                </a:solidFill>
+                <a:latin typeface="Cambria" pitchFamily="34" charset="0"/>
+                <a:ea typeface="Cambria" pitchFamily="34" charset="-122"/>
+                <a:cs typeface="Cambria" pitchFamily="34" charset="-120"/>
+              </a:rPr>
+              <a:t>Run it</a:t>
+            </a:r>
+            <a:endParaRPr lang="en-US" sz="1550" dirty="0"/>
+          </a:p>
+        </p:txBody>
+      </p:sp>
+      <p:sp>
+        <p:nvSpPr>
+          <p:cNvPr id="28" name="Text 26"/>
+          <p:cNvSpPr/>
+          <p:nvPr/>
+        </p:nvSpPr>
+        <p:spPr>
+          <a:xfrm>
+            <a:off x="9756648" y="3520440"/>
+            <a:ext cx="1719072" cy="1463040"/>
+          </a:xfrm>
+          <a:prstGeom prst="rect">
+            <a:avLst/>
+          </a:prstGeom>
+          <a:noFill/>
+          <a:ln/>
+        </p:spPr>
+        <p:txBody>
+          <a:bodyPr wrap="square" lIns="0" tIns="0" rIns="0" bIns="0" rtlCol="0" anchor="ctr"/>
+          <a:lstStyle/>
+          <a:p>
+            <a:pPr algn="ctr" indent="0" marL="0">
+              <a:lnSpc>
+                <a:spcPct val="105000"/>
+              </a:lnSpc>
+              <a:buNone/>
+            </a:pPr>
+            <a:r>
+              <a:rPr lang="en-US" sz="1250" dirty="0">
+                <a:solidFill>
+                  <a:srgbClr val="1C2340"/>
+                </a:solidFill>
+                <a:latin typeface="Calibri" pitchFamily="34" charset="0"/>
+                <a:ea typeface="Calibri" pitchFamily="34" charset="-122"/>
+                <a:cs typeface="Calibri" pitchFamily="34" charset="-120"/>
+              </a:rPr>
+              <a:t>Coins, sold-out, dispense + change, cancel + refund — live in the simulator.</a:t>
+            </a:r>
+            <a:endParaRPr lang="en-US" sz="1250" dirty="0"/>
+          </a:p>
+        </p:txBody>
+      </p:sp>
+      <p:sp>
+        <p:nvSpPr>
+          <p:cNvPr id="29" name="Text 27"/>
+          <p:cNvSpPr/>
+          <p:nvPr/>
+        </p:nvSpPr>
+        <p:spPr>
+          <a:xfrm>
+            <a:off x="548640" y="5349240"/>
+            <a:ext cx="11064240" cy="457200"/>
+          </a:xfrm>
+          <a:prstGeom prst="rect">
+            <a:avLst/>
+          </a:prstGeom>
+          <a:noFill/>
+          <a:ln/>
+        </p:spPr>
+        <p:txBody>
+          <a:bodyPr wrap="square" lIns="0" tIns="0" rIns="0" bIns="0" rtlCol="0" anchor="ctr"/>
+          <a:lstStyle/>
+          <a:p>
+            <a:pPr indent="0" marL="0">
+              <a:buNone/>
+            </a:pPr>
+            <a:r>
+              <a:rPr lang="en-US" sz="1400" b="1" dirty="0">
+                <a:solidFill>
+                  <a:srgbClr val="1E2761"/>
+                </a:solidFill>
+                <a:latin typeface="Calibri" pitchFamily="34" charset="0"/>
+                <a:ea typeface="Calibri" pitchFamily="34" charset="-122"/>
+                <a:cs typeface="Calibri" pitchFamily="34" charset="-120"/>
+              </a:rPr>
+              <a:t>Stage insurance: </a:t>
+            </a:r>
+            <a:pPr indent="0" marL="0">
+              <a:buNone/>
+            </a:pPr>
+            <a:r>
+              <a:rPr lang="en-US" sz="1400" dirty="0">
+                <a:solidFill>
+                  <a:srgbClr val="5C6690"/>
+                </a:solidFill>
+                <a:latin typeface="Calibri" pitchFamily="34" charset="0"/>
+                <a:ea typeface="Calibri" pitchFamily="34" charset="-122"/>
+                <a:cs typeface="Calibri" pitchFamily="34" charset="-120"/>
+              </a:rPr>
+              <a:t>a working reference implementation is in the repo — if the agent stalls, paste it and keep the story moving.</a:t>
+            </a:r>
+            <a:endParaRPr lang="en-US" sz="1400" dirty="0"/>
           </a:p>
         </p:txBody>
       </p:sp>
@@ -4089,6 +3996,772 @@
 <file path=ppt/slides/slide12.xml><?xml version="1.0" encoding="utf-8"?>
 <p:sld xmlns:a="http://schemas.openxmlformats.org/drawingml/2006/main" xmlns:r="http://schemas.openxmlformats.org/officeDocument/2006/relationships" xmlns:p="http://schemas.openxmlformats.org/presentationml/2006/main">
   <p:cSld name="Slide 12">
+    <p:bg>
+      <p:bgPr>
+        <a:solidFill>
+          <a:srgbClr val="F6F7FC"/>
+        </a:solidFill>
+      </p:bgPr>
+    </p:bg>
+    <p:spTree>
+      <p:nvGrpSpPr>
+        <p:cNvPr id="1" name=""/>
+        <p:cNvGrpSpPr/>
+        <p:nvPr/>
+      </p:nvGrpSpPr>
+      <p:grpSpPr>
+        <a:xfrm>
+          <a:off x="0" y="0"/>
+          <a:ext cx="0" cy="0"/>
+          <a:chOff x="0" y="0"/>
+          <a:chExt cx="0" cy="0"/>
+        </a:xfrm>
+      </p:grpSpPr>
+      <p:sp>
+        <p:nvSpPr>
+          <p:cNvPr id="2" name="Text 0"/>
+          <p:cNvSpPr/>
+          <p:nvPr/>
+        </p:nvSpPr>
+        <p:spPr>
+          <a:xfrm>
+            <a:off x="548640" y="411480"/>
+            <a:ext cx="11064240" cy="274320"/>
+          </a:xfrm>
+          <a:prstGeom prst="rect">
+            <a:avLst/>
+          </a:prstGeom>
+          <a:noFill/>
+          <a:ln/>
+        </p:spPr>
+        <p:txBody>
+          <a:bodyPr wrap="square" lIns="0" tIns="0" rIns="0" bIns="0" rtlCol="0" anchor="ctr"/>
+          <a:lstStyle/>
+          <a:p>
+            <a:pPr algn="l" indent="0" marL="0">
+              <a:buNone/>
+            </a:pPr>
+            <a:r>
+              <a:rPr lang="en-US" sz="1200" b="1" spc="200" kern="0" dirty="0">
+                <a:solidFill>
+                  <a:srgbClr val="F7A32B"/>
+                </a:solidFill>
+                <a:latin typeface="Calibri" pitchFamily="34" charset="0"/>
+                <a:ea typeface="Calibri" pitchFamily="34" charset="-122"/>
+                <a:cs typeface="Calibri" pitchFamily="34" charset="-120"/>
+              </a:rPr>
+              <a:t>WHY IT HOLDS TOGETHER</a:t>
+            </a:r>
+            <a:endParaRPr lang="en-US" sz="1200" dirty="0"/>
+          </a:p>
+        </p:txBody>
+      </p:sp>
+      <p:sp>
+        <p:nvSpPr>
+          <p:cNvPr id="3" name="Text 1"/>
+          <p:cNvSpPr/>
+          <p:nvPr/>
+        </p:nvSpPr>
+        <p:spPr>
+          <a:xfrm>
+            <a:off x="548640" y="658368"/>
+            <a:ext cx="11064240" cy="777240"/>
+          </a:xfrm>
+          <a:prstGeom prst="rect">
+            <a:avLst/>
+          </a:prstGeom>
+          <a:noFill/>
+          <a:ln/>
+        </p:spPr>
+        <p:txBody>
+          <a:bodyPr wrap="square" lIns="0" tIns="0" rIns="0" bIns="0" rtlCol="0" anchor="ctr"/>
+          <a:lstStyle/>
+          <a:p>
+            <a:pPr algn="l" indent="0" marL="0">
+              <a:buNone/>
+            </a:pPr>
+            <a:r>
+              <a:rPr lang="en-US" sz="3000" b="1" dirty="0">
+                <a:solidFill>
+                  <a:srgbClr val="1E2761"/>
+                </a:solidFill>
+                <a:latin typeface="Cambria" pitchFamily="34" charset="0"/>
+                <a:ea typeface="Cambria" pitchFamily="34" charset="-122"/>
+                <a:cs typeface="Cambria" pitchFamily="34" charset="-120"/>
+              </a:rPr>
+              <a:t>One row → one case → the compiler enforces it</a:t>
+            </a:r>
+            <a:endParaRPr lang="en-US" sz="3000" dirty="0"/>
+          </a:p>
+        </p:txBody>
+      </p:sp>
+      <p:sp>
+        <p:nvSpPr>
+          <p:cNvPr id="4" name="Shape 2"/>
+          <p:cNvSpPr/>
+          <p:nvPr/>
+        </p:nvSpPr>
+        <p:spPr>
+          <a:xfrm>
+            <a:off x="548640" y="1828800"/>
+            <a:ext cx="6766560" cy="3931920"/>
+          </a:xfrm>
+          <a:prstGeom prst="roundRect">
+            <a:avLst>
+              <a:gd name="adj" fmla="val 2326"/>
+            </a:avLst>
+          </a:prstGeom>
+          <a:solidFill>
+            <a:srgbClr val="12183A"/>
+          </a:solidFill>
+          <a:ln/>
+          <a:effectLst>
+            <a:outerShdw sx="100000" sy="100000" kx="0" ky="0" algn="bl" rotWithShape="0" blurRad="101600" dist="38100" dir="5400000">
+              <a:srgbClr val="9AA3C8">
+                <a:alpha val="35000"/>
+              </a:srgbClr>
+            </a:outerShdw>
+          </a:effectLst>
+        </p:spPr>
+      </p:sp>
+      <p:sp>
+        <p:nvSpPr>
+          <p:cNvPr id="5" name="Text 3"/>
+          <p:cNvSpPr/>
+          <p:nvPr/>
+        </p:nvSpPr>
+        <p:spPr>
+          <a:xfrm>
+            <a:off x="868680" y="2057400"/>
+            <a:ext cx="6309360" cy="3474720"/>
+          </a:xfrm>
+          <a:prstGeom prst="rect">
+            <a:avLst/>
+          </a:prstGeom>
+          <a:noFill/>
+          <a:ln/>
+        </p:spPr>
+        <p:txBody>
+          <a:bodyPr wrap="square" lIns="0" tIns="0" rIns="0" bIns="0" rtlCol="0" anchor="ctr"/>
+          <a:lstStyle/>
+          <a:p>
+            <a:pPr indent="0" marL="0">
+              <a:lnSpc>
+                <a:spcPct val="112000"/>
+              </a:lnSpc>
+              <a:buNone/>
+            </a:pPr>
+            <a:r>
+              <a:rPr lang="en-US" sz="1450" dirty="0">
+                <a:solidFill>
+                  <a:srgbClr val="8FB4FF"/>
+                </a:solidFill>
+                <a:latin typeface="Courier New" pitchFamily="34" charset="0"/>
+                <a:ea typeface="Courier New" pitchFamily="34" charset="-122"/>
+                <a:cs typeface="Courier New" pitchFamily="34" charset="-120"/>
+              </a:rPr>
+              <a:t>func transition(from: State, on: Event,
+</a:t>
+            </a:r>
+            <a:pPr indent="0" marL="0">
+              <a:lnSpc>
+                <a:spcPct val="112000"/>
+              </a:lnSpc>
+              <a:buNone/>
+            </a:pPr>
+            <a:r>
+              <a:rPr lang="en-US" sz="1450" dirty="0">
+                <a:solidFill>
+                  <a:srgbClr val="8FB4FF"/>
+                </a:solidFill>
+                <a:latin typeface="Courier New" pitchFamily="34" charset="0"/>
+                <a:ea typeface="Courier New" pitchFamily="34" charset="-122"/>
+                <a:cs typeface="Courier New" pitchFamily="34" charset="-120"/>
+              </a:rPr>
+              <a:t>                stock: Stock) -&gt; Result {
+</a:t>
+            </a:r>
+            <a:pPr indent="0" marL="0">
+              <a:lnSpc>
+                <a:spcPct val="112000"/>
+              </a:lnSpc>
+              <a:buNone/>
+            </a:pPr>
+            <a:r>
+              <a:rPr lang="en-US" sz="1450" dirty="0">
+                <a:solidFill>
+                  <a:srgbClr val="E6E9F5"/>
+                </a:solidFill>
+                <a:latin typeface="Courier New" pitchFamily="34" charset="0"/>
+                <a:ea typeface="Courier New" pitchFamily="34" charset="-122"/>
+                <a:cs typeface="Courier New" pitchFamily="34" charset="-120"/>
+              </a:rPr>
+              <a:t>  switch (state, event) {
+</a:t>
+            </a:r>
+            <a:pPr indent="0" marL="0">
+              <a:lnSpc>
+                <a:spcPct val="112000"/>
+              </a:lnSpc>
+              <a:buNone/>
+            </a:pPr>
+            <a:r>
+              <a:rPr lang="en-US" sz="1450" dirty="0">
+                <a:solidFill>
+                  <a:srgbClr val="6FD08C"/>
+                </a:solidFill>
+                <a:latin typeface="Courier New" pitchFamily="34" charset="0"/>
+                <a:ea typeface="Courier New" pitchFamily="34" charset="-122"/>
+                <a:cs typeface="Courier New" pitchFamily="34" charset="-120"/>
+              </a:rPr>
+              <a:t>  // Row 5
+</a:t>
+            </a:r>
+            <a:pPr indent="0" marL="0">
+              <a:lnSpc>
+                <a:spcPct val="112000"/>
+              </a:lnSpc>
+              <a:buNone/>
+            </a:pPr>
+            <a:r>
+              <a:rPr lang="en-US" sz="1450" dirty="0">
+                <a:solidFill>
+                  <a:srgbClr val="E6E9F5"/>
+                </a:solidFill>
+                <a:latin typeface="Courier New" pitchFamily="34" charset="0"/>
+                <a:ea typeface="Courier New" pitchFamily="34" charset="-122"/>
+                <a:cs typeface="Courier New" pitchFamily="34" charset="-120"/>
+              </a:rPr>
+              <a:t>  case (.collecting(let b), .select(let p)):
+</a:t>
+            </a:r>
+            <a:pPr indent="0" marL="0">
+              <a:lnSpc>
+                <a:spcPct val="112000"/>
+              </a:lnSpc>
+              <a:buNone/>
+            </a:pPr>
+            <a:r>
+              <a:rPr lang="en-US" sz="1450" dirty="0">
+                <a:solidFill>
+                  <a:srgbClr val="9AA3C8"/>
+                </a:solidFill>
+                <a:latin typeface="Courier New" pitchFamily="34" charset="0"/>
+                <a:ea typeface="Courier New" pitchFamily="34" charset="-122"/>
+                <a:cs typeface="Courier New" pitchFamily="34" charset="-120"/>
+              </a:rPr>
+              <a:t>    // guards split 5 / 6 / 7 …
+</a:t>
+            </a:r>
+            <a:pPr indent="0" marL="0">
+              <a:lnSpc>
+                <a:spcPct val="112000"/>
+              </a:lnSpc>
+              <a:buNone/>
+            </a:pPr>
+            <a:r>
+              <a:rPr lang="en-US" sz="1450" dirty="0">
+                <a:solidFill>
+                  <a:srgbClr val="F7A32B"/>
+                </a:solidFill>
+                <a:latin typeface="Courier New" pitchFamily="34" charset="0"/>
+                <a:ea typeface="Courier New" pitchFamily="34" charset="-122"/>
+                <a:cs typeface="Courier New" pitchFamily="34" charset="-120"/>
+              </a:rPr>
+              <a:t>  // no default — every row is named
+</a:t>
+            </a:r>
+            <a:pPr indent="0" marL="0">
+              <a:lnSpc>
+                <a:spcPct val="112000"/>
+              </a:lnSpc>
+              <a:buNone/>
+            </a:pPr>
+            <a:r>
+              <a:rPr lang="en-US" sz="1450" dirty="0">
+                <a:solidFill>
+                  <a:srgbClr val="E6E9F5"/>
+                </a:solidFill>
+                <a:latin typeface="Courier New" pitchFamily="34" charset="0"/>
+                <a:ea typeface="Courier New" pitchFamily="34" charset="-122"/>
+                <a:cs typeface="Courier New" pitchFamily="34" charset="-120"/>
+              </a:rPr>
+              <a:t>  }
+</a:t>
+            </a:r>
+            <a:pPr indent="0" marL="0">
+              <a:lnSpc>
+                <a:spcPct val="112000"/>
+              </a:lnSpc>
+              <a:buNone/>
+            </a:pPr>
+            <a:r>
+              <a:rPr lang="en-US" sz="1450" dirty="0">
+                <a:solidFill>
+                  <a:srgbClr val="E6E9F5"/>
+                </a:solidFill>
+                <a:latin typeface="Courier New" pitchFamily="34" charset="0"/>
+                <a:ea typeface="Courier New" pitchFamily="34" charset="-122"/>
+                <a:cs typeface="Courier New" pitchFamily="34" charset="-120"/>
+              </a:rPr>
+              <a:t>}</a:t>
+            </a:r>
+            <a:endParaRPr lang="en-US" sz="1450" dirty="0"/>
+          </a:p>
+        </p:txBody>
+      </p:sp>
+      <p:sp>
+        <p:nvSpPr>
+          <p:cNvPr id="6" name="Shape 4"/>
+          <p:cNvSpPr/>
+          <p:nvPr/>
+        </p:nvSpPr>
+        <p:spPr>
+          <a:xfrm>
+            <a:off x="7589520" y="1965960"/>
+            <a:ext cx="365760" cy="365760"/>
+          </a:xfrm>
+          <a:prstGeom prst="ellipse">
+            <a:avLst/>
+          </a:prstGeom>
+          <a:solidFill>
+            <a:srgbClr val="1E2761"/>
+          </a:solidFill>
+          <a:ln/>
+          <a:effectLst>
+            <a:outerShdw sx="100000" sy="100000" kx="0" ky="0" algn="bl" rotWithShape="0" blurRad="101600" dist="38100" dir="5400000">
+              <a:srgbClr val="9AA3C8">
+                <a:alpha val="35000"/>
+              </a:srgbClr>
+            </a:outerShdw>
+          </a:effectLst>
+        </p:spPr>
+      </p:sp>
+      <p:sp>
+        <p:nvSpPr>
+          <p:cNvPr id="7" name="Text 5"/>
+          <p:cNvSpPr/>
+          <p:nvPr/>
+        </p:nvSpPr>
+        <p:spPr>
+          <a:xfrm>
+            <a:off x="7589520" y="1965960"/>
+            <a:ext cx="365760" cy="365760"/>
+          </a:xfrm>
+          <a:prstGeom prst="rect">
+            <a:avLst/>
+          </a:prstGeom>
+          <a:noFill/>
+          <a:ln/>
+        </p:spPr>
+        <p:txBody>
+          <a:bodyPr wrap="square" lIns="0" tIns="0" rIns="0" bIns="0" rtlCol="0" anchor="ctr"/>
+          <a:lstStyle/>
+          <a:p>
+            <a:pPr algn="ctr" indent="0" marL="0">
+              <a:buNone/>
+            </a:pPr>
+            <a:r>
+              <a:rPr lang="en-US" sz="1600" b="1" dirty="0">
+                <a:solidFill>
+                  <a:srgbClr val="FFFFFF"/>
+                </a:solidFill>
+                <a:latin typeface="Cambria" pitchFamily="34" charset="0"/>
+                <a:ea typeface="Cambria" pitchFamily="34" charset="-122"/>
+                <a:cs typeface="Cambria" pitchFamily="34" charset="-120"/>
+              </a:rPr>
+              <a:t>1</a:t>
+            </a:r>
+            <a:endParaRPr lang="en-US" sz="1600" dirty="0"/>
+          </a:p>
+        </p:txBody>
+      </p:sp>
+      <p:sp>
+        <p:nvSpPr>
+          <p:cNvPr id="8" name="Text 6"/>
+          <p:cNvSpPr/>
+          <p:nvPr/>
+        </p:nvSpPr>
+        <p:spPr>
+          <a:xfrm>
+            <a:off x="8138160" y="1920240"/>
+            <a:ext cx="3474720" cy="411480"/>
+          </a:xfrm>
+          <a:prstGeom prst="rect">
+            <a:avLst/>
+          </a:prstGeom>
+          <a:noFill/>
+          <a:ln/>
+        </p:spPr>
+        <p:txBody>
+          <a:bodyPr wrap="square" lIns="0" tIns="0" rIns="0" bIns="0" rtlCol="0" anchor="ctr"/>
+          <a:lstStyle/>
+          <a:p>
+            <a:pPr indent="0" marL="0">
+              <a:buNone/>
+            </a:pPr>
+            <a:r>
+              <a:rPr lang="en-US" sz="1700" b="1" dirty="0">
+                <a:solidFill>
+                  <a:srgbClr val="1E2761"/>
+                </a:solidFill>
+                <a:latin typeface="Cambria" pitchFamily="34" charset="0"/>
+                <a:ea typeface="Cambria" pitchFamily="34" charset="-122"/>
+                <a:cs typeface="Cambria" pitchFamily="34" charset="-120"/>
+              </a:rPr>
+              <a:t>No default case</a:t>
+            </a:r>
+            <a:endParaRPr lang="en-US" sz="1700" dirty="0"/>
+          </a:p>
+        </p:txBody>
+      </p:sp>
+      <p:sp>
+        <p:nvSpPr>
+          <p:cNvPr id="9" name="Text 7"/>
+          <p:cNvSpPr/>
+          <p:nvPr/>
+        </p:nvSpPr>
+        <p:spPr>
+          <a:xfrm>
+            <a:off x="8138160" y="2331720"/>
+            <a:ext cx="3566160" cy="822960"/>
+          </a:xfrm>
+          <a:prstGeom prst="rect">
+            <a:avLst/>
+          </a:prstGeom>
+          <a:noFill/>
+          <a:ln/>
+        </p:spPr>
+        <p:txBody>
+          <a:bodyPr wrap="square" lIns="0" tIns="0" rIns="0" bIns="0" rtlCol="0" anchor="ctr"/>
+          <a:lstStyle/>
+          <a:p>
+            <a:pPr indent="0" marL="0">
+              <a:lnSpc>
+                <a:spcPct val="105000"/>
+              </a:lnSpc>
+              <a:buNone/>
+            </a:pPr>
+            <a:r>
+              <a:rPr lang="en-US" sz="1350" dirty="0">
+                <a:solidFill>
+                  <a:srgbClr val="1C2340"/>
+                </a:solidFill>
+                <a:latin typeface="Calibri" pitchFamily="34" charset="0"/>
+                <a:ea typeface="Calibri" pitchFamily="34" charset="-122"/>
+                <a:cs typeface="Calibri" pitchFamily="34" charset="-120"/>
+              </a:rPr>
+              <a:t>Every table row is an explicit case. Nothing hides in a catch-all.</a:t>
+            </a:r>
+            <a:endParaRPr lang="en-US" sz="1350" dirty="0"/>
+          </a:p>
+        </p:txBody>
+      </p:sp>
+      <p:sp>
+        <p:nvSpPr>
+          <p:cNvPr id="10" name="Shape 8"/>
+          <p:cNvSpPr/>
+          <p:nvPr/>
+        </p:nvSpPr>
+        <p:spPr>
+          <a:xfrm>
+            <a:off x="7589520" y="3291840"/>
+            <a:ext cx="365760" cy="365760"/>
+          </a:xfrm>
+          <a:prstGeom prst="ellipse">
+            <a:avLst/>
+          </a:prstGeom>
+          <a:solidFill>
+            <a:srgbClr val="1E2761"/>
+          </a:solidFill>
+          <a:ln/>
+          <a:effectLst>
+            <a:outerShdw sx="100000" sy="100000" kx="0" ky="0" algn="bl" rotWithShape="0" blurRad="101600" dist="38100" dir="5400000">
+              <a:srgbClr val="9AA3C8">
+                <a:alpha val="35000"/>
+              </a:srgbClr>
+            </a:outerShdw>
+          </a:effectLst>
+        </p:spPr>
+      </p:sp>
+      <p:sp>
+        <p:nvSpPr>
+          <p:cNvPr id="11" name="Text 9"/>
+          <p:cNvSpPr/>
+          <p:nvPr/>
+        </p:nvSpPr>
+        <p:spPr>
+          <a:xfrm>
+            <a:off x="7589520" y="3291840"/>
+            <a:ext cx="365760" cy="365760"/>
+          </a:xfrm>
+          <a:prstGeom prst="rect">
+            <a:avLst/>
+          </a:prstGeom>
+          <a:noFill/>
+          <a:ln/>
+        </p:spPr>
+        <p:txBody>
+          <a:bodyPr wrap="square" lIns="0" tIns="0" rIns="0" bIns="0" rtlCol="0" anchor="ctr"/>
+          <a:lstStyle/>
+          <a:p>
+            <a:pPr algn="ctr" indent="0" marL="0">
+              <a:buNone/>
+            </a:pPr>
+            <a:r>
+              <a:rPr lang="en-US" sz="1600" b="1" dirty="0">
+                <a:solidFill>
+                  <a:srgbClr val="FFFFFF"/>
+                </a:solidFill>
+                <a:latin typeface="Cambria" pitchFamily="34" charset="0"/>
+                <a:ea typeface="Cambria" pitchFamily="34" charset="-122"/>
+                <a:cs typeface="Cambria" pitchFamily="34" charset="-120"/>
+              </a:rPr>
+              <a:t>2</a:t>
+            </a:r>
+            <a:endParaRPr lang="en-US" sz="1600" dirty="0"/>
+          </a:p>
+        </p:txBody>
+      </p:sp>
+      <p:sp>
+        <p:nvSpPr>
+          <p:cNvPr id="12" name="Text 10"/>
+          <p:cNvSpPr/>
+          <p:nvPr/>
+        </p:nvSpPr>
+        <p:spPr>
+          <a:xfrm>
+            <a:off x="8138160" y="3246120"/>
+            <a:ext cx="3474720" cy="411480"/>
+          </a:xfrm>
+          <a:prstGeom prst="rect">
+            <a:avLst/>
+          </a:prstGeom>
+          <a:noFill/>
+          <a:ln/>
+        </p:spPr>
+        <p:txBody>
+          <a:bodyPr wrap="square" lIns="0" tIns="0" rIns="0" bIns="0" rtlCol="0" anchor="ctr"/>
+          <a:lstStyle/>
+          <a:p>
+            <a:pPr indent="0" marL="0">
+              <a:buNone/>
+            </a:pPr>
+            <a:r>
+              <a:rPr lang="en-US" sz="1700" b="1" dirty="0">
+                <a:solidFill>
+                  <a:srgbClr val="1E2761"/>
+                </a:solidFill>
+                <a:latin typeface="Cambria" pitchFamily="34" charset="0"/>
+                <a:ea typeface="Cambria" pitchFamily="34" charset="-122"/>
+                <a:cs typeface="Cambria" pitchFamily="34" charset="-120"/>
+              </a:rPr>
+              <a:t>Delete a case → won't build</a:t>
+            </a:r>
+            <a:endParaRPr lang="en-US" sz="1700" dirty="0"/>
+          </a:p>
+        </p:txBody>
+      </p:sp>
+      <p:sp>
+        <p:nvSpPr>
+          <p:cNvPr id="13" name="Text 11"/>
+          <p:cNvSpPr/>
+          <p:nvPr/>
+        </p:nvSpPr>
+        <p:spPr>
+          <a:xfrm>
+            <a:off x="8138160" y="3657600"/>
+            <a:ext cx="3566160" cy="822960"/>
+          </a:xfrm>
+          <a:prstGeom prst="rect">
+            <a:avLst/>
+          </a:prstGeom>
+          <a:noFill/>
+          <a:ln/>
+        </p:spPr>
+        <p:txBody>
+          <a:bodyPr wrap="square" lIns="0" tIns="0" rIns="0" bIns="0" rtlCol="0" anchor="ctr"/>
+          <a:lstStyle/>
+          <a:p>
+            <a:pPr indent="0" marL="0">
+              <a:lnSpc>
+                <a:spcPct val="105000"/>
+              </a:lnSpc>
+              <a:buNone/>
+            </a:pPr>
+            <a:r>
+              <a:rPr lang="en-US" sz="1350" dirty="0">
+                <a:solidFill>
+                  <a:srgbClr val="1C2340"/>
+                </a:solidFill>
+                <a:latin typeface="Calibri" pitchFamily="34" charset="0"/>
+                <a:ea typeface="Calibri" pitchFamily="34" charset="-122"/>
+                <a:cs typeface="Calibri" pitchFamily="34" charset="-120"/>
+              </a:rPr>
+              <a:t>Swift refuses to compile an incomplete switch. The compiler now enforces the table.</a:t>
+            </a:r>
+            <a:endParaRPr lang="en-US" sz="1350" dirty="0"/>
+          </a:p>
+        </p:txBody>
+      </p:sp>
+      <p:sp>
+        <p:nvSpPr>
+          <p:cNvPr id="14" name="Shape 12"/>
+          <p:cNvSpPr/>
+          <p:nvPr/>
+        </p:nvSpPr>
+        <p:spPr>
+          <a:xfrm>
+            <a:off x="7589520" y="4617720"/>
+            <a:ext cx="365760" cy="365760"/>
+          </a:xfrm>
+          <a:prstGeom prst="ellipse">
+            <a:avLst/>
+          </a:prstGeom>
+          <a:solidFill>
+            <a:srgbClr val="1E2761"/>
+          </a:solidFill>
+          <a:ln/>
+          <a:effectLst>
+            <a:outerShdw sx="100000" sy="100000" kx="0" ky="0" algn="bl" rotWithShape="0" blurRad="101600" dist="38100" dir="5400000">
+              <a:srgbClr val="9AA3C8">
+                <a:alpha val="35000"/>
+              </a:srgbClr>
+            </a:outerShdw>
+          </a:effectLst>
+        </p:spPr>
+      </p:sp>
+      <p:sp>
+        <p:nvSpPr>
+          <p:cNvPr id="15" name="Text 13"/>
+          <p:cNvSpPr/>
+          <p:nvPr/>
+        </p:nvSpPr>
+        <p:spPr>
+          <a:xfrm>
+            <a:off x="7589520" y="4617720"/>
+            <a:ext cx="365760" cy="365760"/>
+          </a:xfrm>
+          <a:prstGeom prst="rect">
+            <a:avLst/>
+          </a:prstGeom>
+          <a:noFill/>
+          <a:ln/>
+        </p:spPr>
+        <p:txBody>
+          <a:bodyPr wrap="square" lIns="0" tIns="0" rIns="0" bIns="0" rtlCol="0" anchor="ctr"/>
+          <a:lstStyle/>
+          <a:p>
+            <a:pPr algn="ctr" indent="0" marL="0">
+              <a:buNone/>
+            </a:pPr>
+            <a:r>
+              <a:rPr lang="en-US" sz="1600" b="1" dirty="0">
+                <a:solidFill>
+                  <a:srgbClr val="FFFFFF"/>
+                </a:solidFill>
+                <a:latin typeface="Cambria" pitchFamily="34" charset="0"/>
+                <a:ea typeface="Cambria" pitchFamily="34" charset="-122"/>
+                <a:cs typeface="Cambria" pitchFamily="34" charset="-120"/>
+              </a:rPr>
+              <a:t>3</a:t>
+            </a:r>
+            <a:endParaRPr lang="en-US" sz="1600" dirty="0"/>
+          </a:p>
+        </p:txBody>
+      </p:sp>
+      <p:sp>
+        <p:nvSpPr>
+          <p:cNvPr id="16" name="Text 14"/>
+          <p:cNvSpPr/>
+          <p:nvPr/>
+        </p:nvSpPr>
+        <p:spPr>
+          <a:xfrm>
+            <a:off x="8138160" y="4572000"/>
+            <a:ext cx="3474720" cy="411480"/>
+          </a:xfrm>
+          <a:prstGeom prst="rect">
+            <a:avLst/>
+          </a:prstGeom>
+          <a:noFill/>
+          <a:ln/>
+        </p:spPr>
+        <p:txBody>
+          <a:bodyPr wrap="square" lIns="0" tIns="0" rIns="0" bIns="0" rtlCol="0" anchor="ctr"/>
+          <a:lstStyle/>
+          <a:p>
+            <a:pPr indent="0" marL="0">
+              <a:buNone/>
+            </a:pPr>
+            <a:r>
+              <a:rPr lang="en-US" sz="1700" b="1" dirty="0">
+                <a:solidFill>
+                  <a:srgbClr val="1E2761"/>
+                </a:solidFill>
+                <a:latin typeface="Cambria" pitchFamily="34" charset="0"/>
+                <a:ea typeface="Cambria" pitchFamily="34" charset="-122"/>
+                <a:cs typeface="Cambria" pitchFamily="34" charset="-120"/>
+              </a:rPr>
+              <a:t>Change the table → change one case</a:t>
+            </a:r>
+            <a:endParaRPr lang="en-US" sz="1700" dirty="0"/>
+          </a:p>
+        </p:txBody>
+      </p:sp>
+      <p:sp>
+        <p:nvSpPr>
+          <p:cNvPr id="17" name="Text 15"/>
+          <p:cNvSpPr/>
+          <p:nvPr/>
+        </p:nvSpPr>
+        <p:spPr>
+          <a:xfrm>
+            <a:off x="8138160" y="4983480"/>
+            <a:ext cx="3566160" cy="822960"/>
+          </a:xfrm>
+          <a:prstGeom prst="rect">
+            <a:avLst/>
+          </a:prstGeom>
+          <a:noFill/>
+          <a:ln/>
+        </p:spPr>
+        <p:txBody>
+          <a:bodyPr wrap="square" lIns="0" tIns="0" rIns="0" bIns="0" rtlCol="0" anchor="ctr"/>
+          <a:lstStyle/>
+          <a:p>
+            <a:pPr indent="0" marL="0">
+              <a:lnSpc>
+                <a:spcPct val="105000"/>
+              </a:lnSpc>
+              <a:buNone/>
+            </a:pPr>
+            <a:r>
+              <a:rPr lang="en-US" sz="1350" dirty="0">
+                <a:solidFill>
+                  <a:srgbClr val="1C2340"/>
+                </a:solidFill>
+                <a:latin typeface="Calibri" pitchFamily="34" charset="0"/>
+                <a:ea typeface="Calibri" pitchFamily="34" charset="-122"/>
+                <a:cs typeface="Calibri" pitchFamily="34" charset="-120"/>
+              </a:rPr>
+              <a:t>The spec and the code stay in lockstep, row for row.</a:t>
+            </a:r>
+            <a:endParaRPr lang="en-US" sz="1350" dirty="0"/>
+          </a:p>
+        </p:txBody>
+      </p:sp>
+    </p:spTree>
+  </p:cSld>
+  <p:clrMapOvr>
+    <a:masterClrMapping/>
+  </p:clrMapOvr>
+</p:sld>
+</file>
+
+<file path=ppt/slides/slide13.xml><?xml version="1.0" encoding="utf-8"?>
+<p:sld xmlns:a="http://schemas.openxmlformats.org/drawingml/2006/main" xmlns:r="http://schemas.openxmlformats.org/officeDocument/2006/relationships" xmlns:p="http://schemas.openxmlformats.org/presentationml/2006/main">
+  <p:cSld name="Slide 13">
     <p:bg>
       <p:bgPr>
         <a:solidFill>
@@ -4875,9 +5548,9 @@
 </p:sld>
 </file>
 
-<file path=ppt/slides/slide13.xml><?xml version="1.0" encoding="utf-8"?>
+<file path=ppt/slides/slide14.xml><?xml version="1.0" encoding="utf-8"?>
 <p:sld xmlns:a="http://schemas.openxmlformats.org/drawingml/2006/main" xmlns:r="http://schemas.openxmlformats.org/officeDocument/2006/relationships" xmlns:p="http://schemas.openxmlformats.org/presentationml/2006/main">
-  <p:cSld name="Slide 13">
+  <p:cSld name="Slide 14">
     <p:bg>
       <p:bgPr>
         <a:solidFill>
@@ -5709,9 +6382,9 @@
 </p:sld>
 </file>
 
-<file path=ppt/slides/slide14.xml><?xml version="1.0" encoding="utf-8"?>
+<file path=ppt/slides/slide15.xml><?xml version="1.0" encoding="utf-8"?>
 <p:sld xmlns:a="http://schemas.openxmlformats.org/drawingml/2006/main" xmlns:r="http://schemas.openxmlformats.org/officeDocument/2006/relationships" xmlns:p="http://schemas.openxmlformats.org/presentationml/2006/main">
-  <p:cSld name="Slide 14">
+  <p:cSld name="Slide 15">
     <p:bg>
       <p:bgPr>
         <a:solidFill>
@@ -5979,6 +6652,510 @@
     <p:bg>
       <p:bgPr>
         <a:solidFill>
+          <a:srgbClr val="141937"/>
+        </a:solidFill>
+      </p:bgPr>
+    </p:bg>
+    <p:spTree>
+      <p:nvGrpSpPr>
+        <p:cNvPr id="1" name=""/>
+        <p:cNvGrpSpPr/>
+        <p:nvPr/>
+      </p:nvGrpSpPr>
+      <p:grpSpPr>
+        <a:xfrm>
+          <a:off x="0" y="0"/>
+          <a:ext cx="0" cy="0"/>
+          <a:chOff x="0" y="0"/>
+          <a:chExt cx="0" cy="0"/>
+        </a:xfrm>
+      </p:grpSpPr>
+      <p:sp>
+        <p:nvSpPr>
+          <p:cNvPr id="2" name="Text 0"/>
+          <p:cNvSpPr/>
+          <p:nvPr/>
+        </p:nvSpPr>
+        <p:spPr>
+          <a:xfrm>
+            <a:off x="548640" y="640080"/>
+            <a:ext cx="10058400" cy="365760"/>
+          </a:xfrm>
+          <a:prstGeom prst="rect">
+            <a:avLst/>
+          </a:prstGeom>
+          <a:noFill/>
+          <a:ln/>
+        </p:spPr>
+        <p:txBody>
+          <a:bodyPr wrap="square" lIns="0" tIns="0" rIns="0" bIns="0" rtlCol="0" anchor="ctr"/>
+          <a:lstStyle/>
+          <a:p>
+            <a:pPr indent="0" marL="0">
+              <a:buNone/>
+            </a:pPr>
+            <a:r>
+              <a:rPr lang="en-US" sz="1400" b="1" spc="300" kern="0" dirty="0">
+                <a:solidFill>
+                  <a:srgbClr val="F7A32B"/>
+                </a:solidFill>
+                <a:latin typeface="Calibri" pitchFamily="34" charset="0"/>
+                <a:ea typeface="Calibri" pitchFamily="34" charset="-122"/>
+                <a:cs typeface="Calibri" pitchFamily="34" charset="-120"/>
+              </a:rPr>
+              <a:t>MOTIVATION</a:t>
+            </a:r>
+            <a:endParaRPr lang="en-US" sz="1400" dirty="0"/>
+          </a:p>
+        </p:txBody>
+      </p:sp>
+      <p:sp>
+        <p:nvSpPr>
+          <p:cNvPr id="3" name="Text 1"/>
+          <p:cNvSpPr/>
+          <p:nvPr/>
+        </p:nvSpPr>
+        <p:spPr>
+          <a:xfrm>
+            <a:off x="548640" y="1005840"/>
+            <a:ext cx="10972800" cy="822960"/>
+          </a:xfrm>
+          <a:prstGeom prst="rect">
+            <a:avLst/>
+          </a:prstGeom>
+          <a:noFill/>
+          <a:ln/>
+        </p:spPr>
+        <p:txBody>
+          <a:bodyPr wrap="square" lIns="0" tIns="0" rIns="0" bIns="0" rtlCol="0" anchor="ctr"/>
+          <a:lstStyle/>
+          <a:p>
+            <a:pPr indent="0" marL="0">
+              <a:buNone/>
+            </a:pPr>
+            <a:r>
+              <a:rPr lang="en-US" sz="4000" b="1" dirty="0">
+                <a:solidFill>
+                  <a:srgbClr val="FFFFFF"/>
+                </a:solidFill>
+                <a:latin typeface="Cambria" pitchFamily="34" charset="0"/>
+                <a:ea typeface="Cambria" pitchFamily="34" charset="-122"/>
+                <a:cs typeface="Cambria" pitchFamily="34" charset="-120"/>
+              </a:rPr>
+              <a:t>Correcting AI slop</a:t>
+            </a:r>
+            <a:endParaRPr lang="en-US" sz="4000" dirty="0"/>
+          </a:p>
+        </p:txBody>
+      </p:sp>
+      <p:sp>
+        <p:nvSpPr>
+          <p:cNvPr id="4" name="Text 2"/>
+          <p:cNvSpPr/>
+          <p:nvPr/>
+        </p:nvSpPr>
+        <p:spPr>
+          <a:xfrm>
+            <a:off x="548640" y="1874520"/>
+            <a:ext cx="10972800" cy="457200"/>
+          </a:xfrm>
+          <a:prstGeom prst="rect">
+            <a:avLst/>
+          </a:prstGeom>
+          <a:noFill/>
+          <a:ln/>
+        </p:spPr>
+        <p:txBody>
+          <a:bodyPr wrap="square" lIns="0" tIns="0" rIns="0" bIns="0" rtlCol="0" anchor="ctr"/>
+          <a:lstStyle/>
+          <a:p>
+            <a:pPr indent="0" marL="0">
+              <a:buNone/>
+            </a:pPr>
+            <a:r>
+              <a:rPr lang="en-US" sz="2000" dirty="0">
+                <a:solidFill>
+                  <a:srgbClr val="CADCFC"/>
+                </a:solidFill>
+                <a:latin typeface="Calibri" pitchFamily="34" charset="0"/>
+                <a:ea typeface="Calibri" pitchFamily="34" charset="-122"/>
+                <a:cs typeface="Calibri" pitchFamily="34" charset="-120"/>
+              </a:rPr>
+              <a:t>What if the agent's output were correct by construction?</a:t>
+            </a:r>
+            <a:endParaRPr lang="en-US" sz="2000" dirty="0"/>
+          </a:p>
+        </p:txBody>
+      </p:sp>
+      <p:sp>
+        <p:nvSpPr>
+          <p:cNvPr id="5" name="Shape 3"/>
+          <p:cNvSpPr/>
+          <p:nvPr/>
+        </p:nvSpPr>
+        <p:spPr>
+          <a:xfrm>
+            <a:off x="566928" y="2688336"/>
+            <a:ext cx="146304" cy="146304"/>
+          </a:xfrm>
+          <a:prstGeom prst="ellipse">
+            <a:avLst/>
+          </a:prstGeom>
+          <a:solidFill>
+            <a:srgbClr val="F7A32B"/>
+          </a:solidFill>
+          <a:ln/>
+        </p:spPr>
+      </p:sp>
+      <p:sp>
+        <p:nvSpPr>
+          <p:cNvPr id="6" name="Text 4"/>
+          <p:cNvSpPr/>
+          <p:nvPr/>
+        </p:nvSpPr>
+        <p:spPr>
+          <a:xfrm>
+            <a:off x="914400" y="2606040"/>
+            <a:ext cx="10972800" cy="731520"/>
+          </a:xfrm>
+          <a:prstGeom prst="rect">
+            <a:avLst/>
+          </a:prstGeom>
+          <a:noFill/>
+          <a:ln/>
+        </p:spPr>
+        <p:txBody>
+          <a:bodyPr wrap="square" lIns="0" tIns="0" rIns="0" bIns="0" rtlCol="0" anchor="ctr"/>
+          <a:lstStyle/>
+          <a:p>
+            <a:pPr indent="0" marL="0">
+              <a:lnSpc>
+                <a:spcPct val="102000"/>
+              </a:lnSpc>
+              <a:buNone/>
+            </a:pPr>
+            <a:r>
+              <a:rPr lang="en-US" sz="1700" b="1" dirty="0">
+                <a:solidFill>
+                  <a:srgbClr val="FFFFFF"/>
+                </a:solidFill>
+                <a:latin typeface="Calibri" pitchFamily="34" charset="0"/>
+                <a:ea typeface="Calibri" pitchFamily="34" charset="-122"/>
+                <a:cs typeface="Calibri" pitchFamily="34" charset="-120"/>
+              </a:rPr>
+              <a:t>Fast, and confidently wrong.  </a:t>
+            </a:r>
+            <a:pPr indent="0" marL="0">
+              <a:lnSpc>
+                <a:spcPct val="102000"/>
+              </a:lnSpc>
+              <a:buNone/>
+            </a:pPr>
+            <a:r>
+              <a:rPr lang="en-US" sz="1700" dirty="0">
+                <a:solidFill>
+                  <a:srgbClr val="C7CDEC"/>
+                </a:solidFill>
+                <a:latin typeface="Calibri" pitchFamily="34" charset="0"/>
+                <a:ea typeface="Calibri" pitchFamily="34" charset="-122"/>
+                <a:cs typeface="Calibri" pitchFamily="34" charset="-120"/>
+              </a:rPr>
+              <a:t>Agentic coding generates plausible code with subtle bugs.</a:t>
+            </a:r>
+            <a:endParaRPr lang="en-US" sz="1700" dirty="0"/>
+          </a:p>
+        </p:txBody>
+      </p:sp>
+      <p:sp>
+        <p:nvSpPr>
+          <p:cNvPr id="7" name="Shape 5"/>
+          <p:cNvSpPr/>
+          <p:nvPr/>
+        </p:nvSpPr>
+        <p:spPr>
+          <a:xfrm>
+            <a:off x="566928" y="3529584"/>
+            <a:ext cx="146304" cy="146304"/>
+          </a:xfrm>
+          <a:prstGeom prst="ellipse">
+            <a:avLst/>
+          </a:prstGeom>
+          <a:solidFill>
+            <a:srgbClr val="F7A32B"/>
+          </a:solidFill>
+          <a:ln/>
+        </p:spPr>
+      </p:sp>
+      <p:sp>
+        <p:nvSpPr>
+          <p:cNvPr id="8" name="Text 6"/>
+          <p:cNvSpPr/>
+          <p:nvPr/>
+        </p:nvSpPr>
+        <p:spPr>
+          <a:xfrm>
+            <a:off x="914400" y="3447288"/>
+            <a:ext cx="10972800" cy="731520"/>
+          </a:xfrm>
+          <a:prstGeom prst="rect">
+            <a:avLst/>
+          </a:prstGeom>
+          <a:noFill/>
+          <a:ln/>
+        </p:spPr>
+        <p:txBody>
+          <a:bodyPr wrap="square" lIns="0" tIns="0" rIns="0" bIns="0" rtlCol="0" anchor="ctr"/>
+          <a:lstStyle/>
+          <a:p>
+            <a:pPr indent="0" marL="0">
+              <a:lnSpc>
+                <a:spcPct val="102000"/>
+              </a:lnSpc>
+              <a:buNone/>
+            </a:pPr>
+            <a:r>
+              <a:rPr lang="en-US" sz="1700" b="1" dirty="0">
+                <a:solidFill>
+                  <a:srgbClr val="FFFFFF"/>
+                </a:solidFill>
+                <a:latin typeface="Calibri" pitchFamily="34" charset="0"/>
+                <a:ea typeface="Calibri" pitchFamily="34" charset="-122"/>
+                <a:cs typeface="Calibri" pitchFamily="34" charset="-120"/>
+              </a:rPr>
+              <a:t>The bottleneck moved.  </a:t>
+            </a:r>
+            <a:pPr indent="0" marL="0">
+              <a:lnSpc>
+                <a:spcPct val="102000"/>
+              </a:lnSpc>
+              <a:buNone/>
+            </a:pPr>
+            <a:r>
+              <a:rPr lang="en-US" sz="1700" dirty="0">
+                <a:solidFill>
+                  <a:srgbClr val="C7CDEC"/>
+                </a:solidFill>
+                <a:latin typeface="Calibri" pitchFamily="34" charset="0"/>
+                <a:ea typeface="Calibri" pitchFamily="34" charset="-122"/>
+                <a:cs typeface="Calibri" pitchFamily="34" charset="-120"/>
+              </a:rPr>
+              <a:t>The hard part isn't writing code anymore — it's trusting it.</a:t>
+            </a:r>
+            <a:endParaRPr lang="en-US" sz="1700" dirty="0"/>
+          </a:p>
+        </p:txBody>
+      </p:sp>
+      <p:sp>
+        <p:nvSpPr>
+          <p:cNvPr id="9" name="Shape 7"/>
+          <p:cNvSpPr/>
+          <p:nvPr/>
+        </p:nvSpPr>
+        <p:spPr>
+          <a:xfrm>
+            <a:off x="566928" y="4370832"/>
+            <a:ext cx="146304" cy="146304"/>
+          </a:xfrm>
+          <a:prstGeom prst="ellipse">
+            <a:avLst/>
+          </a:prstGeom>
+          <a:solidFill>
+            <a:srgbClr val="F7A32B"/>
+          </a:solidFill>
+          <a:ln/>
+        </p:spPr>
+      </p:sp>
+      <p:sp>
+        <p:nvSpPr>
+          <p:cNvPr id="10" name="Text 8"/>
+          <p:cNvSpPr/>
+          <p:nvPr/>
+        </p:nvSpPr>
+        <p:spPr>
+          <a:xfrm>
+            <a:off x="914400" y="4288536"/>
+            <a:ext cx="10972800" cy="731520"/>
+          </a:xfrm>
+          <a:prstGeom prst="rect">
+            <a:avLst/>
+          </a:prstGeom>
+          <a:noFill/>
+          <a:ln/>
+        </p:spPr>
+        <p:txBody>
+          <a:bodyPr wrap="square" lIns="0" tIns="0" rIns="0" bIns="0" rtlCol="0" anchor="ctr"/>
+          <a:lstStyle/>
+          <a:p>
+            <a:pPr indent="0" marL="0">
+              <a:lnSpc>
+                <a:spcPct val="102000"/>
+              </a:lnSpc>
+              <a:buNone/>
+            </a:pPr>
+            <a:r>
+              <a:rPr lang="en-US" sz="1700" b="1" dirty="0">
+                <a:solidFill>
+                  <a:srgbClr val="FFFFFF"/>
+                </a:solidFill>
+                <a:latin typeface="Calibri" pitchFamily="34" charset="0"/>
+                <a:ea typeface="Calibri" pitchFamily="34" charset="-122"/>
+                <a:cs typeface="Calibri" pitchFamily="34" charset="-120"/>
+              </a:rPr>
+              <a:t>Reviewing code doesn't scale. A table does.  </a:t>
+            </a:r>
+            <a:pPr indent="0" marL="0">
+              <a:lnSpc>
+                <a:spcPct val="102000"/>
+              </a:lnSpc>
+              <a:buNone/>
+            </a:pPr>
+            <a:r>
+              <a:rPr lang="en-US" sz="1700" dirty="0">
+                <a:solidFill>
+                  <a:srgbClr val="C7CDEC"/>
+                </a:solidFill>
+                <a:latin typeface="Calibri" pitchFamily="34" charset="0"/>
+                <a:ea typeface="Calibri" pitchFamily="34" charset="-122"/>
+                <a:cs typeface="Calibri" pitchFamily="34" charset="-120"/>
+              </a:rPr>
+              <a:t>You can't out-review a firehose of generated diffs — but anyone can check a spec.</a:t>
+            </a:r>
+            <a:endParaRPr lang="en-US" sz="1700" dirty="0"/>
+          </a:p>
+        </p:txBody>
+      </p:sp>
+      <p:sp>
+        <p:nvSpPr>
+          <p:cNvPr id="11" name="Shape 9"/>
+          <p:cNvSpPr/>
+          <p:nvPr/>
+        </p:nvSpPr>
+        <p:spPr>
+          <a:xfrm>
+            <a:off x="566928" y="5212080"/>
+            <a:ext cx="146304" cy="146304"/>
+          </a:xfrm>
+          <a:prstGeom prst="ellipse">
+            <a:avLst/>
+          </a:prstGeom>
+          <a:solidFill>
+            <a:srgbClr val="F7A32B"/>
+          </a:solidFill>
+          <a:ln/>
+        </p:spPr>
+      </p:sp>
+      <p:sp>
+        <p:nvSpPr>
+          <p:cNvPr id="12" name="Text 10"/>
+          <p:cNvSpPr/>
+          <p:nvPr/>
+        </p:nvSpPr>
+        <p:spPr>
+          <a:xfrm>
+            <a:off x="914400" y="5129784"/>
+            <a:ext cx="10972800" cy="731520"/>
+          </a:xfrm>
+          <a:prstGeom prst="rect">
+            <a:avLst/>
+          </a:prstGeom>
+          <a:noFill/>
+          <a:ln/>
+        </p:spPr>
+        <p:txBody>
+          <a:bodyPr wrap="square" lIns="0" tIns="0" rIns="0" bIns="0" rtlCol="0" anchor="ctr"/>
+          <a:lstStyle/>
+          <a:p>
+            <a:pPr indent="0" marL="0">
+              <a:lnSpc>
+                <a:spcPct val="102000"/>
+              </a:lnSpc>
+              <a:buNone/>
+            </a:pPr>
+            <a:r>
+              <a:rPr lang="en-US" sz="1700" b="1" dirty="0">
+                <a:solidFill>
+                  <a:srgbClr val="FFFFFF"/>
+                </a:solidFill>
+                <a:latin typeface="Calibri" pitchFamily="34" charset="0"/>
+                <a:ea typeface="Calibri" pitchFamily="34" charset="-122"/>
+                <a:cs typeface="Calibri" pitchFamily="34" charset="-120"/>
+              </a:rPr>
+              <a:t>Correct by construction, not by luck.  </a:t>
+            </a:r>
+            <a:pPr indent="0" marL="0">
+              <a:lnSpc>
+                <a:spcPct val="102000"/>
+              </a:lnSpc>
+              <a:buNone/>
+            </a:pPr>
+            <a:r>
+              <a:rPr lang="en-US" sz="1700" dirty="0">
+                <a:solidFill>
+                  <a:srgbClr val="C7CDEC"/>
+                </a:solidFill>
+                <a:latin typeface="Calibri" pitchFamily="34" charset="0"/>
+                <a:ea typeface="Calibri" pitchFamily="34" charset="-122"/>
+                <a:cs typeface="Calibri" pitchFamily="34" charset="-120"/>
+              </a:rPr>
+              <a:t>Complete + disjoint spec + exhaustive switch → the compiler certifies the agent's work.</a:t>
+            </a:r>
+            <a:endParaRPr lang="en-US" sz="1700" dirty="0"/>
+          </a:p>
+        </p:txBody>
+      </p:sp>
+      <p:sp>
+        <p:nvSpPr>
+          <p:cNvPr id="13" name="Text 11"/>
+          <p:cNvSpPr/>
+          <p:nvPr/>
+        </p:nvSpPr>
+        <p:spPr>
+          <a:xfrm>
+            <a:off x="548640" y="6080760"/>
+            <a:ext cx="10972800" cy="457200"/>
+          </a:xfrm>
+          <a:prstGeom prst="rect">
+            <a:avLst/>
+          </a:prstGeom>
+          <a:noFill/>
+          <a:ln/>
+        </p:spPr>
+        <p:txBody>
+          <a:bodyPr wrap="square" lIns="0" tIns="0" rIns="0" bIns="0" rtlCol="0" anchor="ctr"/>
+          <a:lstStyle/>
+          <a:p>
+            <a:pPr indent="0" marL="0">
+              <a:buNone/>
+            </a:pPr>
+            <a:r>
+              <a:rPr lang="en-US" sz="1600" i="1" dirty="0">
+                <a:solidFill>
+                  <a:srgbClr val="F7A32B"/>
+                </a:solidFill>
+                <a:latin typeface="Calibri" pitchFamily="34" charset="0"/>
+                <a:ea typeface="Calibri" pitchFamily="34" charset="-122"/>
+                <a:cs typeface="Calibri" pitchFamily="34" charset="-120"/>
+              </a:rPr>
+              <a:t>We're not making the agent write more — we're making it impossible for it to be silently wrong.</a:t>
+            </a:r>
+            <a:endParaRPr lang="en-US" sz="1600" dirty="0"/>
+          </a:p>
+        </p:txBody>
+      </p:sp>
+    </p:spTree>
+  </p:cSld>
+  <p:clrMapOvr>
+    <a:masterClrMapping/>
+  </p:clrMapOvr>
+</p:sld>
+</file>
+
+<file path=ppt/slides/slide3.xml><?xml version="1.0" encoding="utf-8"?>
+<p:sld xmlns:a="http://schemas.openxmlformats.org/drawingml/2006/main" xmlns:r="http://schemas.openxmlformats.org/officeDocument/2006/relationships" xmlns:p="http://schemas.openxmlformats.org/presentationml/2006/main">
+  <p:cSld name="Slide 3">
+    <p:bg>
+      <p:bgPr>
+        <a:solidFill>
           <a:srgbClr val="F6F7FC"/>
         </a:solidFill>
       </p:bgPr>
@@ -6679,9 +7856,9 @@
 </p:sld>
 </file>
 
-<file path=ppt/slides/slide3.xml><?xml version="1.0" encoding="utf-8"?>
+<file path=ppt/slides/slide4.xml><?xml version="1.0" encoding="utf-8"?>
 <p:sld xmlns:a="http://schemas.openxmlformats.org/drawingml/2006/main" xmlns:r="http://schemas.openxmlformats.org/officeDocument/2006/relationships" xmlns:p="http://schemas.openxmlformats.org/presentationml/2006/main">
-  <p:cSld name="Slide 3">
+  <p:cSld name="Slide 4">
     <p:bg>
       <p:bgPr>
         <a:solidFill>
@@ -6882,823 +8059,6 @@
               <a:t>The table stays the source of truth. The agent and the compiler keep the code faithful to it.</a:t>
             </a:r>
             <a:endParaRPr lang="en-US" sz="1600" dirty="0"/>
-          </a:p>
-        </p:txBody>
-      </p:sp>
-    </p:spTree>
-  </p:cSld>
-  <p:clrMapOvr>
-    <a:masterClrMapping/>
-  </p:clrMapOvr>
-</p:sld>
-</file>
-
-<file path=ppt/slides/slide4.xml><?xml version="1.0" encoding="utf-8"?>
-<p:sld xmlns:a="http://schemas.openxmlformats.org/drawingml/2006/main" xmlns:r="http://schemas.openxmlformats.org/officeDocument/2006/relationships" xmlns:p="http://schemas.openxmlformats.org/presentationml/2006/main">
-  <p:cSld name="Slide 4">
-    <p:bg>
-      <p:bgPr>
-        <a:solidFill>
-          <a:srgbClr val="F6F7FC"/>
-        </a:solidFill>
-      </p:bgPr>
-    </p:bg>
-    <p:spTree>
-      <p:nvGrpSpPr>
-        <p:cNvPr id="1" name=""/>
-        <p:cNvGrpSpPr/>
-        <p:nvPr/>
-      </p:nvGrpSpPr>
-      <p:grpSpPr>
-        <a:xfrm>
-          <a:off x="0" y="0"/>
-          <a:ext cx="0" cy="0"/>
-          <a:chOff x="0" y="0"/>
-          <a:chExt cx="0" cy="0"/>
-        </a:xfrm>
-      </p:grpSpPr>
-      <p:sp>
-        <p:nvSpPr>
-          <p:cNvPr id="2" name="Text 0"/>
-          <p:cNvSpPr/>
-          <p:nvPr/>
-        </p:nvSpPr>
-        <p:spPr>
-          <a:xfrm>
-            <a:off x="548640" y="411480"/>
-            <a:ext cx="11064240" cy="274320"/>
-          </a:xfrm>
-          <a:prstGeom prst="rect">
-            <a:avLst/>
-          </a:prstGeom>
-          <a:noFill/>
-          <a:ln/>
-        </p:spPr>
-        <p:txBody>
-          <a:bodyPr wrap="square" lIns="0" tIns="0" rIns="0" bIns="0" rtlCol="0" anchor="ctr"/>
-          <a:lstStyle/>
-          <a:p>
-            <a:pPr algn="l" indent="0" marL="0">
-              <a:buNone/>
-            </a:pPr>
-            <a:r>
-              <a:rPr lang="en-US" sz="1200" b="1" spc="200" kern="0" dirty="0">
-                <a:solidFill>
-                  <a:srgbClr val="F7A32B"/>
-                </a:solidFill>
-                <a:latin typeface="Calibri" pitchFamily="34" charset="0"/>
-                <a:ea typeface="Calibri" pitchFamily="34" charset="-122"/>
-                <a:cs typeface="Calibri" pitchFamily="34" charset="-120"/>
-              </a:rPr>
-              <a:t>OUR DEMO MACHINE</a:t>
-            </a:r>
-            <a:endParaRPr lang="en-US" sz="1200" dirty="0"/>
-          </a:p>
-        </p:txBody>
-      </p:sp>
-      <p:sp>
-        <p:nvSpPr>
-          <p:cNvPr id="3" name="Text 1"/>
-          <p:cNvSpPr/>
-          <p:nvPr/>
-        </p:nvSpPr>
-        <p:spPr>
-          <a:xfrm>
-            <a:off x="548640" y="658368"/>
-            <a:ext cx="7315200" cy="777240"/>
-          </a:xfrm>
-          <a:prstGeom prst="rect">
-            <a:avLst/>
-          </a:prstGeom>
-          <a:noFill/>
-          <a:ln/>
-        </p:spPr>
-        <p:txBody>
-          <a:bodyPr wrap="square" lIns="0" tIns="0" rIns="0" bIns="0" rtlCol="0" anchor="ctr"/>
-          <a:lstStyle/>
-          <a:p>
-            <a:pPr algn="l" indent="0" marL="0">
-              <a:buNone/>
-            </a:pPr>
-            <a:r>
-              <a:rPr lang="en-US" sz="3400" b="1" dirty="0">
-                <a:solidFill>
-                  <a:srgbClr val="1E2761"/>
-                </a:solidFill>
-                <a:latin typeface="Cambria" pitchFamily="34" charset="0"/>
-                <a:ea typeface="Cambria" pitchFamily="34" charset="-122"/>
-                <a:cs typeface="Cambria" pitchFamily="34" charset="-120"/>
-              </a:rPr>
-              <a:t>A vending machine</a:t>
-            </a:r>
-            <a:endParaRPr lang="en-US" sz="3400" dirty="0"/>
-          </a:p>
-        </p:txBody>
-      </p:sp>
-      <p:sp>
-        <p:nvSpPr>
-          <p:cNvPr id="4" name="Shape 2"/>
-          <p:cNvSpPr/>
-          <p:nvPr/>
-        </p:nvSpPr>
-        <p:spPr>
-          <a:xfrm>
-            <a:off x="8503920" y="1554480"/>
-            <a:ext cx="3017520" cy="4206240"/>
-          </a:xfrm>
-          <a:prstGeom prst="roundRect">
-            <a:avLst>
-              <a:gd name="adj" fmla="val 4242"/>
-            </a:avLst>
-          </a:prstGeom>
-          <a:solidFill>
-            <a:srgbClr val="1E2761"/>
-          </a:solidFill>
-          <a:ln/>
-          <a:effectLst>
-            <a:outerShdw sx="100000" sy="100000" kx="0" ky="0" algn="bl" rotWithShape="0" blurRad="101600" dist="38100" dir="5400000">
-              <a:srgbClr val="9AA3C8">
-                <a:alpha val="35000"/>
-              </a:srgbClr>
-            </a:outerShdw>
-          </a:effectLst>
-        </p:spPr>
-      </p:sp>
-      <p:sp>
-        <p:nvSpPr>
-          <p:cNvPr id="5" name="Shape 3"/>
-          <p:cNvSpPr/>
-          <p:nvPr/>
-        </p:nvSpPr>
-        <p:spPr>
-          <a:xfrm>
-            <a:off x="8778240" y="1828800"/>
-            <a:ext cx="1920240" cy="3657600"/>
-          </a:xfrm>
-          <a:prstGeom prst="roundRect">
-            <a:avLst>
-              <a:gd name="adj" fmla="val 3810"/>
-            </a:avLst>
-          </a:prstGeom>
-          <a:solidFill>
-            <a:srgbClr val="2C3670"/>
-          </a:solidFill>
-          <a:ln/>
-        </p:spPr>
-      </p:sp>
-      <p:sp>
-        <p:nvSpPr>
-          <p:cNvPr id="6" name="Shape 4"/>
-          <p:cNvSpPr/>
-          <p:nvPr/>
-        </p:nvSpPr>
-        <p:spPr>
-          <a:xfrm>
-            <a:off x="8915400" y="2011680"/>
-            <a:ext cx="548640" cy="548640"/>
-          </a:xfrm>
-          <a:prstGeom prst="roundRect">
-            <a:avLst>
-              <a:gd name="adj" fmla="val 8333"/>
-            </a:avLst>
-          </a:prstGeom>
-          <a:solidFill>
-            <a:srgbClr val="CADCFC"/>
-          </a:solidFill>
-          <a:ln/>
-        </p:spPr>
-      </p:sp>
-      <p:sp>
-        <p:nvSpPr>
-          <p:cNvPr id="7" name="Shape 5"/>
-          <p:cNvSpPr/>
-          <p:nvPr/>
-        </p:nvSpPr>
-        <p:spPr>
-          <a:xfrm>
-            <a:off x="9601200" y="2011680"/>
-            <a:ext cx="548640" cy="548640"/>
-          </a:xfrm>
-          <a:prstGeom prst="roundRect">
-            <a:avLst>
-              <a:gd name="adj" fmla="val 8333"/>
-            </a:avLst>
-          </a:prstGeom>
-          <a:solidFill>
-            <a:srgbClr val="CADCFC"/>
-          </a:solidFill>
-          <a:ln/>
-        </p:spPr>
-      </p:sp>
-      <p:sp>
-        <p:nvSpPr>
-          <p:cNvPr id="8" name="Shape 6"/>
-          <p:cNvSpPr/>
-          <p:nvPr/>
-        </p:nvSpPr>
-        <p:spPr>
-          <a:xfrm>
-            <a:off x="8915400" y="2697480"/>
-            <a:ext cx="548640" cy="548640"/>
-          </a:xfrm>
-          <a:prstGeom prst="roundRect">
-            <a:avLst>
-              <a:gd name="adj" fmla="val 8333"/>
-            </a:avLst>
-          </a:prstGeom>
-          <a:solidFill>
-            <a:srgbClr val="CADCFC"/>
-          </a:solidFill>
-          <a:ln/>
-        </p:spPr>
-      </p:sp>
-      <p:sp>
-        <p:nvSpPr>
-          <p:cNvPr id="9" name="Shape 7"/>
-          <p:cNvSpPr/>
-          <p:nvPr/>
-        </p:nvSpPr>
-        <p:spPr>
-          <a:xfrm>
-            <a:off x="9601200" y="2697480"/>
-            <a:ext cx="548640" cy="548640"/>
-          </a:xfrm>
-          <a:prstGeom prst="roundRect">
-            <a:avLst>
-              <a:gd name="adj" fmla="val 8333"/>
-            </a:avLst>
-          </a:prstGeom>
-          <a:solidFill>
-            <a:srgbClr val="CADCFC"/>
-          </a:solidFill>
-          <a:ln/>
-        </p:spPr>
-      </p:sp>
-      <p:sp>
-        <p:nvSpPr>
-          <p:cNvPr id="10" name="Shape 8"/>
-          <p:cNvSpPr/>
-          <p:nvPr/>
-        </p:nvSpPr>
-        <p:spPr>
-          <a:xfrm>
-            <a:off x="8915400" y="3383280"/>
-            <a:ext cx="548640" cy="548640"/>
-          </a:xfrm>
-          <a:prstGeom prst="roundRect">
-            <a:avLst>
-              <a:gd name="adj" fmla="val 8333"/>
-            </a:avLst>
-          </a:prstGeom>
-          <a:solidFill>
-            <a:srgbClr val="CADCFC"/>
-          </a:solidFill>
-          <a:ln/>
-        </p:spPr>
-      </p:sp>
-      <p:sp>
-        <p:nvSpPr>
-          <p:cNvPr id="11" name="Shape 9"/>
-          <p:cNvSpPr/>
-          <p:nvPr/>
-        </p:nvSpPr>
-        <p:spPr>
-          <a:xfrm>
-            <a:off x="9601200" y="3383280"/>
-            <a:ext cx="548640" cy="548640"/>
-          </a:xfrm>
-          <a:prstGeom prst="roundRect">
-            <a:avLst>
-              <a:gd name="adj" fmla="val 8333"/>
-            </a:avLst>
-          </a:prstGeom>
-          <a:solidFill>
-            <a:srgbClr val="CADCFC"/>
-          </a:solidFill>
-          <a:ln/>
-        </p:spPr>
-      </p:sp>
-      <p:sp>
-        <p:nvSpPr>
-          <p:cNvPr id="12" name="Shape 10"/>
-          <p:cNvSpPr/>
-          <p:nvPr/>
-        </p:nvSpPr>
-        <p:spPr>
-          <a:xfrm>
-            <a:off x="10835640" y="2011680"/>
-            <a:ext cx="457200" cy="2194560"/>
-          </a:xfrm>
-          <a:prstGeom prst="roundRect">
-            <a:avLst>
-              <a:gd name="adj" fmla="val 12000"/>
-            </a:avLst>
-          </a:prstGeom>
-          <a:solidFill>
-            <a:srgbClr val="0E1330"/>
-          </a:solidFill>
-          <a:ln/>
-        </p:spPr>
-      </p:sp>
-      <p:sp>
-        <p:nvSpPr>
-          <p:cNvPr id="13" name="Text 11"/>
-          <p:cNvSpPr/>
-          <p:nvPr/>
-        </p:nvSpPr>
-        <p:spPr>
-          <a:xfrm>
-            <a:off x="10744200" y="4480560"/>
-            <a:ext cx="640080" cy="365760"/>
-          </a:xfrm>
-          <a:prstGeom prst="rect">
-            <a:avLst/>
-          </a:prstGeom>
-          <a:noFill/>
-          <a:ln/>
-        </p:spPr>
-        <p:txBody>
-          <a:bodyPr wrap="square" lIns="0" tIns="0" rIns="0" bIns="0" rtlCol="0" anchor="ctr"/>
-          <a:lstStyle/>
-          <a:p>
-            <a:pPr algn="ctr" indent="0" marL="0">
-              <a:buNone/>
-            </a:pPr>
-            <a:r>
-              <a:rPr lang="en-US" sz="1200" b="1" dirty="0">
-                <a:solidFill>
-                  <a:srgbClr val="2FB170"/>
-                </a:solidFill>
-                <a:latin typeface="Courier New" pitchFamily="34" charset="0"/>
-                <a:ea typeface="Courier New" pitchFamily="34" charset="-122"/>
-                <a:cs typeface="Courier New" pitchFamily="34" charset="-120"/>
-              </a:rPr>
-              <a:t>$1.50</a:t>
-            </a:r>
-            <a:endParaRPr lang="en-US" sz="1200" dirty="0"/>
-          </a:p>
-        </p:txBody>
-      </p:sp>
-      <p:sp>
-        <p:nvSpPr>
-          <p:cNvPr id="14" name="Shape 12"/>
-          <p:cNvSpPr/>
-          <p:nvPr/>
-        </p:nvSpPr>
-        <p:spPr>
-          <a:xfrm>
-            <a:off x="8915400" y="4937760"/>
-            <a:ext cx="2194560" cy="502920"/>
-          </a:xfrm>
-          <a:prstGeom prst="roundRect">
-            <a:avLst>
-              <a:gd name="adj" fmla="val 10909"/>
-            </a:avLst>
-          </a:prstGeom>
-          <a:solidFill>
-            <a:srgbClr val="0E1330"/>
-          </a:solidFill>
-          <a:ln/>
-        </p:spPr>
-      </p:sp>
-      <p:sp>
-        <p:nvSpPr>
-          <p:cNvPr id="15" name="Shape 13"/>
-          <p:cNvSpPr/>
-          <p:nvPr/>
-        </p:nvSpPr>
-        <p:spPr>
-          <a:xfrm>
-            <a:off x="548640" y="1874520"/>
-            <a:ext cx="365760" cy="365760"/>
-          </a:xfrm>
-          <a:prstGeom prst="ellipse">
-            <a:avLst/>
-          </a:prstGeom>
-          <a:solidFill>
-            <a:srgbClr val="F7A32B"/>
-          </a:solidFill>
-          <a:ln/>
-          <a:effectLst>
-            <a:outerShdw sx="100000" sy="100000" kx="0" ky="0" algn="bl" rotWithShape="0" blurRad="101600" dist="38100" dir="5400000">
-              <a:srgbClr val="9AA3C8">
-                <a:alpha val="35000"/>
-              </a:srgbClr>
-            </a:outerShdw>
-          </a:effectLst>
-        </p:spPr>
-      </p:sp>
-      <p:sp>
-        <p:nvSpPr>
-          <p:cNvPr id="16" name="Text 14"/>
-          <p:cNvSpPr/>
-          <p:nvPr/>
-        </p:nvSpPr>
-        <p:spPr>
-          <a:xfrm>
-            <a:off x="548640" y="1874520"/>
-            <a:ext cx="365760" cy="365760"/>
-          </a:xfrm>
-          <a:prstGeom prst="rect">
-            <a:avLst/>
-          </a:prstGeom>
-          <a:noFill/>
-          <a:ln/>
-        </p:spPr>
-        <p:txBody>
-          <a:bodyPr wrap="square" lIns="0" tIns="0" rIns="0" bIns="0" rtlCol="0" anchor="ctr"/>
-          <a:lstStyle/>
-          <a:p>
-            <a:pPr algn="ctr" indent="0" marL="0">
-              <a:buNone/>
-            </a:pPr>
-            <a:r>
-              <a:rPr lang="en-US" sz="1600" b="1" dirty="0">
-                <a:solidFill>
-                  <a:srgbClr val="1E2761"/>
-                </a:solidFill>
-                <a:latin typeface="Cambria" pitchFamily="34" charset="0"/>
-                <a:ea typeface="Cambria" pitchFamily="34" charset="-122"/>
-                <a:cs typeface="Cambria" pitchFamily="34" charset="-120"/>
-              </a:rPr>
-              <a:t>1</a:t>
-            </a:r>
-            <a:endParaRPr lang="en-US" sz="1600" dirty="0"/>
-          </a:p>
-        </p:txBody>
-      </p:sp>
-      <p:sp>
-        <p:nvSpPr>
-          <p:cNvPr id="17" name="Text 15"/>
-          <p:cNvSpPr/>
-          <p:nvPr/>
-        </p:nvSpPr>
-        <p:spPr>
-          <a:xfrm>
-            <a:off x="1097280" y="1837944"/>
-            <a:ext cx="6949440" cy="365760"/>
-          </a:xfrm>
-          <a:prstGeom prst="rect">
-            <a:avLst/>
-          </a:prstGeom>
-          <a:noFill/>
-          <a:ln/>
-        </p:spPr>
-        <p:txBody>
-          <a:bodyPr wrap="square" lIns="0" tIns="0" rIns="0" bIns="0" rtlCol="0" anchor="ctr"/>
-          <a:lstStyle/>
-          <a:p>
-            <a:pPr indent="0" marL="0">
-              <a:buNone/>
-            </a:pPr>
-            <a:r>
-              <a:rPr lang="en-US" sz="1900" b="1" dirty="0">
-                <a:solidFill>
-                  <a:srgbClr val="1E2761"/>
-                </a:solidFill>
-                <a:latin typeface="Cambria" pitchFamily="34" charset="0"/>
-                <a:ea typeface="Cambria" pitchFamily="34" charset="-122"/>
-                <a:cs typeface="Cambria" pitchFamily="34" charset="-120"/>
-              </a:rPr>
-              <a:t>Builds fast</a:t>
-            </a:r>
-            <a:endParaRPr lang="en-US" sz="1900" dirty="0"/>
-          </a:p>
-        </p:txBody>
-      </p:sp>
-      <p:sp>
-        <p:nvSpPr>
-          <p:cNvPr id="18" name="Text 16"/>
-          <p:cNvSpPr/>
-          <p:nvPr/>
-        </p:nvSpPr>
-        <p:spPr>
-          <a:xfrm>
-            <a:off x="1097280" y="2203704"/>
-            <a:ext cx="7223760" cy="640080"/>
-          </a:xfrm>
-          <a:prstGeom prst="rect">
-            <a:avLst/>
-          </a:prstGeom>
-          <a:noFill/>
-          <a:ln/>
-        </p:spPr>
-        <p:txBody>
-          <a:bodyPr wrap="square" lIns="0" tIns="0" rIns="0" bIns="0" rtlCol="0" anchor="ctr"/>
-          <a:lstStyle/>
-          <a:p>
-            <a:pPr indent="0" marL="0">
-              <a:lnSpc>
-                <a:spcPct val="103000"/>
-              </a:lnSpc>
-              <a:buNone/>
-            </a:pPr>
-            <a:r>
-              <a:rPr lang="en-US" sz="1450" dirty="0">
-                <a:solidFill>
-                  <a:srgbClr val="1C2340"/>
-                </a:solidFill>
-                <a:latin typeface="Calibri" pitchFamily="34" charset="0"/>
-                <a:ea typeface="Calibri" pitchFamily="34" charset="-122"/>
-                <a:cs typeface="Calibri" pitchFamily="34" charset="-120"/>
-              </a:rPr>
-              <a:t>3 states, 4 events — the whole app is one screen.</a:t>
-            </a:r>
-            <a:endParaRPr lang="en-US" sz="1450" dirty="0"/>
-          </a:p>
-        </p:txBody>
-      </p:sp>
-      <p:sp>
-        <p:nvSpPr>
-          <p:cNvPr id="19" name="Shape 17"/>
-          <p:cNvSpPr/>
-          <p:nvPr/>
-        </p:nvSpPr>
-        <p:spPr>
-          <a:xfrm>
-            <a:off x="548640" y="2926080"/>
-            <a:ext cx="365760" cy="365760"/>
-          </a:xfrm>
-          <a:prstGeom prst="ellipse">
-            <a:avLst/>
-          </a:prstGeom>
-          <a:solidFill>
-            <a:srgbClr val="F7A32B"/>
-          </a:solidFill>
-          <a:ln/>
-          <a:effectLst>
-            <a:outerShdw sx="100000" sy="100000" kx="0" ky="0" algn="bl" rotWithShape="0" blurRad="101600" dist="38100" dir="5400000">
-              <a:srgbClr val="9AA3C8">
-                <a:alpha val="35000"/>
-              </a:srgbClr>
-            </a:outerShdw>
-          </a:effectLst>
-        </p:spPr>
-      </p:sp>
-      <p:sp>
-        <p:nvSpPr>
-          <p:cNvPr id="20" name="Text 18"/>
-          <p:cNvSpPr/>
-          <p:nvPr/>
-        </p:nvSpPr>
-        <p:spPr>
-          <a:xfrm>
-            <a:off x="548640" y="2926080"/>
-            <a:ext cx="365760" cy="365760"/>
-          </a:xfrm>
-          <a:prstGeom prst="rect">
-            <a:avLst/>
-          </a:prstGeom>
-          <a:noFill/>
-          <a:ln/>
-        </p:spPr>
-        <p:txBody>
-          <a:bodyPr wrap="square" lIns="0" tIns="0" rIns="0" bIns="0" rtlCol="0" anchor="ctr"/>
-          <a:lstStyle/>
-          <a:p>
-            <a:pPr algn="ctr" indent="0" marL="0">
-              <a:buNone/>
-            </a:pPr>
-            <a:r>
-              <a:rPr lang="en-US" sz="1600" b="1" dirty="0">
-                <a:solidFill>
-                  <a:srgbClr val="1E2761"/>
-                </a:solidFill>
-                <a:latin typeface="Cambria" pitchFamily="34" charset="0"/>
-                <a:ea typeface="Cambria" pitchFamily="34" charset="-122"/>
-                <a:cs typeface="Cambria" pitchFamily="34" charset="-120"/>
-              </a:rPr>
-              <a:t>2</a:t>
-            </a:r>
-            <a:endParaRPr lang="en-US" sz="1600" dirty="0"/>
-          </a:p>
-        </p:txBody>
-      </p:sp>
-      <p:sp>
-        <p:nvSpPr>
-          <p:cNvPr id="21" name="Text 19"/>
-          <p:cNvSpPr/>
-          <p:nvPr/>
-        </p:nvSpPr>
-        <p:spPr>
-          <a:xfrm>
-            <a:off x="1097280" y="2889504"/>
-            <a:ext cx="6949440" cy="365760"/>
-          </a:xfrm>
-          <a:prstGeom prst="rect">
-            <a:avLst/>
-          </a:prstGeom>
-          <a:noFill/>
-          <a:ln/>
-        </p:spPr>
-        <p:txBody>
-          <a:bodyPr wrap="square" lIns="0" tIns="0" rIns="0" bIns="0" rtlCol="0" anchor="ctr"/>
-          <a:lstStyle/>
-          <a:p>
-            <a:pPr indent="0" marL="0">
-              <a:buNone/>
-            </a:pPr>
-            <a:r>
-              <a:rPr lang="en-US" sz="1900" b="1" dirty="0">
-                <a:solidFill>
-                  <a:srgbClr val="1E2761"/>
-                </a:solidFill>
-                <a:latin typeface="Cambria" pitchFamily="34" charset="0"/>
-                <a:ea typeface="Cambria" pitchFamily="34" charset="-122"/>
-                <a:cs typeface="Cambria" pitchFamily="34" charset="-120"/>
-              </a:rPr>
-              <a:t>Real guards</a:t>
-            </a:r>
-            <a:endParaRPr lang="en-US" sz="1900" dirty="0"/>
-          </a:p>
-        </p:txBody>
-      </p:sp>
-      <p:sp>
-        <p:nvSpPr>
-          <p:cNvPr id="22" name="Text 20"/>
-          <p:cNvSpPr/>
-          <p:nvPr/>
-        </p:nvSpPr>
-        <p:spPr>
-          <a:xfrm>
-            <a:off x="1097280" y="3255264"/>
-            <a:ext cx="7223760" cy="640080"/>
-          </a:xfrm>
-          <a:prstGeom prst="rect">
-            <a:avLst/>
-          </a:prstGeom>
-          <a:noFill/>
-          <a:ln/>
-        </p:spPr>
-        <p:txBody>
-          <a:bodyPr wrap="square" lIns="0" tIns="0" rIns="0" bIns="0" rtlCol="0" anchor="ctr"/>
-          <a:lstStyle/>
-          <a:p>
-            <a:pPr indent="0" marL="0">
-              <a:lnSpc>
-                <a:spcPct val="103000"/>
-              </a:lnSpc>
-              <a:buNone/>
-            </a:pPr>
-            <a:r>
-              <a:rPr lang="en-US" sz="1450" dirty="0">
-                <a:solidFill>
-                  <a:srgbClr val="1C2340"/>
-                </a:solidFill>
-                <a:latin typeface="Calibri" pitchFamily="34" charset="0"/>
-                <a:ea typeface="Calibri" pitchFamily="34" charset="-122"/>
-                <a:cs typeface="Calibri" pitchFamily="34" charset="-120"/>
-              </a:rPr>
-              <a:t>“Enough credit?” and “In stock?” — the State × Event × Guard split tables are built for.</a:t>
-            </a:r>
-            <a:endParaRPr lang="en-US" sz="1450" dirty="0"/>
-          </a:p>
-        </p:txBody>
-      </p:sp>
-      <p:sp>
-        <p:nvSpPr>
-          <p:cNvPr id="23" name="Shape 21"/>
-          <p:cNvSpPr/>
-          <p:nvPr/>
-        </p:nvSpPr>
-        <p:spPr>
-          <a:xfrm>
-            <a:off x="548640" y="3977640"/>
-            <a:ext cx="365760" cy="365760"/>
-          </a:xfrm>
-          <a:prstGeom prst="ellipse">
-            <a:avLst/>
-          </a:prstGeom>
-          <a:solidFill>
-            <a:srgbClr val="F7A32B"/>
-          </a:solidFill>
-          <a:ln/>
-          <a:effectLst>
-            <a:outerShdw sx="100000" sy="100000" kx="0" ky="0" algn="bl" rotWithShape="0" blurRad="101600" dist="38100" dir="5400000">
-              <a:srgbClr val="9AA3C8">
-                <a:alpha val="35000"/>
-              </a:srgbClr>
-            </a:outerShdw>
-          </a:effectLst>
-        </p:spPr>
-      </p:sp>
-      <p:sp>
-        <p:nvSpPr>
-          <p:cNvPr id="24" name="Text 22"/>
-          <p:cNvSpPr/>
-          <p:nvPr/>
-        </p:nvSpPr>
-        <p:spPr>
-          <a:xfrm>
-            <a:off x="548640" y="3977640"/>
-            <a:ext cx="365760" cy="365760"/>
-          </a:xfrm>
-          <a:prstGeom prst="rect">
-            <a:avLst/>
-          </a:prstGeom>
-          <a:noFill/>
-          <a:ln/>
-        </p:spPr>
-        <p:txBody>
-          <a:bodyPr wrap="square" lIns="0" tIns="0" rIns="0" bIns="0" rtlCol="0" anchor="ctr"/>
-          <a:lstStyle/>
-          <a:p>
-            <a:pPr algn="ctr" indent="0" marL="0">
-              <a:buNone/>
-            </a:pPr>
-            <a:r>
-              <a:rPr lang="en-US" sz="1600" b="1" dirty="0">
-                <a:solidFill>
-                  <a:srgbClr val="1E2761"/>
-                </a:solidFill>
-                <a:latin typeface="Cambria" pitchFamily="34" charset="0"/>
-                <a:ea typeface="Cambria" pitchFamily="34" charset="-122"/>
-                <a:cs typeface="Cambria" pitchFamily="34" charset="-120"/>
-              </a:rPr>
-              <a:t>3</a:t>
-            </a:r>
-            <a:endParaRPr lang="en-US" sz="1600" dirty="0"/>
-          </a:p>
-        </p:txBody>
-      </p:sp>
-      <p:sp>
-        <p:nvSpPr>
-          <p:cNvPr id="25" name="Text 23"/>
-          <p:cNvSpPr/>
-          <p:nvPr/>
-        </p:nvSpPr>
-        <p:spPr>
-          <a:xfrm>
-            <a:off x="1097280" y="3941064"/>
-            <a:ext cx="6949440" cy="365760"/>
-          </a:xfrm>
-          <a:prstGeom prst="rect">
-            <a:avLst/>
-          </a:prstGeom>
-          <a:noFill/>
-          <a:ln/>
-        </p:spPr>
-        <p:txBody>
-          <a:bodyPr wrap="square" lIns="0" tIns="0" rIns="0" bIns="0" rtlCol="0" anchor="ctr"/>
-          <a:lstStyle/>
-          <a:p>
-            <a:pPr indent="0" marL="0">
-              <a:buNone/>
-            </a:pPr>
-            <a:r>
-              <a:rPr lang="en-US" sz="1900" b="1" dirty="0">
-                <a:solidFill>
-                  <a:srgbClr val="1E2761"/>
-                </a:solidFill>
-                <a:latin typeface="Cambria" pitchFamily="34" charset="0"/>
-                <a:ea typeface="Cambria" pitchFamily="34" charset="-122"/>
-                <a:cs typeface="Cambria" pitchFamily="34" charset="-120"/>
-              </a:rPr>
-              <a:t>Obvious UI</a:t>
-            </a:r>
-            <a:endParaRPr lang="en-US" sz="1900" dirty="0"/>
-          </a:p>
-        </p:txBody>
-      </p:sp>
-      <p:sp>
-        <p:nvSpPr>
-          <p:cNvPr id="26" name="Text 24"/>
-          <p:cNvSpPr/>
-          <p:nvPr/>
-        </p:nvSpPr>
-        <p:spPr>
-          <a:xfrm>
-            <a:off x="1097280" y="4306824"/>
-            <a:ext cx="7223760" cy="640080"/>
-          </a:xfrm>
-          <a:prstGeom prst="rect">
-            <a:avLst/>
-          </a:prstGeom>
-          <a:noFill/>
-          <a:ln/>
-        </p:spPr>
-        <p:txBody>
-          <a:bodyPr wrap="square" lIns="0" tIns="0" rIns="0" bIns="0" rtlCol="0" anchor="ctr"/>
-          <a:lstStyle/>
-          <a:p>
-            <a:pPr indent="0" marL="0">
-              <a:lnSpc>
-                <a:spcPct val="103000"/>
-              </a:lnSpc>
-              <a:buNone/>
-            </a:pPr>
-            <a:r>
-              <a:rPr lang="en-US" sz="1450" dirty="0">
-                <a:solidFill>
-                  <a:srgbClr val="1C2340"/>
-                </a:solidFill>
-                <a:latin typeface="Calibri" pitchFamily="34" charset="0"/>
-                <a:ea typeface="Calibri" pitchFamily="34" charset="-122"/>
-                <a:cs typeface="Calibri" pitchFamily="34" charset="-120"/>
-              </a:rPr>
-              <a:t>Display, coin buttons, product grid, cancel. The audience can predict it — so the output feels verified, not magic.</a:t>
-            </a:r>
-            <a:endParaRPr lang="en-US" sz="1450" dirty="0"/>
           </a:p>
         </p:txBody>
       </p:sp>
@@ -7767,7 +8127,7 @@
                 <a:ea typeface="Calibri" pitchFamily="34" charset="-122"/>
                 <a:cs typeface="Calibri" pitchFamily="34" charset="-120"/>
               </a:rPr>
-              <a:t>STEP 1 — WHAT THE DOMAIN EXPERT GIVES YOU</a:t>
+              <a:t>OUR DEMO MACHINE</a:t>
             </a:r>
             <a:endParaRPr lang="en-US" sz="1200" dirty="0"/>
           </a:p>
@@ -7782,7 +8142,7 @@
         <p:spPr>
           <a:xfrm>
             <a:off x="548640" y="658368"/>
-            <a:ext cx="11064240" cy="777240"/>
+            <a:ext cx="7315200" cy="777240"/>
           </a:xfrm>
           <a:prstGeom prst="rect">
             <a:avLst/>
@@ -7806,7 +8166,7 @@
                 <a:ea typeface="Cambria" pitchFamily="34" charset="-122"/>
                 <a:cs typeface="Cambria" pitchFamily="34" charset="-120"/>
               </a:rPr>
-              <a:t>The brief, in plain English</a:t>
+              <a:t>A vending machine</a:t>
             </a:r>
             <a:endParaRPr lang="en-US" sz="3400" dirty="0"/>
           </a:p>
@@ -7820,23 +8180,18 @@
         </p:nvSpPr>
         <p:spPr>
           <a:xfrm>
-            <a:off x="548640" y="1828800"/>
-            <a:ext cx="11064240" cy="2468880"/>
+            <a:off x="8503920" y="1554480"/>
+            <a:ext cx="3017520" cy="4206240"/>
           </a:xfrm>
           <a:prstGeom prst="roundRect">
             <a:avLst>
-              <a:gd name="adj" fmla="val 4444"/>
+              <a:gd name="adj" fmla="val 4242"/>
             </a:avLst>
           </a:prstGeom>
           <a:solidFill>
-            <a:srgbClr val="FFF6E9"/>
+            <a:srgbClr val="1E2761"/>
           </a:solidFill>
-          <a:ln w="12700">
-            <a:solidFill>
-              <a:srgbClr val="F2D9AE"/>
-            </a:solidFill>
-            <a:prstDash val="solid"/>
-          </a:ln>
+          <a:ln/>
           <a:effectLst>
             <a:outerShdw sx="100000" sy="100000" kx="0" ky="0" algn="bl" rotWithShape="0" blurRad="101600" dist="38100" dir="5400000">
               <a:srgbClr val="9AA3C8">
@@ -7848,14 +8203,356 @@
       </p:sp>
       <p:sp>
         <p:nvSpPr>
-          <p:cNvPr id="5" name="Text 3"/>
-          <p:cNvSpPr/>
-          <p:nvPr/>
-        </p:nvSpPr>
-        <p:spPr>
-          <a:xfrm>
-            <a:off x="914400" y="2103120"/>
-            <a:ext cx="10332720" cy="1920240"/>
+          <p:cNvPr id="5" name="Shape 3"/>
+          <p:cNvSpPr/>
+          <p:nvPr/>
+        </p:nvSpPr>
+        <p:spPr>
+          <a:xfrm>
+            <a:off x="8778240" y="1828800"/>
+            <a:ext cx="1920240" cy="3657600"/>
+          </a:xfrm>
+          <a:prstGeom prst="roundRect">
+            <a:avLst>
+              <a:gd name="adj" fmla="val 3810"/>
+            </a:avLst>
+          </a:prstGeom>
+          <a:solidFill>
+            <a:srgbClr val="2C3670"/>
+          </a:solidFill>
+          <a:ln/>
+        </p:spPr>
+      </p:sp>
+      <p:sp>
+        <p:nvSpPr>
+          <p:cNvPr id="6" name="Shape 4"/>
+          <p:cNvSpPr/>
+          <p:nvPr/>
+        </p:nvSpPr>
+        <p:spPr>
+          <a:xfrm>
+            <a:off x="8915400" y="2011680"/>
+            <a:ext cx="548640" cy="548640"/>
+          </a:xfrm>
+          <a:prstGeom prst="roundRect">
+            <a:avLst>
+              <a:gd name="adj" fmla="val 8333"/>
+            </a:avLst>
+          </a:prstGeom>
+          <a:solidFill>
+            <a:srgbClr val="CADCFC"/>
+          </a:solidFill>
+          <a:ln/>
+        </p:spPr>
+      </p:sp>
+      <p:sp>
+        <p:nvSpPr>
+          <p:cNvPr id="7" name="Shape 5"/>
+          <p:cNvSpPr/>
+          <p:nvPr/>
+        </p:nvSpPr>
+        <p:spPr>
+          <a:xfrm>
+            <a:off x="9601200" y="2011680"/>
+            <a:ext cx="548640" cy="548640"/>
+          </a:xfrm>
+          <a:prstGeom prst="roundRect">
+            <a:avLst>
+              <a:gd name="adj" fmla="val 8333"/>
+            </a:avLst>
+          </a:prstGeom>
+          <a:solidFill>
+            <a:srgbClr val="CADCFC"/>
+          </a:solidFill>
+          <a:ln/>
+        </p:spPr>
+      </p:sp>
+      <p:sp>
+        <p:nvSpPr>
+          <p:cNvPr id="8" name="Shape 6"/>
+          <p:cNvSpPr/>
+          <p:nvPr/>
+        </p:nvSpPr>
+        <p:spPr>
+          <a:xfrm>
+            <a:off x="8915400" y="2697480"/>
+            <a:ext cx="548640" cy="548640"/>
+          </a:xfrm>
+          <a:prstGeom prst="roundRect">
+            <a:avLst>
+              <a:gd name="adj" fmla="val 8333"/>
+            </a:avLst>
+          </a:prstGeom>
+          <a:solidFill>
+            <a:srgbClr val="CADCFC"/>
+          </a:solidFill>
+          <a:ln/>
+        </p:spPr>
+      </p:sp>
+      <p:sp>
+        <p:nvSpPr>
+          <p:cNvPr id="9" name="Shape 7"/>
+          <p:cNvSpPr/>
+          <p:nvPr/>
+        </p:nvSpPr>
+        <p:spPr>
+          <a:xfrm>
+            <a:off x="9601200" y="2697480"/>
+            <a:ext cx="548640" cy="548640"/>
+          </a:xfrm>
+          <a:prstGeom prst="roundRect">
+            <a:avLst>
+              <a:gd name="adj" fmla="val 8333"/>
+            </a:avLst>
+          </a:prstGeom>
+          <a:solidFill>
+            <a:srgbClr val="CADCFC"/>
+          </a:solidFill>
+          <a:ln/>
+        </p:spPr>
+      </p:sp>
+      <p:sp>
+        <p:nvSpPr>
+          <p:cNvPr id="10" name="Shape 8"/>
+          <p:cNvSpPr/>
+          <p:nvPr/>
+        </p:nvSpPr>
+        <p:spPr>
+          <a:xfrm>
+            <a:off x="8915400" y="3383280"/>
+            <a:ext cx="548640" cy="548640"/>
+          </a:xfrm>
+          <a:prstGeom prst="roundRect">
+            <a:avLst>
+              <a:gd name="adj" fmla="val 8333"/>
+            </a:avLst>
+          </a:prstGeom>
+          <a:solidFill>
+            <a:srgbClr val="CADCFC"/>
+          </a:solidFill>
+          <a:ln/>
+        </p:spPr>
+      </p:sp>
+      <p:sp>
+        <p:nvSpPr>
+          <p:cNvPr id="11" name="Shape 9"/>
+          <p:cNvSpPr/>
+          <p:nvPr/>
+        </p:nvSpPr>
+        <p:spPr>
+          <a:xfrm>
+            <a:off x="9601200" y="3383280"/>
+            <a:ext cx="548640" cy="548640"/>
+          </a:xfrm>
+          <a:prstGeom prst="roundRect">
+            <a:avLst>
+              <a:gd name="adj" fmla="val 8333"/>
+            </a:avLst>
+          </a:prstGeom>
+          <a:solidFill>
+            <a:srgbClr val="CADCFC"/>
+          </a:solidFill>
+          <a:ln/>
+        </p:spPr>
+      </p:sp>
+      <p:sp>
+        <p:nvSpPr>
+          <p:cNvPr id="12" name="Shape 10"/>
+          <p:cNvSpPr/>
+          <p:nvPr/>
+        </p:nvSpPr>
+        <p:spPr>
+          <a:xfrm>
+            <a:off x="10835640" y="2011680"/>
+            <a:ext cx="457200" cy="2194560"/>
+          </a:xfrm>
+          <a:prstGeom prst="roundRect">
+            <a:avLst>
+              <a:gd name="adj" fmla="val 12000"/>
+            </a:avLst>
+          </a:prstGeom>
+          <a:solidFill>
+            <a:srgbClr val="0E1330"/>
+          </a:solidFill>
+          <a:ln/>
+        </p:spPr>
+      </p:sp>
+      <p:sp>
+        <p:nvSpPr>
+          <p:cNvPr id="13" name="Text 11"/>
+          <p:cNvSpPr/>
+          <p:nvPr/>
+        </p:nvSpPr>
+        <p:spPr>
+          <a:xfrm>
+            <a:off x="10744200" y="4480560"/>
+            <a:ext cx="640080" cy="365760"/>
+          </a:xfrm>
+          <a:prstGeom prst="rect">
+            <a:avLst/>
+          </a:prstGeom>
+          <a:noFill/>
+          <a:ln/>
+        </p:spPr>
+        <p:txBody>
+          <a:bodyPr wrap="square" lIns="0" tIns="0" rIns="0" bIns="0" rtlCol="0" anchor="ctr"/>
+          <a:lstStyle/>
+          <a:p>
+            <a:pPr algn="ctr" indent="0" marL="0">
+              <a:buNone/>
+            </a:pPr>
+            <a:r>
+              <a:rPr lang="en-US" sz="1200" b="1" dirty="0">
+                <a:solidFill>
+                  <a:srgbClr val="2FB170"/>
+                </a:solidFill>
+                <a:latin typeface="Courier New" pitchFamily="34" charset="0"/>
+                <a:ea typeface="Courier New" pitchFamily="34" charset="-122"/>
+                <a:cs typeface="Courier New" pitchFamily="34" charset="-120"/>
+              </a:rPr>
+              <a:t>$1.50</a:t>
+            </a:r>
+            <a:endParaRPr lang="en-US" sz="1200" dirty="0"/>
+          </a:p>
+        </p:txBody>
+      </p:sp>
+      <p:sp>
+        <p:nvSpPr>
+          <p:cNvPr id="14" name="Shape 12"/>
+          <p:cNvSpPr/>
+          <p:nvPr/>
+        </p:nvSpPr>
+        <p:spPr>
+          <a:xfrm>
+            <a:off x="8915400" y="4937760"/>
+            <a:ext cx="2194560" cy="502920"/>
+          </a:xfrm>
+          <a:prstGeom prst="roundRect">
+            <a:avLst>
+              <a:gd name="adj" fmla="val 10909"/>
+            </a:avLst>
+          </a:prstGeom>
+          <a:solidFill>
+            <a:srgbClr val="0E1330"/>
+          </a:solidFill>
+          <a:ln/>
+        </p:spPr>
+      </p:sp>
+      <p:sp>
+        <p:nvSpPr>
+          <p:cNvPr id="15" name="Shape 13"/>
+          <p:cNvSpPr/>
+          <p:nvPr/>
+        </p:nvSpPr>
+        <p:spPr>
+          <a:xfrm>
+            <a:off x="548640" y="1874520"/>
+            <a:ext cx="365760" cy="365760"/>
+          </a:xfrm>
+          <a:prstGeom prst="ellipse">
+            <a:avLst/>
+          </a:prstGeom>
+          <a:solidFill>
+            <a:srgbClr val="F7A32B"/>
+          </a:solidFill>
+          <a:ln/>
+          <a:effectLst>
+            <a:outerShdw sx="100000" sy="100000" kx="0" ky="0" algn="bl" rotWithShape="0" blurRad="101600" dist="38100" dir="5400000">
+              <a:srgbClr val="9AA3C8">
+                <a:alpha val="35000"/>
+              </a:srgbClr>
+            </a:outerShdw>
+          </a:effectLst>
+        </p:spPr>
+      </p:sp>
+      <p:sp>
+        <p:nvSpPr>
+          <p:cNvPr id="16" name="Text 14"/>
+          <p:cNvSpPr/>
+          <p:nvPr/>
+        </p:nvSpPr>
+        <p:spPr>
+          <a:xfrm>
+            <a:off x="548640" y="1874520"/>
+            <a:ext cx="365760" cy="365760"/>
+          </a:xfrm>
+          <a:prstGeom prst="rect">
+            <a:avLst/>
+          </a:prstGeom>
+          <a:noFill/>
+          <a:ln/>
+        </p:spPr>
+        <p:txBody>
+          <a:bodyPr wrap="square" lIns="0" tIns="0" rIns="0" bIns="0" rtlCol="0" anchor="ctr"/>
+          <a:lstStyle/>
+          <a:p>
+            <a:pPr algn="ctr" indent="0" marL="0">
+              <a:buNone/>
+            </a:pPr>
+            <a:r>
+              <a:rPr lang="en-US" sz="1600" b="1" dirty="0">
+                <a:solidFill>
+                  <a:srgbClr val="1E2761"/>
+                </a:solidFill>
+                <a:latin typeface="Cambria" pitchFamily="34" charset="0"/>
+                <a:ea typeface="Cambria" pitchFamily="34" charset="-122"/>
+                <a:cs typeface="Cambria" pitchFamily="34" charset="-120"/>
+              </a:rPr>
+              <a:t>1</a:t>
+            </a:r>
+            <a:endParaRPr lang="en-US" sz="1600" dirty="0"/>
+          </a:p>
+        </p:txBody>
+      </p:sp>
+      <p:sp>
+        <p:nvSpPr>
+          <p:cNvPr id="17" name="Text 15"/>
+          <p:cNvSpPr/>
+          <p:nvPr/>
+        </p:nvSpPr>
+        <p:spPr>
+          <a:xfrm>
+            <a:off x="1097280" y="1837944"/>
+            <a:ext cx="6949440" cy="365760"/>
+          </a:xfrm>
+          <a:prstGeom prst="rect">
+            <a:avLst/>
+          </a:prstGeom>
+          <a:noFill/>
+          <a:ln/>
+        </p:spPr>
+        <p:txBody>
+          <a:bodyPr wrap="square" lIns="0" tIns="0" rIns="0" bIns="0" rtlCol="0" anchor="ctr"/>
+          <a:lstStyle/>
+          <a:p>
+            <a:pPr indent="0" marL="0">
+              <a:buNone/>
+            </a:pPr>
+            <a:r>
+              <a:rPr lang="en-US" sz="1900" b="1" dirty="0">
+                <a:solidFill>
+                  <a:srgbClr val="1E2761"/>
+                </a:solidFill>
+                <a:latin typeface="Cambria" pitchFamily="34" charset="0"/>
+                <a:ea typeface="Cambria" pitchFamily="34" charset="-122"/>
+                <a:cs typeface="Cambria" pitchFamily="34" charset="-120"/>
+              </a:rPr>
+              <a:t>Builds fast</a:t>
+            </a:r>
+            <a:endParaRPr lang="en-US" sz="1900" dirty="0"/>
+          </a:p>
+        </p:txBody>
+      </p:sp>
+      <p:sp>
+        <p:nvSpPr>
+          <p:cNvPr id="18" name="Text 16"/>
+          <p:cNvSpPr/>
+          <p:nvPr/>
+        </p:nvSpPr>
+        <p:spPr>
+          <a:xfrm>
+            <a:off x="1097280" y="2203704"/>
+            <a:ext cx="7223760" cy="640080"/>
           </a:xfrm>
           <a:prstGeom prst="rect">
             <a:avLst/>
@@ -7869,29 +8566,159 @@
           <a:p>
             <a:pPr indent="0" marL="0">
               <a:lnSpc>
-                <a:spcPct val="120000"/>
+                <a:spcPct val="103000"/>
               </a:lnSpc>
               <a:buNone/>
             </a:pPr>
             <a:r>
-              <a:rPr lang="en-US" sz="2100" b="1" dirty="0">
-                <a:solidFill>
-                  <a:srgbClr val="1E2761"/>
+              <a:rPr lang="en-US" sz="1450" dirty="0">
+                <a:solidFill>
+                  <a:srgbClr val="1C2340"/>
                 </a:solidFill>
                 <a:latin typeface="Calibri" pitchFamily="34" charset="0"/>
                 <a:ea typeface="Calibri" pitchFamily="34" charset="-122"/>
                 <a:cs typeface="Calibri" pitchFamily="34" charset="-120"/>
               </a:rPr>
-              <a:t>Idle </a:t>
-            </a:r>
+              <a:t>3 states, 4 events — the whole app is one screen.</a:t>
+            </a:r>
+            <a:endParaRPr lang="en-US" sz="1450" dirty="0"/>
+          </a:p>
+        </p:txBody>
+      </p:sp>
+      <p:sp>
+        <p:nvSpPr>
+          <p:cNvPr id="19" name="Shape 17"/>
+          <p:cNvSpPr/>
+          <p:nvPr/>
+        </p:nvSpPr>
+        <p:spPr>
+          <a:xfrm>
+            <a:off x="548640" y="2926080"/>
+            <a:ext cx="365760" cy="365760"/>
+          </a:xfrm>
+          <a:prstGeom prst="ellipse">
+            <a:avLst/>
+          </a:prstGeom>
+          <a:solidFill>
+            <a:srgbClr val="F7A32B"/>
+          </a:solidFill>
+          <a:ln/>
+          <a:effectLst>
+            <a:outerShdw sx="100000" sy="100000" kx="0" ky="0" algn="bl" rotWithShape="0" blurRad="101600" dist="38100" dir="5400000">
+              <a:srgbClr val="9AA3C8">
+                <a:alpha val="35000"/>
+              </a:srgbClr>
+            </a:outerShdw>
+          </a:effectLst>
+        </p:spPr>
+      </p:sp>
+      <p:sp>
+        <p:nvSpPr>
+          <p:cNvPr id="20" name="Text 18"/>
+          <p:cNvSpPr/>
+          <p:nvPr/>
+        </p:nvSpPr>
+        <p:spPr>
+          <a:xfrm>
+            <a:off x="548640" y="2926080"/>
+            <a:ext cx="365760" cy="365760"/>
+          </a:xfrm>
+          <a:prstGeom prst="rect">
+            <a:avLst/>
+          </a:prstGeom>
+          <a:noFill/>
+          <a:ln/>
+        </p:spPr>
+        <p:txBody>
+          <a:bodyPr wrap="square" lIns="0" tIns="0" rIns="0" bIns="0" rtlCol="0" anchor="ctr"/>
+          <a:lstStyle/>
+          <a:p>
+            <a:pPr algn="ctr" indent="0" marL="0">
+              <a:buNone/>
+            </a:pPr>
+            <a:r>
+              <a:rPr lang="en-US" sz="1600" b="1" dirty="0">
+                <a:solidFill>
+                  <a:srgbClr val="1E2761"/>
+                </a:solidFill>
+                <a:latin typeface="Cambria" pitchFamily="34" charset="0"/>
+                <a:ea typeface="Cambria" pitchFamily="34" charset="-122"/>
+                <a:cs typeface="Cambria" pitchFamily="34" charset="-120"/>
+              </a:rPr>
+              <a:t>2</a:t>
+            </a:r>
+            <a:endParaRPr lang="en-US" sz="1600" dirty="0"/>
+          </a:p>
+        </p:txBody>
+      </p:sp>
+      <p:sp>
+        <p:nvSpPr>
+          <p:cNvPr id="21" name="Text 19"/>
+          <p:cNvSpPr/>
+          <p:nvPr/>
+        </p:nvSpPr>
+        <p:spPr>
+          <a:xfrm>
+            <a:off x="1097280" y="2889504"/>
+            <a:ext cx="6949440" cy="365760"/>
+          </a:xfrm>
+          <a:prstGeom prst="rect">
+            <a:avLst/>
+          </a:prstGeom>
+          <a:noFill/>
+          <a:ln/>
+        </p:spPr>
+        <p:txBody>
+          <a:bodyPr wrap="square" lIns="0" tIns="0" rIns="0" bIns="0" rtlCol="0" anchor="ctr"/>
+          <a:lstStyle/>
+          <a:p>
+            <a:pPr indent="0" marL="0">
+              <a:buNone/>
+            </a:pPr>
+            <a:r>
+              <a:rPr lang="en-US" sz="1900" b="1" dirty="0">
+                <a:solidFill>
+                  <a:srgbClr val="1E2761"/>
+                </a:solidFill>
+                <a:latin typeface="Cambria" pitchFamily="34" charset="0"/>
+                <a:ea typeface="Cambria" pitchFamily="34" charset="-122"/>
+                <a:cs typeface="Cambria" pitchFamily="34" charset="-120"/>
+              </a:rPr>
+              <a:t>Real guards</a:t>
+            </a:r>
+            <a:endParaRPr lang="en-US" sz="1900" dirty="0"/>
+          </a:p>
+        </p:txBody>
+      </p:sp>
+      <p:sp>
+        <p:nvSpPr>
+          <p:cNvPr id="22" name="Text 20"/>
+          <p:cNvSpPr/>
+          <p:nvPr/>
+        </p:nvSpPr>
+        <p:spPr>
+          <a:xfrm>
+            <a:off x="1097280" y="3255264"/>
+            <a:ext cx="7223760" cy="640080"/>
+          </a:xfrm>
+          <a:prstGeom prst="rect">
+            <a:avLst/>
+          </a:prstGeom>
+          <a:noFill/>
+          <a:ln/>
+        </p:spPr>
+        <p:txBody>
+          <a:bodyPr wrap="square" lIns="0" tIns="0" rIns="0" bIns="0" rtlCol="0" anchor="ctr"/>
+          <a:lstStyle/>
+          <a:p>
             <a:pPr indent="0" marL="0">
               <a:lnSpc>
-                <a:spcPct val="120000"/>
+                <a:spcPct val="103000"/>
               </a:lnSpc>
               <a:buNone/>
             </a:pPr>
             <a:r>
-              <a:rPr lang="en-US" sz="2100" dirty="0">
+              <a:rPr lang="en-US" sz="1450" dirty="0">
                 <a:solidFill>
                   <a:srgbClr val="1C2340"/>
                 </a:solidFill>
@@ -7899,187 +8726,156 @@
                 <a:ea typeface="Calibri" pitchFamily="34" charset="-122"/>
                 <a:cs typeface="Calibri" pitchFamily="34" charset="-120"/>
               </a:rPr>
-              <a:t>until coins go in. As they do, it </a:t>
-            </a:r>
+              <a:t>“Enough credit?” and “In stock?” — the State × Event × Guard split tables are built for.</a:t>
+            </a:r>
+            <a:endParaRPr lang="en-US" sz="1450" dirty="0"/>
+          </a:p>
+        </p:txBody>
+      </p:sp>
+      <p:sp>
+        <p:nvSpPr>
+          <p:cNvPr id="23" name="Shape 21"/>
+          <p:cNvSpPr/>
+          <p:nvPr/>
+        </p:nvSpPr>
+        <p:spPr>
+          <a:xfrm>
+            <a:off x="548640" y="3977640"/>
+            <a:ext cx="365760" cy="365760"/>
+          </a:xfrm>
+          <a:prstGeom prst="ellipse">
+            <a:avLst/>
+          </a:prstGeom>
+          <a:solidFill>
+            <a:srgbClr val="F7A32B"/>
+          </a:solidFill>
+          <a:ln/>
+          <a:effectLst>
+            <a:outerShdw sx="100000" sy="100000" kx="0" ky="0" algn="bl" rotWithShape="0" blurRad="101600" dist="38100" dir="5400000">
+              <a:srgbClr val="9AA3C8">
+                <a:alpha val="35000"/>
+              </a:srgbClr>
+            </a:outerShdw>
+          </a:effectLst>
+        </p:spPr>
+      </p:sp>
+      <p:sp>
+        <p:nvSpPr>
+          <p:cNvPr id="24" name="Text 22"/>
+          <p:cNvSpPr/>
+          <p:nvPr/>
+        </p:nvSpPr>
+        <p:spPr>
+          <a:xfrm>
+            <a:off x="548640" y="3977640"/>
+            <a:ext cx="365760" cy="365760"/>
+          </a:xfrm>
+          <a:prstGeom prst="rect">
+            <a:avLst/>
+          </a:prstGeom>
+          <a:noFill/>
+          <a:ln/>
+        </p:spPr>
+        <p:txBody>
+          <a:bodyPr wrap="square" lIns="0" tIns="0" rIns="0" bIns="0" rtlCol="0" anchor="ctr"/>
+          <a:lstStyle/>
+          <a:p>
+            <a:pPr algn="ctr" indent="0" marL="0">
+              <a:buNone/>
+            </a:pPr>
+            <a:r>
+              <a:rPr lang="en-US" sz="1600" b="1" dirty="0">
+                <a:solidFill>
+                  <a:srgbClr val="1E2761"/>
+                </a:solidFill>
+                <a:latin typeface="Cambria" pitchFamily="34" charset="0"/>
+                <a:ea typeface="Cambria" pitchFamily="34" charset="-122"/>
+                <a:cs typeface="Cambria" pitchFamily="34" charset="-120"/>
+              </a:rPr>
+              <a:t>3</a:t>
+            </a:r>
+            <a:endParaRPr lang="en-US" sz="1600" dirty="0"/>
+          </a:p>
+        </p:txBody>
+      </p:sp>
+      <p:sp>
+        <p:nvSpPr>
+          <p:cNvPr id="25" name="Text 23"/>
+          <p:cNvSpPr/>
+          <p:nvPr/>
+        </p:nvSpPr>
+        <p:spPr>
+          <a:xfrm>
+            <a:off x="1097280" y="3941064"/>
+            <a:ext cx="6949440" cy="365760"/>
+          </a:xfrm>
+          <a:prstGeom prst="rect">
+            <a:avLst/>
+          </a:prstGeom>
+          <a:noFill/>
+          <a:ln/>
+        </p:spPr>
+        <p:txBody>
+          <a:bodyPr wrap="square" lIns="0" tIns="0" rIns="0" bIns="0" rtlCol="0" anchor="ctr"/>
+          <a:lstStyle/>
+          <a:p>
+            <a:pPr indent="0" marL="0">
+              <a:buNone/>
+            </a:pPr>
+            <a:r>
+              <a:rPr lang="en-US" sz="1900" b="1" dirty="0">
+                <a:solidFill>
+                  <a:srgbClr val="1E2761"/>
+                </a:solidFill>
+                <a:latin typeface="Cambria" pitchFamily="34" charset="0"/>
+                <a:ea typeface="Cambria" pitchFamily="34" charset="-122"/>
+                <a:cs typeface="Cambria" pitchFamily="34" charset="-120"/>
+              </a:rPr>
+              <a:t>Obvious UI</a:t>
+            </a:r>
+            <a:endParaRPr lang="en-US" sz="1900" dirty="0"/>
+          </a:p>
+        </p:txBody>
+      </p:sp>
+      <p:sp>
+        <p:nvSpPr>
+          <p:cNvPr id="26" name="Text 24"/>
+          <p:cNvSpPr/>
+          <p:nvPr/>
+        </p:nvSpPr>
+        <p:spPr>
+          <a:xfrm>
+            <a:off x="1097280" y="4306824"/>
+            <a:ext cx="7223760" cy="640080"/>
+          </a:xfrm>
+          <a:prstGeom prst="rect">
+            <a:avLst/>
+          </a:prstGeom>
+          <a:noFill/>
+          <a:ln/>
+        </p:spPr>
+        <p:txBody>
+          <a:bodyPr wrap="square" lIns="0" tIns="0" rIns="0" bIns="0" rtlCol="0" anchor="ctr"/>
+          <a:lstStyle/>
+          <a:p>
             <a:pPr indent="0" marL="0">
               <a:lnSpc>
-                <a:spcPct val="120000"/>
+                <a:spcPct val="103000"/>
               </a:lnSpc>
               <a:buNone/>
             </a:pPr>
             <a:r>
-              <a:rPr lang="en-US" sz="2100" b="1" dirty="0">
-                <a:solidFill>
-                  <a:srgbClr val="1E2761"/>
+              <a:rPr lang="en-US" sz="1450" dirty="0">
+                <a:solidFill>
+                  <a:srgbClr val="1C2340"/>
                 </a:solidFill>
                 <a:latin typeface="Calibri" pitchFamily="34" charset="0"/>
                 <a:ea typeface="Calibri" pitchFamily="34" charset="-122"/>
                 <a:cs typeface="Calibri" pitchFamily="34" charset="-120"/>
               </a:rPr>
-              <a:t>collects </a:t>
-            </a:r>
-            <a:pPr indent="0" marL="0">
-              <a:lnSpc>
-                <a:spcPct val="120000"/>
-              </a:lnSpc>
-              <a:buNone/>
-            </a:pPr>
-            <a:r>
-              <a:rPr lang="en-US" sz="2100" dirty="0">
-                <a:solidFill>
-                  <a:srgbClr val="1C2340"/>
-                </a:solidFill>
-                <a:latin typeface="Calibri" pitchFamily="34" charset="0"/>
-                <a:ea typeface="Calibri" pitchFamily="34" charset="-122"/>
-                <a:cs typeface="Calibri" pitchFamily="34" charset="-120"/>
-              </a:rPr>
-              <a:t>a balance. On </a:t>
-            </a:r>
-            <a:pPr indent="0" marL="0">
-              <a:lnSpc>
-                <a:spcPct val="120000"/>
-              </a:lnSpc>
-              <a:buNone/>
-            </a:pPr>
-            <a:r>
-              <a:rPr lang="en-US" sz="2100" b="1" dirty="0">
-                <a:solidFill>
-                  <a:srgbClr val="1E2761"/>
-                </a:solidFill>
-                <a:latin typeface="Calibri" pitchFamily="34" charset="0"/>
-                <a:ea typeface="Calibri" pitchFamily="34" charset="-122"/>
-                <a:cs typeface="Calibri" pitchFamily="34" charset="-120"/>
-              </a:rPr>
-              <a:t>select</a:t>
-            </a:r>
-            <a:pPr indent="0" marL="0">
-              <a:lnSpc>
-                <a:spcPct val="120000"/>
-              </a:lnSpc>
-              <a:buNone/>
-            </a:pPr>
-            <a:r>
-              <a:rPr lang="en-US" sz="2100" dirty="0">
-                <a:solidFill>
-                  <a:srgbClr val="1C2340"/>
-                </a:solidFill>
-                <a:latin typeface="Calibri" pitchFamily="34" charset="0"/>
-                <a:ea typeface="Calibri" pitchFamily="34" charset="-122"/>
-                <a:cs typeface="Calibri" pitchFamily="34" charset="-120"/>
-              </a:rPr>
-              <a:t>: if it's in stock and the balance covers the price, </a:t>
-            </a:r>
-            <a:pPr indent="0" marL="0">
-              <a:lnSpc>
-                <a:spcPct val="120000"/>
-              </a:lnSpc>
-              <a:buNone/>
-            </a:pPr>
-            <a:r>
-              <a:rPr lang="en-US" sz="2100" b="1" dirty="0">
-                <a:solidFill>
-                  <a:srgbClr val="1E2761"/>
-                </a:solidFill>
-                <a:latin typeface="Calibri" pitchFamily="34" charset="0"/>
-                <a:ea typeface="Calibri" pitchFamily="34" charset="-122"/>
-                <a:cs typeface="Calibri" pitchFamily="34" charset="-120"/>
-              </a:rPr>
-              <a:t>dispense </a:t>
-            </a:r>
-            <a:pPr indent="0" marL="0">
-              <a:lnSpc>
-                <a:spcPct val="120000"/>
-              </a:lnSpc>
-              <a:buNone/>
-            </a:pPr>
-            <a:r>
-              <a:rPr lang="en-US" sz="2100" dirty="0">
-                <a:solidFill>
-                  <a:srgbClr val="1C2340"/>
-                </a:solidFill>
-                <a:latin typeface="Calibri" pitchFamily="34" charset="0"/>
-                <a:ea typeface="Calibri" pitchFamily="34" charset="-122"/>
-                <a:cs typeface="Calibri" pitchFamily="34" charset="-120"/>
-              </a:rPr>
-              <a:t>and return change; if short, say so and keep the money; if sold out, say so. </a:t>
-            </a:r>
-            <a:pPr indent="0" marL="0">
-              <a:lnSpc>
-                <a:spcPct val="120000"/>
-              </a:lnSpc>
-              <a:buNone/>
-            </a:pPr>
-            <a:r>
-              <a:rPr lang="en-US" sz="2100" b="1" dirty="0">
-                <a:solidFill>
-                  <a:srgbClr val="1E2761"/>
-                </a:solidFill>
-                <a:latin typeface="Calibri" pitchFamily="34" charset="0"/>
-                <a:ea typeface="Calibri" pitchFamily="34" charset="-122"/>
-                <a:cs typeface="Calibri" pitchFamily="34" charset="-120"/>
-              </a:rPr>
-              <a:t>Cancel </a:t>
-            </a:r>
-            <a:pPr indent="0" marL="0">
-              <a:lnSpc>
-                <a:spcPct val="120000"/>
-              </a:lnSpc>
-              <a:buNone/>
-            </a:pPr>
-            <a:r>
-              <a:rPr lang="en-US" sz="2100" dirty="0">
-                <a:solidFill>
-                  <a:srgbClr val="1C2340"/>
-                </a:solidFill>
-                <a:latin typeface="Calibri" pitchFamily="34" charset="0"/>
-                <a:ea typeface="Calibri" pitchFamily="34" charset="-122"/>
-                <a:cs typeface="Calibri" pitchFamily="34" charset="-120"/>
-              </a:rPr>
-              <a:t>any time for a full refund. After dispensing, return to idle.</a:t>
-            </a:r>
-            <a:endParaRPr lang="en-US" sz="2100" dirty="0"/>
-          </a:p>
-        </p:txBody>
-      </p:sp>
-      <p:sp>
-        <p:nvSpPr>
-          <p:cNvPr id="6" name="Text 4"/>
-          <p:cNvSpPr/>
-          <p:nvPr/>
-        </p:nvSpPr>
-        <p:spPr>
-          <a:xfrm>
-            <a:off x="548640" y="4709160"/>
-            <a:ext cx="11064240" cy="731520"/>
-          </a:xfrm>
-          <a:prstGeom prst="rect">
-            <a:avLst/>
-          </a:prstGeom>
-          <a:noFill/>
-          <a:ln/>
-        </p:spPr>
-        <p:txBody>
-          <a:bodyPr wrap="square" lIns="0" tIns="0" rIns="0" bIns="0" rtlCol="0" anchor="ctr"/>
-          <a:lstStyle/>
-          <a:p>
-            <a:pPr indent="0" marL="0">
-              <a:lnSpc>
-                <a:spcPct val="105000"/>
-              </a:lnSpc>
-              <a:buNone/>
-            </a:pPr>
-            <a:r>
-              <a:rPr lang="en-US" sz="1600" i="1" dirty="0">
-                <a:solidFill>
-                  <a:srgbClr val="5C6690"/>
-                </a:solidFill>
-                <a:latin typeface="Calibri" pitchFamily="34" charset="0"/>
-                <a:ea typeface="Calibri" pitchFamily="34" charset="-122"/>
-                <a:cs typeface="Calibri" pitchFamily="34" charset="-120"/>
-              </a:rPr>
-              <a:t>That paragraph is all a domain expert needs to hand over. The work is turning it into something complete and disjoint — which is where the agent earns its keep.</a:t>
-            </a:r>
-            <a:endParaRPr lang="en-US" sz="1600" dirty="0"/>
+              <a:t>Display, coin buttons, product grid, cancel. The audience can predict it — so the output feels verified, not magic.</a:t>
+            </a:r>
+            <a:endParaRPr lang="en-US" sz="1450" dirty="0"/>
           </a:p>
         </p:txBody>
       </p:sp>
@@ -8148,7 +8944,7 @@
                 <a:ea typeface="Calibri" pitchFamily="34" charset="-122"/>
                 <a:cs typeface="Calibri" pitchFamily="34" charset="-120"/>
               </a:rPr>
-              <a:t>STEP 2 — THE REVIEWED SPEC</a:t>
+              <a:t>STEP 1 — WHAT THE DOMAIN EXPERT GIVES YOU</a:t>
             </a:r>
             <a:endParaRPr lang="en-US" sz="1200" dirty="0"/>
           </a:p>
@@ -8187,6 +8983,387 @@
                 <a:ea typeface="Cambria" pitchFamily="34" charset="-122"/>
                 <a:cs typeface="Cambria" pitchFamily="34" charset="-120"/>
               </a:rPr>
+              <a:t>The brief, in plain English</a:t>
+            </a:r>
+            <a:endParaRPr lang="en-US" sz="3400" dirty="0"/>
+          </a:p>
+        </p:txBody>
+      </p:sp>
+      <p:sp>
+        <p:nvSpPr>
+          <p:cNvPr id="4" name="Shape 2"/>
+          <p:cNvSpPr/>
+          <p:nvPr/>
+        </p:nvSpPr>
+        <p:spPr>
+          <a:xfrm>
+            <a:off x="548640" y="1828800"/>
+            <a:ext cx="11064240" cy="2468880"/>
+          </a:xfrm>
+          <a:prstGeom prst="roundRect">
+            <a:avLst>
+              <a:gd name="adj" fmla="val 4444"/>
+            </a:avLst>
+          </a:prstGeom>
+          <a:solidFill>
+            <a:srgbClr val="FFF6E9"/>
+          </a:solidFill>
+          <a:ln w="12700">
+            <a:solidFill>
+              <a:srgbClr val="F2D9AE"/>
+            </a:solidFill>
+            <a:prstDash val="solid"/>
+          </a:ln>
+          <a:effectLst>
+            <a:outerShdw sx="100000" sy="100000" kx="0" ky="0" algn="bl" rotWithShape="0" blurRad="101600" dist="38100" dir="5400000">
+              <a:srgbClr val="9AA3C8">
+                <a:alpha val="35000"/>
+              </a:srgbClr>
+            </a:outerShdw>
+          </a:effectLst>
+        </p:spPr>
+      </p:sp>
+      <p:sp>
+        <p:nvSpPr>
+          <p:cNvPr id="5" name="Text 3"/>
+          <p:cNvSpPr/>
+          <p:nvPr/>
+        </p:nvSpPr>
+        <p:spPr>
+          <a:xfrm>
+            <a:off x="914400" y="2103120"/>
+            <a:ext cx="10332720" cy="1920240"/>
+          </a:xfrm>
+          <a:prstGeom prst="rect">
+            <a:avLst/>
+          </a:prstGeom>
+          <a:noFill/>
+          <a:ln/>
+        </p:spPr>
+        <p:txBody>
+          <a:bodyPr wrap="square" lIns="0" tIns="0" rIns="0" bIns="0" rtlCol="0" anchor="ctr"/>
+          <a:lstStyle/>
+          <a:p>
+            <a:pPr indent="0" marL="0">
+              <a:lnSpc>
+                <a:spcPct val="120000"/>
+              </a:lnSpc>
+              <a:buNone/>
+            </a:pPr>
+            <a:r>
+              <a:rPr lang="en-US" sz="2100" b="1" dirty="0">
+                <a:solidFill>
+                  <a:srgbClr val="1E2761"/>
+                </a:solidFill>
+                <a:latin typeface="Calibri" pitchFamily="34" charset="0"/>
+                <a:ea typeface="Calibri" pitchFamily="34" charset="-122"/>
+                <a:cs typeface="Calibri" pitchFamily="34" charset="-120"/>
+              </a:rPr>
+              <a:t>Idle </a:t>
+            </a:r>
+            <a:pPr indent="0" marL="0">
+              <a:lnSpc>
+                <a:spcPct val="120000"/>
+              </a:lnSpc>
+              <a:buNone/>
+            </a:pPr>
+            <a:r>
+              <a:rPr lang="en-US" sz="2100" dirty="0">
+                <a:solidFill>
+                  <a:srgbClr val="1C2340"/>
+                </a:solidFill>
+                <a:latin typeface="Calibri" pitchFamily="34" charset="0"/>
+                <a:ea typeface="Calibri" pitchFamily="34" charset="-122"/>
+                <a:cs typeface="Calibri" pitchFamily="34" charset="-120"/>
+              </a:rPr>
+              <a:t>until coins go in. As they do, it </a:t>
+            </a:r>
+            <a:pPr indent="0" marL="0">
+              <a:lnSpc>
+                <a:spcPct val="120000"/>
+              </a:lnSpc>
+              <a:buNone/>
+            </a:pPr>
+            <a:r>
+              <a:rPr lang="en-US" sz="2100" b="1" dirty="0">
+                <a:solidFill>
+                  <a:srgbClr val="1E2761"/>
+                </a:solidFill>
+                <a:latin typeface="Calibri" pitchFamily="34" charset="0"/>
+                <a:ea typeface="Calibri" pitchFamily="34" charset="-122"/>
+                <a:cs typeface="Calibri" pitchFamily="34" charset="-120"/>
+              </a:rPr>
+              <a:t>collects </a:t>
+            </a:r>
+            <a:pPr indent="0" marL="0">
+              <a:lnSpc>
+                <a:spcPct val="120000"/>
+              </a:lnSpc>
+              <a:buNone/>
+            </a:pPr>
+            <a:r>
+              <a:rPr lang="en-US" sz="2100" dirty="0">
+                <a:solidFill>
+                  <a:srgbClr val="1C2340"/>
+                </a:solidFill>
+                <a:latin typeface="Calibri" pitchFamily="34" charset="0"/>
+                <a:ea typeface="Calibri" pitchFamily="34" charset="-122"/>
+                <a:cs typeface="Calibri" pitchFamily="34" charset="-120"/>
+              </a:rPr>
+              <a:t>a balance. On </a:t>
+            </a:r>
+            <a:pPr indent="0" marL="0">
+              <a:lnSpc>
+                <a:spcPct val="120000"/>
+              </a:lnSpc>
+              <a:buNone/>
+            </a:pPr>
+            <a:r>
+              <a:rPr lang="en-US" sz="2100" b="1" dirty="0">
+                <a:solidFill>
+                  <a:srgbClr val="1E2761"/>
+                </a:solidFill>
+                <a:latin typeface="Calibri" pitchFamily="34" charset="0"/>
+                <a:ea typeface="Calibri" pitchFamily="34" charset="-122"/>
+                <a:cs typeface="Calibri" pitchFamily="34" charset="-120"/>
+              </a:rPr>
+              <a:t>select</a:t>
+            </a:r>
+            <a:pPr indent="0" marL="0">
+              <a:lnSpc>
+                <a:spcPct val="120000"/>
+              </a:lnSpc>
+              <a:buNone/>
+            </a:pPr>
+            <a:r>
+              <a:rPr lang="en-US" sz="2100" dirty="0">
+                <a:solidFill>
+                  <a:srgbClr val="1C2340"/>
+                </a:solidFill>
+                <a:latin typeface="Calibri" pitchFamily="34" charset="0"/>
+                <a:ea typeface="Calibri" pitchFamily="34" charset="-122"/>
+                <a:cs typeface="Calibri" pitchFamily="34" charset="-120"/>
+              </a:rPr>
+              <a:t>: if it's in stock and the balance covers the price, </a:t>
+            </a:r>
+            <a:pPr indent="0" marL="0">
+              <a:lnSpc>
+                <a:spcPct val="120000"/>
+              </a:lnSpc>
+              <a:buNone/>
+            </a:pPr>
+            <a:r>
+              <a:rPr lang="en-US" sz="2100" b="1" dirty="0">
+                <a:solidFill>
+                  <a:srgbClr val="1E2761"/>
+                </a:solidFill>
+                <a:latin typeface="Calibri" pitchFamily="34" charset="0"/>
+                <a:ea typeface="Calibri" pitchFamily="34" charset="-122"/>
+                <a:cs typeface="Calibri" pitchFamily="34" charset="-120"/>
+              </a:rPr>
+              <a:t>dispense </a:t>
+            </a:r>
+            <a:pPr indent="0" marL="0">
+              <a:lnSpc>
+                <a:spcPct val="120000"/>
+              </a:lnSpc>
+              <a:buNone/>
+            </a:pPr>
+            <a:r>
+              <a:rPr lang="en-US" sz="2100" dirty="0">
+                <a:solidFill>
+                  <a:srgbClr val="1C2340"/>
+                </a:solidFill>
+                <a:latin typeface="Calibri" pitchFamily="34" charset="0"/>
+                <a:ea typeface="Calibri" pitchFamily="34" charset="-122"/>
+                <a:cs typeface="Calibri" pitchFamily="34" charset="-120"/>
+              </a:rPr>
+              <a:t>and return change; if short, say so and keep the money; if sold out, say so. </a:t>
+            </a:r>
+            <a:pPr indent="0" marL="0">
+              <a:lnSpc>
+                <a:spcPct val="120000"/>
+              </a:lnSpc>
+              <a:buNone/>
+            </a:pPr>
+            <a:r>
+              <a:rPr lang="en-US" sz="2100" b="1" dirty="0">
+                <a:solidFill>
+                  <a:srgbClr val="1E2761"/>
+                </a:solidFill>
+                <a:latin typeface="Calibri" pitchFamily="34" charset="0"/>
+                <a:ea typeface="Calibri" pitchFamily="34" charset="-122"/>
+                <a:cs typeface="Calibri" pitchFamily="34" charset="-120"/>
+              </a:rPr>
+              <a:t>Cancel </a:t>
+            </a:r>
+            <a:pPr indent="0" marL="0">
+              <a:lnSpc>
+                <a:spcPct val="120000"/>
+              </a:lnSpc>
+              <a:buNone/>
+            </a:pPr>
+            <a:r>
+              <a:rPr lang="en-US" sz="2100" dirty="0">
+                <a:solidFill>
+                  <a:srgbClr val="1C2340"/>
+                </a:solidFill>
+                <a:latin typeface="Calibri" pitchFamily="34" charset="0"/>
+                <a:ea typeface="Calibri" pitchFamily="34" charset="-122"/>
+                <a:cs typeface="Calibri" pitchFamily="34" charset="-120"/>
+              </a:rPr>
+              <a:t>any time for a full refund. After dispensing, return to idle.</a:t>
+            </a:r>
+            <a:endParaRPr lang="en-US" sz="2100" dirty="0"/>
+          </a:p>
+        </p:txBody>
+      </p:sp>
+      <p:sp>
+        <p:nvSpPr>
+          <p:cNvPr id="6" name="Text 4"/>
+          <p:cNvSpPr/>
+          <p:nvPr/>
+        </p:nvSpPr>
+        <p:spPr>
+          <a:xfrm>
+            <a:off x="548640" y="4709160"/>
+            <a:ext cx="11064240" cy="731520"/>
+          </a:xfrm>
+          <a:prstGeom prst="rect">
+            <a:avLst/>
+          </a:prstGeom>
+          <a:noFill/>
+          <a:ln/>
+        </p:spPr>
+        <p:txBody>
+          <a:bodyPr wrap="square" lIns="0" tIns="0" rIns="0" bIns="0" rtlCol="0" anchor="ctr"/>
+          <a:lstStyle/>
+          <a:p>
+            <a:pPr indent="0" marL="0">
+              <a:lnSpc>
+                <a:spcPct val="105000"/>
+              </a:lnSpc>
+              <a:buNone/>
+            </a:pPr>
+            <a:r>
+              <a:rPr lang="en-US" sz="1600" i="1" dirty="0">
+                <a:solidFill>
+                  <a:srgbClr val="5C6690"/>
+                </a:solidFill>
+                <a:latin typeface="Calibri" pitchFamily="34" charset="0"/>
+                <a:ea typeface="Calibri" pitchFamily="34" charset="-122"/>
+                <a:cs typeface="Calibri" pitchFamily="34" charset="-120"/>
+              </a:rPr>
+              <a:t>That paragraph is all a domain expert needs to hand over. The work is turning it into something complete and disjoint — which is where the agent earns its keep.</a:t>
+            </a:r>
+            <a:endParaRPr lang="en-US" sz="1600" dirty="0"/>
+          </a:p>
+        </p:txBody>
+      </p:sp>
+    </p:spTree>
+  </p:cSld>
+  <p:clrMapOvr>
+    <a:masterClrMapping/>
+  </p:clrMapOvr>
+</p:sld>
+</file>
+
+<file path=ppt/slides/slide7.xml><?xml version="1.0" encoding="utf-8"?>
+<p:sld xmlns:a="http://schemas.openxmlformats.org/drawingml/2006/main" xmlns:r="http://schemas.openxmlformats.org/officeDocument/2006/relationships" xmlns:p="http://schemas.openxmlformats.org/presentationml/2006/main">
+  <p:cSld name="Slide 7">
+    <p:bg>
+      <p:bgPr>
+        <a:solidFill>
+          <a:srgbClr val="F6F7FC"/>
+        </a:solidFill>
+      </p:bgPr>
+    </p:bg>
+    <p:spTree>
+      <p:nvGrpSpPr>
+        <p:cNvPr id="1" name=""/>
+        <p:cNvGrpSpPr/>
+        <p:nvPr/>
+      </p:nvGrpSpPr>
+      <p:grpSpPr>
+        <a:xfrm>
+          <a:off x="0" y="0"/>
+          <a:ext cx="0" cy="0"/>
+          <a:chOff x="0" y="0"/>
+          <a:chExt cx="0" cy="0"/>
+        </a:xfrm>
+      </p:grpSpPr>
+      <p:sp>
+        <p:nvSpPr>
+          <p:cNvPr id="2" name="Text 0"/>
+          <p:cNvSpPr/>
+          <p:nvPr/>
+        </p:nvSpPr>
+        <p:spPr>
+          <a:xfrm>
+            <a:off x="548640" y="411480"/>
+            <a:ext cx="11064240" cy="274320"/>
+          </a:xfrm>
+          <a:prstGeom prst="rect">
+            <a:avLst/>
+          </a:prstGeom>
+          <a:noFill/>
+          <a:ln/>
+        </p:spPr>
+        <p:txBody>
+          <a:bodyPr wrap="square" lIns="0" tIns="0" rIns="0" bIns="0" rtlCol="0" anchor="ctr"/>
+          <a:lstStyle/>
+          <a:p>
+            <a:pPr algn="l" indent="0" marL="0">
+              <a:buNone/>
+            </a:pPr>
+            <a:r>
+              <a:rPr lang="en-US" sz="1200" b="1" spc="200" kern="0" dirty="0">
+                <a:solidFill>
+                  <a:srgbClr val="F7A32B"/>
+                </a:solidFill>
+                <a:latin typeface="Calibri" pitchFamily="34" charset="0"/>
+                <a:ea typeface="Calibri" pitchFamily="34" charset="-122"/>
+                <a:cs typeface="Calibri" pitchFamily="34" charset="-120"/>
+              </a:rPr>
+              <a:t>STEP 2 — THE REVIEWED SPEC</a:t>
+            </a:r>
+            <a:endParaRPr lang="en-US" sz="1200" dirty="0"/>
+          </a:p>
+        </p:txBody>
+      </p:sp>
+      <p:sp>
+        <p:nvSpPr>
+          <p:cNvPr id="3" name="Text 1"/>
+          <p:cNvSpPr/>
+          <p:nvPr/>
+        </p:nvSpPr>
+        <p:spPr>
+          <a:xfrm>
+            <a:off x="548640" y="658368"/>
+            <a:ext cx="11064240" cy="777240"/>
+          </a:xfrm>
+          <a:prstGeom prst="rect">
+            <a:avLst/>
+          </a:prstGeom>
+          <a:noFill/>
+          <a:ln/>
+        </p:spPr>
+        <p:txBody>
+          <a:bodyPr wrap="square" lIns="0" tIns="0" rIns="0" bIns="0" rtlCol="0" anchor="ctr"/>
+          <a:lstStyle/>
+          <a:p>
+            <a:pPr algn="l" indent="0" marL="0">
+              <a:buNone/>
+            </a:pPr>
+            <a:r>
+              <a:rPr lang="en-US" sz="3400" b="1" dirty="0">
+                <a:solidFill>
+                  <a:srgbClr val="1E2761"/>
+                </a:solidFill>
+                <a:latin typeface="Cambria" pitchFamily="34" charset="0"/>
+                <a:ea typeface="Cambria" pitchFamily="34" charset="-122"/>
+                <a:cs typeface="Cambria" pitchFamily="34" charset="-120"/>
+              </a:rPr>
               <a:t>The Parnas table (a Mealy machine)</a:t>
             </a:r>
             <a:endParaRPr lang="en-US" sz="3400" dirty="0"/>
@@ -8195,7 +9372,7 @@
       </p:sp>
       <p:graphicFrame>
         <p:nvGraphicFramePr>
-          <p:cNvPr id="7" name="Table 0"/>
+          <p:cNvPr id="8" name="Table 0"/>
           <p:cNvGraphicFramePr>
             <a:graphicFrameLocks noGrp="1"/>
           </p:cNvGraphicFramePr>
@@ -12308,9 +13485,9 @@
 </p:sld>
 </file>
 
-<file path=ppt/slides/slide7.xml><?xml version="1.0" encoding="utf-8"?>
+<file path=ppt/slides/slide8.xml><?xml version="1.0" encoding="utf-8"?>
 <p:sld xmlns:a="http://schemas.openxmlformats.org/drawingml/2006/main" xmlns:r="http://schemas.openxmlformats.org/officeDocument/2006/relationships" xmlns:p="http://schemas.openxmlformats.org/presentationml/2006/main">
-  <p:cSld name="Slide 7">
+  <p:cSld name="Slide 8">
     <p:bg>
       <p:bgPr>
         <a:solidFill>
@@ -12412,7 +13589,7 @@
       </p:sp>
       <p:graphicFrame>
         <p:nvGraphicFramePr>
-          <p:cNvPr id="8" name="Table 0"/>
+          <p:cNvPr id="9" name="Table 0"/>
           <p:cNvGraphicFramePr>
             <a:graphicFrameLocks noGrp="1"/>
           </p:cNvGraphicFramePr>
@@ -13868,9 +15045,9 @@
 </p:sld>
 </file>
 
-<file path=ppt/slides/slide8.xml><?xml version="1.0" encoding="utf-8"?>
+<file path=ppt/slides/slide9.xml><?xml version="1.0" encoding="utf-8"?>
 <p:sld xmlns:a="http://schemas.openxmlformats.org/drawingml/2006/main" xmlns:r="http://schemas.openxmlformats.org/officeDocument/2006/relationships" xmlns:p="http://schemas.openxmlformats.org/presentationml/2006/main">
-  <p:cSld name="Slide 8">
+  <p:cSld name="Slide 9">
     <p:bg>
       <p:bgPr>
         <a:solidFill>
@@ -14581,590 +15758,6 @@
               <a:t>A flowchart hides this three-way split inside imperative if/else. A table makes the partition something you can point at — and prove.</a:t>
             </a:r>
             <a:endParaRPr lang="en-US" sz="1600" dirty="0"/>
-          </a:p>
-        </p:txBody>
-      </p:sp>
-    </p:spTree>
-  </p:cSld>
-  <p:clrMapOvr>
-    <a:masterClrMapping/>
-  </p:clrMapOvr>
-</p:sld>
-</file>
-
-<file path=ppt/slides/slide9.xml><?xml version="1.0" encoding="utf-8"?>
-<p:sld xmlns:a="http://schemas.openxmlformats.org/drawingml/2006/main" xmlns:r="http://schemas.openxmlformats.org/officeDocument/2006/relationships" xmlns:p="http://schemas.openxmlformats.org/presentationml/2006/main">
-  <p:cSld name="Slide 9">
-    <p:bg>
-      <p:bgPr>
-        <a:solidFill>
-          <a:srgbClr val="141937"/>
-        </a:solidFill>
-      </p:bgPr>
-    </p:bg>
-    <p:spTree>
-      <p:nvGrpSpPr>
-        <p:cNvPr id="1" name=""/>
-        <p:cNvGrpSpPr/>
-        <p:nvPr/>
-      </p:nvGrpSpPr>
-      <p:grpSpPr>
-        <a:xfrm>
-          <a:off x="0" y="0"/>
-          <a:ext cx="0" cy="0"/>
-          <a:chOff x="0" y="0"/>
-          <a:chExt cx="0" cy="0"/>
-        </a:xfrm>
-      </p:grpSpPr>
-      <p:sp>
-        <p:nvSpPr>
-          <p:cNvPr id="2" name="Text 0"/>
-          <p:cNvSpPr/>
-          <p:nvPr/>
-        </p:nvSpPr>
-        <p:spPr>
-          <a:xfrm>
-            <a:off x="548640" y="640080"/>
-            <a:ext cx="10058400" cy="365760"/>
-          </a:xfrm>
-          <a:prstGeom prst="rect">
-            <a:avLst/>
-          </a:prstGeom>
-          <a:noFill/>
-          <a:ln/>
-        </p:spPr>
-        <p:txBody>
-          <a:bodyPr wrap="square" lIns="0" tIns="0" rIns="0" bIns="0" rtlCol="0" anchor="ctr"/>
-          <a:lstStyle/>
-          <a:p>
-            <a:pPr indent="0" marL="0">
-              <a:buNone/>
-            </a:pPr>
-            <a:r>
-              <a:rPr lang="en-US" sz="1400" b="1" spc="300" kern="0" dirty="0">
-                <a:solidFill>
-                  <a:srgbClr val="F7A32B"/>
-                </a:solidFill>
-                <a:latin typeface="Calibri" pitchFamily="34" charset="0"/>
-                <a:ea typeface="Calibri" pitchFamily="34" charset="-122"/>
-                <a:cs typeface="Calibri" pitchFamily="34" charset="-120"/>
-              </a:rPr>
-              <a:t>XCODE 27 · AGENTIC CODING</a:t>
-            </a:r>
-            <a:endParaRPr lang="en-US" sz="1400" dirty="0"/>
-          </a:p>
-        </p:txBody>
-      </p:sp>
-      <p:sp>
-        <p:nvSpPr>
-          <p:cNvPr id="3" name="Text 1"/>
-          <p:cNvSpPr/>
-          <p:nvPr/>
-        </p:nvSpPr>
-        <p:spPr>
-          <a:xfrm>
-            <a:off x="548640" y="1005840"/>
-            <a:ext cx="10972800" cy="1005840"/>
-          </a:xfrm>
-          <a:prstGeom prst="rect">
-            <a:avLst/>
-          </a:prstGeom>
-          <a:noFill/>
-          <a:ln/>
-        </p:spPr>
-        <p:txBody>
-          <a:bodyPr wrap="square" lIns="0" tIns="0" rIns="0" bIns="0" rtlCol="0" anchor="ctr"/>
-          <a:lstStyle/>
-          <a:p>
-            <a:pPr indent="0" marL="0">
-              <a:lnSpc>
-                <a:spcPct val="102000"/>
-              </a:lnSpc>
-              <a:buNone/>
-            </a:pPr>
-            <a:r>
-              <a:rPr lang="en-US" sz="3200" b="1" dirty="0">
-                <a:solidFill>
-                  <a:srgbClr val="FFFFFF"/>
-                </a:solidFill>
-                <a:latin typeface="Cambria" pitchFamily="34" charset="0"/>
-                <a:ea typeface="Cambria" pitchFamily="34" charset="-122"/>
-                <a:cs typeface="Cambria" pitchFamily="34" charset="-120"/>
-              </a:rPr>
-              <a:t>The plan is an editable artifact you approve before any code</a:t>
-            </a:r>
-            <a:endParaRPr lang="en-US" sz="3200" dirty="0"/>
-          </a:p>
-        </p:txBody>
-      </p:sp>
-      <p:sp>
-        <p:nvSpPr>
-          <p:cNvPr id="4" name="Shape 2"/>
-          <p:cNvSpPr/>
-          <p:nvPr/>
-        </p:nvSpPr>
-        <p:spPr>
-          <a:xfrm>
-            <a:off x="548640" y="2286000"/>
-            <a:ext cx="5349240" cy="1417320"/>
-          </a:xfrm>
-          <a:prstGeom prst="roundRect">
-            <a:avLst>
-              <a:gd name="adj" fmla="val 6452"/>
-            </a:avLst>
-          </a:prstGeom>
-          <a:solidFill>
-            <a:srgbClr val="1E2554"/>
-          </a:solidFill>
-          <a:ln w="12700">
-            <a:solidFill>
-              <a:srgbClr val="343C74"/>
-            </a:solidFill>
-            <a:prstDash val="solid"/>
-          </a:ln>
-        </p:spPr>
-      </p:sp>
-      <p:sp>
-        <p:nvSpPr>
-          <p:cNvPr id="5" name="Text 3"/>
-          <p:cNvSpPr/>
-          <p:nvPr/>
-        </p:nvSpPr>
-        <p:spPr>
-          <a:xfrm>
-            <a:off x="822960" y="2468880"/>
-            <a:ext cx="4800600" cy="411480"/>
-          </a:xfrm>
-          <a:prstGeom prst="rect">
-            <a:avLst/>
-          </a:prstGeom>
-          <a:noFill/>
-          <a:ln/>
-        </p:spPr>
-        <p:txBody>
-          <a:bodyPr wrap="square" lIns="0" tIns="0" rIns="0" bIns="0" rtlCol="0" anchor="ctr"/>
-          <a:lstStyle/>
-          <a:p>
-            <a:pPr indent="0" marL="0">
-              <a:buNone/>
-            </a:pPr>
-            <a:r>
-              <a:rPr lang="en-US" sz="1800" b="1" dirty="0">
-                <a:solidFill>
-                  <a:srgbClr val="CADCFC"/>
-                </a:solidFill>
-                <a:latin typeface="Cambria" pitchFamily="34" charset="0"/>
-                <a:ea typeface="Cambria" pitchFamily="34" charset="-122"/>
-                <a:cs typeface="Cambria" pitchFamily="34" charset="-120"/>
-              </a:rPr>
-              <a:t>Agents take actions</a:t>
-            </a:r>
-            <a:endParaRPr lang="en-US" sz="1800" dirty="0"/>
-          </a:p>
-        </p:txBody>
-      </p:sp>
-      <p:sp>
-        <p:nvSpPr>
-          <p:cNvPr id="6" name="Text 4"/>
-          <p:cNvSpPr/>
-          <p:nvPr/>
-        </p:nvSpPr>
-        <p:spPr>
-          <a:xfrm>
-            <a:off x="822960" y="2907792"/>
-            <a:ext cx="4800600" cy="685800"/>
-          </a:xfrm>
-          <a:prstGeom prst="rect">
-            <a:avLst/>
-          </a:prstGeom>
-          <a:noFill/>
-          <a:ln/>
-        </p:spPr>
-        <p:txBody>
-          <a:bodyPr wrap="square" lIns="0" tIns="0" rIns="0" bIns="0" rtlCol="0" anchor="ctr"/>
-          <a:lstStyle/>
-          <a:p>
-            <a:pPr indent="0" marL="0">
-              <a:lnSpc>
-                <a:spcPct val="105000"/>
-              </a:lnSpc>
-              <a:buNone/>
-            </a:pPr>
-            <a:r>
-              <a:rPr lang="en-US" sz="1400" dirty="0">
-                <a:solidFill>
-                  <a:srgbClr val="C7CDEC"/>
-                </a:solidFill>
-                <a:latin typeface="Calibri" pitchFamily="34" charset="0"/>
-                <a:ea typeface="Calibri" pitchFamily="34" charset="-122"/>
-                <a:cs typeface="Calibri" pitchFamily="34" charset="-120"/>
-              </a:rPr>
-              <a:t>Plan features, edit across files, run tests, drive the simulator — not just autocomplete.</a:t>
-            </a:r>
-            <a:endParaRPr lang="en-US" sz="1400" dirty="0"/>
-          </a:p>
-        </p:txBody>
-      </p:sp>
-      <p:sp>
-        <p:nvSpPr>
-          <p:cNvPr id="7" name="Shape 5"/>
-          <p:cNvSpPr/>
-          <p:nvPr/>
-        </p:nvSpPr>
-        <p:spPr>
-          <a:xfrm>
-            <a:off x="6263640" y="2286000"/>
-            <a:ext cx="5349240" cy="1417320"/>
-          </a:xfrm>
-          <a:prstGeom prst="roundRect">
-            <a:avLst>
-              <a:gd name="adj" fmla="val 6452"/>
-            </a:avLst>
-          </a:prstGeom>
-          <a:solidFill>
-            <a:srgbClr val="1E2554"/>
-          </a:solidFill>
-          <a:ln w="12700">
-            <a:solidFill>
-              <a:srgbClr val="343C74"/>
-            </a:solidFill>
-            <a:prstDash val="solid"/>
-          </a:ln>
-        </p:spPr>
-      </p:sp>
-      <p:sp>
-        <p:nvSpPr>
-          <p:cNvPr id="8" name="Text 6"/>
-          <p:cNvSpPr/>
-          <p:nvPr/>
-        </p:nvSpPr>
-        <p:spPr>
-          <a:xfrm>
-            <a:off x="6537960" y="2468880"/>
-            <a:ext cx="4800600" cy="411480"/>
-          </a:xfrm>
-          <a:prstGeom prst="rect">
-            <a:avLst/>
-          </a:prstGeom>
-          <a:noFill/>
-          <a:ln/>
-        </p:spPr>
-        <p:txBody>
-          <a:bodyPr wrap="square" lIns="0" tIns="0" rIns="0" bIns="0" rtlCol="0" anchor="ctr"/>
-          <a:lstStyle/>
-          <a:p>
-            <a:pPr indent="0" marL="0">
-              <a:buNone/>
-            </a:pPr>
-            <a:r>
-              <a:rPr lang="en-US" sz="1800" b="1" dirty="0">
-                <a:solidFill>
-                  <a:srgbClr val="CADCFC"/>
-                </a:solidFill>
-                <a:latin typeface="Cambria" pitchFamily="34" charset="0"/>
-                <a:ea typeface="Cambria" pitchFamily="34" charset="-122"/>
-                <a:cs typeface="Cambria" pitchFamily="34" charset="-120"/>
-              </a:rPr>
-              <a:t>Plan = Markdown you edit</a:t>
-            </a:r>
-            <a:endParaRPr lang="en-US" sz="1800" dirty="0"/>
-          </a:p>
-        </p:txBody>
-      </p:sp>
-      <p:sp>
-        <p:nvSpPr>
-          <p:cNvPr id="9" name="Text 7"/>
-          <p:cNvSpPr/>
-          <p:nvPr/>
-        </p:nvSpPr>
-        <p:spPr>
-          <a:xfrm>
-            <a:off x="6537960" y="2907792"/>
-            <a:ext cx="4800600" cy="685800"/>
-          </a:xfrm>
-          <a:prstGeom prst="rect">
-            <a:avLst/>
-          </a:prstGeom>
-          <a:noFill/>
-          <a:ln/>
-        </p:spPr>
-        <p:txBody>
-          <a:bodyPr wrap="square" lIns="0" tIns="0" rIns="0" bIns="0" rtlCol="0" anchor="ctr"/>
-          <a:lstStyle/>
-          <a:p>
-            <a:pPr indent="0" marL="0">
-              <a:lnSpc>
-                <a:spcPct val="105000"/>
-              </a:lnSpc>
-              <a:buNone/>
-            </a:pPr>
-            <a:r>
-              <a:rPr lang="en-US" sz="1400" dirty="0">
-                <a:solidFill>
-                  <a:srgbClr val="C7CDEC"/>
-                </a:solidFill>
-                <a:latin typeface="Calibri" pitchFamily="34" charset="0"/>
-                <a:ea typeface="Calibri" pitchFamily="34" charset="-122"/>
-                <a:cs typeface="Calibri" pitchFamily="34" charset="-120"/>
-              </a:rPr>
-              <a:t>The agent's plan appears as an editable artifact. You review and adjust it before it acts.</a:t>
-            </a:r>
-            <a:endParaRPr lang="en-US" sz="1400" dirty="0"/>
-          </a:p>
-        </p:txBody>
-      </p:sp>
-      <p:sp>
-        <p:nvSpPr>
-          <p:cNvPr id="10" name="Shape 8"/>
-          <p:cNvSpPr/>
-          <p:nvPr/>
-        </p:nvSpPr>
-        <p:spPr>
-          <a:xfrm>
-            <a:off x="548640" y="3977640"/>
-            <a:ext cx="5349240" cy="1417320"/>
-          </a:xfrm>
-          <a:prstGeom prst="roundRect">
-            <a:avLst>
-              <a:gd name="adj" fmla="val 6452"/>
-            </a:avLst>
-          </a:prstGeom>
-          <a:solidFill>
-            <a:srgbClr val="1E2554"/>
-          </a:solidFill>
-          <a:ln w="12700">
-            <a:solidFill>
-              <a:srgbClr val="343C74"/>
-            </a:solidFill>
-            <a:prstDash val="solid"/>
-          </a:ln>
-        </p:spPr>
-      </p:sp>
-      <p:sp>
-        <p:nvSpPr>
-          <p:cNvPr id="11" name="Text 9"/>
-          <p:cNvSpPr/>
-          <p:nvPr/>
-        </p:nvSpPr>
-        <p:spPr>
-          <a:xfrm>
-            <a:off x="822960" y="4160520"/>
-            <a:ext cx="4800600" cy="411480"/>
-          </a:xfrm>
-          <a:prstGeom prst="rect">
-            <a:avLst/>
-          </a:prstGeom>
-          <a:noFill/>
-          <a:ln/>
-        </p:spPr>
-        <p:txBody>
-          <a:bodyPr wrap="square" lIns="0" tIns="0" rIns="0" bIns="0" rtlCol="0" anchor="ctr"/>
-          <a:lstStyle/>
-          <a:p>
-            <a:pPr indent="0" marL="0">
-              <a:buNone/>
-            </a:pPr>
-            <a:r>
-              <a:rPr lang="en-US" sz="1800" b="1" dirty="0">
-                <a:solidFill>
-                  <a:srgbClr val="CADCFC"/>
-                </a:solidFill>
-                <a:latin typeface="Cambria" pitchFamily="34" charset="0"/>
-                <a:ea typeface="Cambria" pitchFamily="34" charset="-122"/>
-                <a:cs typeface="Cambria" pitchFamily="34" charset="-120"/>
-              </a:rPr>
-              <a:t>Changes &amp; artifacts are visible</a:t>
-            </a:r>
-            <a:endParaRPr lang="en-US" sz="1800" dirty="0"/>
-          </a:p>
-        </p:txBody>
-      </p:sp>
-      <p:sp>
-        <p:nvSpPr>
-          <p:cNvPr id="12" name="Text 10"/>
-          <p:cNvSpPr/>
-          <p:nvPr/>
-        </p:nvSpPr>
-        <p:spPr>
-          <a:xfrm>
-            <a:off x="822960" y="4599432"/>
-            <a:ext cx="4800600" cy="685800"/>
-          </a:xfrm>
-          <a:prstGeom prst="rect">
-            <a:avLst/>
-          </a:prstGeom>
-          <a:noFill/>
-          <a:ln/>
-        </p:spPr>
-        <p:txBody>
-          <a:bodyPr wrap="square" lIns="0" tIns="0" rIns="0" bIns="0" rtlCol="0" anchor="ctr"/>
-          <a:lstStyle/>
-          <a:p>
-            <a:pPr indent="0" marL="0">
-              <a:lnSpc>
-                <a:spcPct val="105000"/>
-              </a:lnSpc>
-              <a:buNone/>
-            </a:pPr>
-            <a:r>
-              <a:rPr lang="en-US" sz="1400" dirty="0">
-                <a:solidFill>
-                  <a:srgbClr val="C7CDEC"/>
-                </a:solidFill>
-                <a:latin typeface="Calibri" pitchFamily="34" charset="0"/>
-                <a:ea typeface="Calibri" pitchFamily="34" charset="-122"/>
-                <a:cs typeface="Calibri" pitchFamily="34" charset="-120"/>
-              </a:rPr>
-              <a:t>The editor shows exactly what the agent changed — “verify the diff” is a real moment.</a:t>
-            </a:r>
-            <a:endParaRPr lang="en-US" sz="1400" dirty="0"/>
-          </a:p>
-        </p:txBody>
-      </p:sp>
-      <p:sp>
-        <p:nvSpPr>
-          <p:cNvPr id="13" name="Shape 11"/>
-          <p:cNvSpPr/>
-          <p:nvPr/>
-        </p:nvSpPr>
-        <p:spPr>
-          <a:xfrm>
-            <a:off x="6263640" y="3977640"/>
-            <a:ext cx="5349240" cy="1417320"/>
-          </a:xfrm>
-          <a:prstGeom prst="roundRect">
-            <a:avLst>
-              <a:gd name="adj" fmla="val 6452"/>
-            </a:avLst>
-          </a:prstGeom>
-          <a:solidFill>
-            <a:srgbClr val="1E2554"/>
-          </a:solidFill>
-          <a:ln w="12700">
-            <a:solidFill>
-              <a:srgbClr val="343C74"/>
-            </a:solidFill>
-            <a:prstDash val="solid"/>
-          </a:ln>
-        </p:spPr>
-      </p:sp>
-      <p:sp>
-        <p:nvSpPr>
-          <p:cNvPr id="14" name="Text 12"/>
-          <p:cNvSpPr/>
-          <p:nvPr/>
-        </p:nvSpPr>
-        <p:spPr>
-          <a:xfrm>
-            <a:off x="6537960" y="4160520"/>
-            <a:ext cx="4800600" cy="411480"/>
-          </a:xfrm>
-          <a:prstGeom prst="rect">
-            <a:avLst/>
-          </a:prstGeom>
-          <a:noFill/>
-          <a:ln/>
-        </p:spPr>
-        <p:txBody>
-          <a:bodyPr wrap="square" lIns="0" tIns="0" rIns="0" bIns="0" rtlCol="0" anchor="ctr"/>
-          <a:lstStyle/>
-          <a:p>
-            <a:pPr indent="0" marL="0">
-              <a:buNone/>
-            </a:pPr>
-            <a:r>
-              <a:rPr lang="en-US" sz="1800" b="1" dirty="0">
-                <a:solidFill>
-                  <a:srgbClr val="CADCFC"/>
-                </a:solidFill>
-                <a:latin typeface="Cambria" pitchFamily="34" charset="0"/>
-                <a:ea typeface="Cambria" pitchFamily="34" charset="-122"/>
-                <a:cs typeface="Cambria" pitchFamily="34" charset="-120"/>
-              </a:rPr>
-              <a:t>Your model, Apple's skills</a:t>
-            </a:r>
-            <a:endParaRPr lang="en-US" sz="1800" dirty="0"/>
-          </a:p>
-        </p:txBody>
-      </p:sp>
-      <p:sp>
-        <p:nvSpPr>
-          <p:cNvPr id="15" name="Text 13"/>
-          <p:cNvSpPr/>
-          <p:nvPr/>
-        </p:nvSpPr>
-        <p:spPr>
-          <a:xfrm>
-            <a:off x="6537960" y="4599432"/>
-            <a:ext cx="4800600" cy="685800"/>
-          </a:xfrm>
-          <a:prstGeom prst="rect">
-            <a:avLst/>
-          </a:prstGeom>
-          <a:noFill/>
-          <a:ln/>
-        </p:spPr>
-        <p:txBody>
-          <a:bodyPr wrap="square" lIns="0" tIns="0" rIns="0" bIns="0" rtlCol="0" anchor="ctr"/>
-          <a:lstStyle/>
-          <a:p>
-            <a:pPr indent="0" marL="0">
-              <a:lnSpc>
-                <a:spcPct val="105000"/>
-              </a:lnSpc>
-              <a:buNone/>
-            </a:pPr>
-            <a:r>
-              <a:rPr lang="en-US" sz="1400" dirty="0">
-                <a:solidFill>
-                  <a:srgbClr val="C7CDEC"/>
-                </a:solidFill>
-                <a:latin typeface="Calibri" pitchFamily="34" charset="0"/>
-                <a:ea typeface="Calibri" pitchFamily="34" charset="-122"/>
-                <a:cs typeface="Calibri" pitchFamily="34" charset="-120"/>
-              </a:rPr>
-              <a:t>Anthropic / OpenAI / Google, plus Apple's bundled SwiftUI agent skills.</a:t>
-            </a:r>
-            <a:endParaRPr lang="en-US" sz="1400" dirty="0"/>
-          </a:p>
-        </p:txBody>
-      </p:sp>
-      <p:sp>
-        <p:nvSpPr>
-          <p:cNvPr id="16" name="Text 14"/>
-          <p:cNvSpPr/>
-          <p:nvPr/>
-        </p:nvSpPr>
-        <p:spPr>
-          <a:xfrm>
-            <a:off x="548640" y="5989320"/>
-            <a:ext cx="10972800" cy="457200"/>
-          </a:xfrm>
-          <a:prstGeom prst="rect">
-            <a:avLst/>
-          </a:prstGeom>
-          <a:noFill/>
-          <a:ln/>
-        </p:spPr>
-        <p:txBody>
-          <a:bodyPr wrap="square" lIns="0" tIns="0" rIns="0" bIns="0" rtlCol="0" anchor="ctr"/>
-          <a:lstStyle/>
-          <a:p>
-            <a:pPr indent="0" marL="0">
-              <a:buNone/>
-            </a:pPr>
-            <a:r>
-              <a:rPr lang="en-US" sz="1700" i="1" dirty="0">
-                <a:solidFill>
-                  <a:srgbClr val="F7A32B"/>
-                </a:solidFill>
-                <a:latin typeface="Calibri" pitchFamily="34" charset="0"/>
-                <a:ea typeface="Calibri" pitchFamily="34" charset="-122"/>
-                <a:cs typeface="Calibri" pitchFamily="34" charset="-120"/>
-              </a:rPr>
-              <a:t>“Review the spec, not the code” — now it's how the IDE works.</a:t>
-            </a:r>
-            <a:endParaRPr lang="en-US" sz="1700" dirty="0"/>
           </a:p>
         </p:txBody>
       </p:sp>
